--- a/slides/11-decision-trees.pptx
+++ b/slides/11-decision-trees.pptx
@@ -13,8 +13,8 @@
     <p:sldId id="260" r:id="rId4"/>
     <p:sldId id="262" r:id="rId5"/>
     <p:sldId id="261" r:id="rId6"/>
-    <p:sldId id="279" r:id="rId7"/>
-    <p:sldId id="263" r:id="rId8"/>
+    <p:sldId id="263" r:id="rId7"/>
+    <p:sldId id="279" r:id="rId8"/>
     <p:sldId id="264" r:id="rId9"/>
     <p:sldId id="265" r:id="rId10"/>
     <p:sldId id="266" r:id="rId11"/>
@@ -225,7 +225,7 @@
           <a:p>
             <a:fld id="{A5320152-7289-42ED-97D3-BBB411F9F8C0}" type="datetimeFigureOut">
               <a:rPr lang="en-US" smtClean="0"/>
-              <a:t>2/19/2026</a:t>
+              <a:t>2/24/2026</a:t>
             </a:fld>
             <a:endParaRPr lang="en-US"/>
           </a:p>
@@ -645,7 +645,7 @@
           <a:p>
             <a:fld id="{D1D1EADE-8E88-4C7C-8AC5-FB148DE4940E}" type="datetime1">
               <a:rPr lang="en-US" smtClean="0"/>
-              <a:t>2/19/2026</a:t>
+              <a:t>2/24/2026</a:t>
             </a:fld>
             <a:endParaRPr lang="en-US"/>
           </a:p>
@@ -845,7 +845,7 @@
           <a:p>
             <a:fld id="{EC3C8B9C-477D-492A-96AD-1FC2CC997A73}" type="datetime1">
               <a:rPr lang="en-US" smtClean="0"/>
-              <a:t>2/19/2026</a:t>
+              <a:t>2/24/2026</a:t>
             </a:fld>
             <a:endParaRPr lang="en-US"/>
           </a:p>
@@ -1055,7 +1055,7 @@
           <a:p>
             <a:fld id="{42D3AED5-E26D-4E29-B1B3-7847B6779594}" type="datetime1">
               <a:rPr lang="en-US" smtClean="0"/>
-              <a:t>2/19/2026</a:t>
+              <a:t>2/24/2026</a:t>
             </a:fld>
             <a:endParaRPr lang="en-US"/>
           </a:p>
@@ -1378,7 +1378,7 @@
           <a:p>
             <a:fld id="{157B6794-849E-4626-908B-D15793550EFB}" type="datetime1">
               <a:rPr lang="en-US" smtClean="0"/>
-              <a:t>2/19/2026</a:t>
+              <a:t>2/24/2026</a:t>
             </a:fld>
             <a:endParaRPr lang="en-US"/>
           </a:p>
@@ -1654,7 +1654,7 @@
           <a:p>
             <a:fld id="{63DB64E7-5594-42A3-ADBF-E95A7ACEAD64}" type="datetime1">
               <a:rPr lang="en-US" smtClean="0"/>
-              <a:t>2/19/2026</a:t>
+              <a:t>2/24/2026</a:t>
             </a:fld>
             <a:endParaRPr lang="en-US"/>
           </a:p>
@@ -1927,7 +1927,7 @@
           <a:p>
             <a:fld id="{18462B0B-D248-4FFB-8695-AD7FA4B1284A}" type="datetime1">
               <a:rPr lang="en-US" smtClean="0"/>
-              <a:t>2/19/2026</a:t>
+              <a:t>2/24/2026</a:t>
             </a:fld>
             <a:endParaRPr lang="en-US"/>
           </a:p>
@@ -2350,7 +2350,7 @@
           <a:p>
             <a:fld id="{D0378EFB-9159-4510-B73F-4F0409ADE937}" type="datetime1">
               <a:rPr lang="en-US" smtClean="0"/>
-              <a:t>2/19/2026</a:t>
+              <a:t>2/24/2026</a:t>
             </a:fld>
             <a:endParaRPr lang="en-US"/>
           </a:p>
@@ -2492,7 +2492,7 @@
           <a:p>
             <a:fld id="{89BC9412-2452-4BED-A324-9D8C115361AD}" type="datetime1">
               <a:rPr lang="en-US" smtClean="0"/>
-              <a:t>2/19/2026</a:t>
+              <a:t>2/24/2026</a:t>
             </a:fld>
             <a:endParaRPr lang="en-US"/>
           </a:p>
@@ -2605,7 +2605,7 @@
           <a:p>
             <a:fld id="{F5318F62-D251-40E8-A23C-F4CFE9FEAB41}" type="datetime1">
               <a:rPr lang="en-US" smtClean="0"/>
-              <a:t>2/19/2026</a:t>
+              <a:t>2/24/2026</a:t>
             </a:fld>
             <a:endParaRPr lang="en-US"/>
           </a:p>
@@ -2918,7 +2918,7 @@
           <a:p>
             <a:fld id="{44F76144-149E-4874-93A5-554A0357CF82}" type="datetime1">
               <a:rPr lang="en-US" smtClean="0"/>
-              <a:t>2/19/2026</a:t>
+              <a:t>2/24/2026</a:t>
             </a:fld>
             <a:endParaRPr lang="en-US"/>
           </a:p>
@@ -3211,7 +3211,7 @@
           <a:p>
             <a:fld id="{50BA65D8-0540-4835-AE5C-25D29DBA01BE}" type="datetime1">
               <a:rPr lang="en-US" smtClean="0"/>
-              <a:t>2/19/2026</a:t>
+              <a:t>2/24/2026</a:t>
             </a:fld>
             <a:endParaRPr lang="en-US"/>
           </a:p>
@@ -3453,7 +3453,7 @@
           <a:p>
             <a:fld id="{E31BA835-12AC-4E8F-955A-EA3F4DE2791F}" type="datetime1">
               <a:rPr lang="en-US" smtClean="0"/>
-              <a:t>2/19/2026</a:t>
+              <a:t>2/24/2026</a:t>
             </a:fld>
             <a:endParaRPr lang="en-US"/>
           </a:p>
@@ -4370,8 +4370,8 @@
           <a:chExt cx="0" cy="0"/>
         </a:xfrm>
       </p:grpSpPr>
-      <mc:AlternateContent xmlns:mc="http://schemas.openxmlformats.org/markup-compatibility/2006">
-        <mc:Choice xmlns:a14="http://schemas.microsoft.com/office/drawing/2010/main" Requires="a14">
+      <mc:AlternateContent xmlns:mc="http://schemas.openxmlformats.org/markup-compatibility/2006" xmlns:a14="http://schemas.microsoft.com/office/drawing/2010/main">
+        <mc:Choice Requires="a14">
           <p:sp>
             <p:nvSpPr>
               <p:cNvPr id="212" name="Ranges between 0 and   (where   is the number of classes)  (for binary classification, when  , max value is 0.5)…"/>
@@ -4404,7 +4404,16 @@
                         </a:solidFill>
                         <a:latin typeface="Cambria Math" panose="02040503050406030204" pitchFamily="18" charset="0"/>
                       </a:rPr>
-                      <m:t>1−</m:t>
+                      <m:t>1</m:t>
+                    </m:r>
+                    <m:r>
+                      <a:rPr sz="2285" i="1">
+                        <a:solidFill>
+                          <a:srgbClr val="000000"/>
+                        </a:solidFill>
+                        <a:latin typeface="Cambria Math" panose="02040503050406030204" pitchFamily="18" charset="0"/>
+                      </a:rPr>
+                      <m:t>−</m:t>
                     </m:r>
                     <m:f>
                       <m:fPr>
@@ -4491,7 +4500,16 @@
                         </a:solidFill>
                         <a:latin typeface="Cambria Math" panose="02040503050406030204" pitchFamily="18" charset="0"/>
                       </a:rPr>
-                      <m:t>=2</m:t>
+                      <m:t>=</m:t>
+                    </m:r>
+                    <m:r>
+                      <a:rPr sz="2285" i="1">
+                        <a:solidFill>
+                          <a:srgbClr val="000000"/>
+                        </a:solidFill>
+                        <a:latin typeface="Cambria Math" panose="02040503050406030204" pitchFamily="18" charset="0"/>
+                      </a:rPr>
+                      <m:t>2</m:t>
                     </m:r>
                   </m:oMath>
                 </a14:m>
@@ -4547,7 +4565,34 @@
                         </a:solidFill>
                         <a:latin typeface="Cambria Math" panose="02040503050406030204" pitchFamily="18" charset="0"/>
                       </a:rPr>
-                      <m:t>=0.5</m:t>
+                      <m:t>=</m:t>
+                    </m:r>
+                    <m:r>
+                      <a:rPr sz="2285" i="1">
+                        <a:solidFill>
+                          <a:srgbClr val="000000"/>
+                        </a:solidFill>
+                        <a:latin typeface="Cambria Math" panose="02040503050406030204" pitchFamily="18" charset="0"/>
+                      </a:rPr>
+                      <m:t>0</m:t>
+                    </m:r>
+                    <m:r>
+                      <a:rPr sz="2285" i="1">
+                        <a:solidFill>
+                          <a:srgbClr val="000000"/>
+                        </a:solidFill>
+                        <a:latin typeface="Cambria Math" panose="02040503050406030204" pitchFamily="18" charset="0"/>
+                      </a:rPr>
+                      <m:t>.</m:t>
+                    </m:r>
+                    <m:r>
+                      <a:rPr sz="2285" i="1">
+                        <a:solidFill>
+                          <a:srgbClr val="000000"/>
+                        </a:solidFill>
+                        <a:latin typeface="Cambria Math" panose="02040503050406030204" pitchFamily="18" charset="0"/>
+                      </a:rPr>
+                      <m:t>5</m:t>
                     </m:r>
                   </m:oMath>
                 </a14:m>
@@ -4559,7 +4604,7 @@
             </p:txBody>
           </p:sp>
         </mc:Choice>
-        <mc:Fallback>
+        <mc:Fallback xmlns="">
           <p:sp>
             <p:nvSpPr>
               <p:cNvPr id="212" name="Ranges between 0 and   (where   is the number of classes)  (for binary classification, when  , max value is 0.5)…"/>
@@ -5421,7 +5466,7 @@
           </a:ln>
           <a:extLst>
             <a:ext uri="{C572A759-6A51-4108-AA02-DFA0A04FC94B}">
-              <ma14:wrappingTextBoxFlag xmlns="" xmlns:m="http://schemas.openxmlformats.org/officeDocument/2006/math" xmlns:a14="http://schemas.microsoft.com/office/drawing/2010/main" xmlns:ma14="http://schemas.microsoft.com/office/mac/drawingml/2011/main" val="1"/>
+              <ma14:wrappingTextBoxFlag xmlns:ma14="http://schemas.microsoft.com/office/mac/drawingml/2011/main" xmlns:a14="http://schemas.microsoft.com/office/drawing/2010/main" xmlns:m="http://schemas.openxmlformats.org/officeDocument/2006/math" xmlns="" val="1"/>
             </a:ext>
           </a:extLst>
         </p:spPr>
@@ -5514,7 +5559,7 @@
           </a:ln>
           <a:extLst>
             <a:ext uri="{C572A759-6A51-4108-AA02-DFA0A04FC94B}">
-              <ma14:wrappingTextBoxFlag xmlns="" xmlns:m="http://schemas.openxmlformats.org/officeDocument/2006/math" xmlns:a14="http://schemas.microsoft.com/office/drawing/2010/main" xmlns:ma14="http://schemas.microsoft.com/office/mac/drawingml/2011/main" val="1"/>
+              <ma14:wrappingTextBoxFlag xmlns:ma14="http://schemas.microsoft.com/office/mac/drawingml/2011/main" xmlns:a14="http://schemas.microsoft.com/office/drawing/2010/main" xmlns:m="http://schemas.openxmlformats.org/officeDocument/2006/math" xmlns="" val="1"/>
             </a:ext>
           </a:extLst>
         </p:spPr>
@@ -5819,7 +5864,7 @@
           </a:ln>
           <a:extLst>
             <a:ext uri="{C572A759-6A51-4108-AA02-DFA0A04FC94B}">
-              <ma14:wrappingTextBoxFlag xmlns="" xmlns:m="http://schemas.openxmlformats.org/officeDocument/2006/math" xmlns:a14="http://schemas.microsoft.com/office/drawing/2010/main" xmlns:ma14="http://schemas.microsoft.com/office/mac/drawingml/2011/main" val="1"/>
+              <ma14:wrappingTextBoxFlag xmlns:ma14="http://schemas.microsoft.com/office/mac/drawingml/2011/main" xmlns:a14="http://schemas.microsoft.com/office/drawing/2010/main" xmlns:m="http://schemas.openxmlformats.org/officeDocument/2006/math" xmlns="" val="1"/>
             </a:ext>
           </a:extLst>
         </p:spPr>
@@ -5895,8 +5940,8 @@
           <a:chExt cx="0" cy="0"/>
         </a:xfrm>
       </p:grpSpPr>
-      <mc:AlternateContent xmlns:mc="http://schemas.openxmlformats.org/markup-compatibility/2006">
-        <mc:Choice xmlns:a14="http://schemas.microsoft.com/office/drawing/2010/main" Requires="a14">
+      <mc:AlternateContent xmlns:mc="http://schemas.openxmlformats.org/markup-compatibility/2006" xmlns:a14="http://schemas.microsoft.com/office/drawing/2010/main">
+        <mc:Choice Requires="a14">
           <p:sp>
             <p:nvSpPr>
               <p:cNvPr id="232" name="Cost complexity pruning (CCP)…"/>
@@ -6474,7 +6519,7 @@
             </p:txBody>
           </p:sp>
         </mc:Choice>
-        <mc:Fallback>
+        <mc:Fallback xmlns="">
           <p:sp>
             <p:nvSpPr>
               <p:cNvPr id="232" name="Cost complexity pruning (CCP)…"/>
@@ -6573,8 +6618,8 @@
           <a:chExt cx="0" cy="0"/>
         </a:xfrm>
       </p:grpSpPr>
-      <mc:AlternateContent xmlns:mc="http://schemas.openxmlformats.org/markup-compatibility/2006">
-        <mc:Choice xmlns:a14="http://schemas.microsoft.com/office/drawing/2010/main" Requires="a14">
+      <mc:AlternateContent xmlns:mc="http://schemas.openxmlformats.org/markup-compatibility/2006" xmlns:a14="http://schemas.microsoft.com/office/drawing/2010/main">
+        <mc:Choice Requires="a14">
           <p:sp>
             <p:nvSpPr>
               <p:cNvPr id="2" name="Text Placeholder 1">
@@ -6779,7 +6824,7 @@
             </p:txBody>
           </p:sp>
         </mc:Choice>
-        <mc:Fallback>
+        <mc:Fallback xmlns="">
           <p:sp>
             <p:nvSpPr>
               <p:cNvPr id="2" name="Text Placeholder 1">
@@ -6858,6 +6903,244 @@
     <a:masterClrMapping/>
   </p:clrMapOvr>
   <p:transition spd="med"/>
+  <p:timing>
+    <p:tnLst>
+      <p:par>
+        <p:cTn id="1" dur="indefinite" restart="never" nodeType="tmRoot">
+          <p:childTnLst>
+            <p:seq concurrent="1" nextAc="seek">
+              <p:cTn id="2" dur="indefinite" nodeType="mainSeq">
+                <p:childTnLst>
+                  <p:par>
+                    <p:cTn id="3" fill="hold">
+                      <p:stCondLst>
+                        <p:cond delay="indefinite"/>
+                      </p:stCondLst>
+                      <p:childTnLst>
+                        <p:par>
+                          <p:cTn id="4" fill="hold">
+                            <p:stCondLst>
+                              <p:cond delay="0"/>
+                            </p:stCondLst>
+                            <p:childTnLst>
+                              <p:par>
+                                <p:cTn id="5" presetID="10" presetClass="entr" presetSubtype="0" fill="hold" nodeType="clickEffect">
+                                  <p:stCondLst>
+                                    <p:cond delay="0"/>
+                                  </p:stCondLst>
+                                  <p:childTnLst>
+                                    <p:set>
+                                      <p:cBhvr>
+                                        <p:cTn id="6" dur="1" fill="hold">
+                                          <p:stCondLst>
+                                            <p:cond delay="0"/>
+                                          </p:stCondLst>
+                                        </p:cTn>
+                                        <p:tgtEl>
+                                          <p:spTgt spid="2">
+                                            <p:txEl>
+                                              <p:pRg st="2" end="2"/>
+                                            </p:txEl>
+                                          </p:spTgt>
+                                        </p:tgtEl>
+                                        <p:attrNameLst>
+                                          <p:attrName>style.visibility</p:attrName>
+                                        </p:attrNameLst>
+                                      </p:cBhvr>
+                                      <p:to>
+                                        <p:strVal val="visible"/>
+                                      </p:to>
+                                    </p:set>
+                                    <p:animEffect transition="in" filter="fade">
+                                      <p:cBhvr>
+                                        <p:cTn id="7" dur="500"/>
+                                        <p:tgtEl>
+                                          <p:spTgt spid="2">
+                                            <p:txEl>
+                                              <p:pRg st="2" end="2"/>
+                                            </p:txEl>
+                                          </p:spTgt>
+                                        </p:tgtEl>
+                                      </p:cBhvr>
+                                    </p:animEffect>
+                                  </p:childTnLst>
+                                </p:cTn>
+                              </p:par>
+                            </p:childTnLst>
+                          </p:cTn>
+                        </p:par>
+                      </p:childTnLst>
+                    </p:cTn>
+                  </p:par>
+                  <p:par>
+                    <p:cTn id="8" fill="hold">
+                      <p:stCondLst>
+                        <p:cond delay="indefinite"/>
+                      </p:stCondLst>
+                      <p:childTnLst>
+                        <p:par>
+                          <p:cTn id="9" fill="hold">
+                            <p:stCondLst>
+                              <p:cond delay="0"/>
+                            </p:stCondLst>
+                            <p:childTnLst>
+                              <p:par>
+                                <p:cTn id="10" presetID="1" presetClass="entr" presetSubtype="0" fill="hold" nodeType="clickEffect">
+                                  <p:stCondLst>
+                                    <p:cond delay="0"/>
+                                  </p:stCondLst>
+                                  <p:childTnLst>
+                                    <p:set>
+                                      <p:cBhvr>
+                                        <p:cTn id="11" dur="1" fill="hold">
+                                          <p:stCondLst>
+                                            <p:cond delay="0"/>
+                                          </p:stCondLst>
+                                        </p:cTn>
+                                        <p:tgtEl>
+                                          <p:spTgt spid="2">
+                                            <p:txEl>
+                                              <p:pRg st="3" end="3"/>
+                                            </p:txEl>
+                                          </p:spTgt>
+                                        </p:tgtEl>
+                                        <p:attrNameLst>
+                                          <p:attrName>style.visibility</p:attrName>
+                                        </p:attrNameLst>
+                                      </p:cBhvr>
+                                      <p:to>
+                                        <p:strVal val="visible"/>
+                                      </p:to>
+                                    </p:set>
+                                  </p:childTnLst>
+                                </p:cTn>
+                              </p:par>
+                            </p:childTnLst>
+                          </p:cTn>
+                        </p:par>
+                      </p:childTnLst>
+                    </p:cTn>
+                  </p:par>
+                  <p:par>
+                    <p:cTn id="12" fill="hold">
+                      <p:stCondLst>
+                        <p:cond delay="indefinite"/>
+                      </p:stCondLst>
+                      <p:childTnLst>
+                        <p:par>
+                          <p:cTn id="13" fill="hold">
+                            <p:stCondLst>
+                              <p:cond delay="0"/>
+                            </p:stCondLst>
+                            <p:childTnLst>
+                              <p:par>
+                                <p:cTn id="14" presetID="1" presetClass="entr" presetSubtype="0" fill="hold" nodeType="clickEffect">
+                                  <p:stCondLst>
+                                    <p:cond delay="0"/>
+                                  </p:stCondLst>
+                                  <p:childTnLst>
+                                    <p:set>
+                                      <p:cBhvr>
+                                        <p:cTn id="15" dur="1" fill="hold">
+                                          <p:stCondLst>
+                                            <p:cond delay="0"/>
+                                          </p:stCondLst>
+                                        </p:cTn>
+                                        <p:tgtEl>
+                                          <p:spTgt spid="2">
+                                            <p:txEl>
+                                              <p:pRg st="4" end="4"/>
+                                            </p:txEl>
+                                          </p:spTgt>
+                                        </p:tgtEl>
+                                        <p:attrNameLst>
+                                          <p:attrName>style.visibility</p:attrName>
+                                        </p:attrNameLst>
+                                      </p:cBhvr>
+                                      <p:to>
+                                        <p:strVal val="visible"/>
+                                      </p:to>
+                                    </p:set>
+                                  </p:childTnLst>
+                                </p:cTn>
+                              </p:par>
+                            </p:childTnLst>
+                          </p:cTn>
+                        </p:par>
+                      </p:childTnLst>
+                    </p:cTn>
+                  </p:par>
+                  <p:par>
+                    <p:cTn id="16" fill="hold">
+                      <p:stCondLst>
+                        <p:cond delay="indefinite"/>
+                      </p:stCondLst>
+                      <p:childTnLst>
+                        <p:par>
+                          <p:cTn id="17" fill="hold">
+                            <p:stCondLst>
+                              <p:cond delay="0"/>
+                            </p:stCondLst>
+                            <p:childTnLst>
+                              <p:par>
+                                <p:cTn id="18" presetID="1" presetClass="entr" presetSubtype="0" fill="hold" nodeType="clickEffect">
+                                  <p:stCondLst>
+                                    <p:cond delay="0"/>
+                                  </p:stCondLst>
+                                  <p:childTnLst>
+                                    <p:set>
+                                      <p:cBhvr>
+                                        <p:cTn id="19" dur="1" fill="hold">
+                                          <p:stCondLst>
+                                            <p:cond delay="0"/>
+                                          </p:stCondLst>
+                                        </p:cTn>
+                                        <p:tgtEl>
+                                          <p:spTgt spid="2">
+                                            <p:txEl>
+                                              <p:pRg st="5" end="5"/>
+                                            </p:txEl>
+                                          </p:spTgt>
+                                        </p:tgtEl>
+                                        <p:attrNameLst>
+                                          <p:attrName>style.visibility</p:attrName>
+                                        </p:attrNameLst>
+                                      </p:cBhvr>
+                                      <p:to>
+                                        <p:strVal val="visible"/>
+                                      </p:to>
+                                    </p:set>
+                                  </p:childTnLst>
+                                </p:cTn>
+                              </p:par>
+                            </p:childTnLst>
+                          </p:cTn>
+                        </p:par>
+                      </p:childTnLst>
+                    </p:cTn>
+                  </p:par>
+                </p:childTnLst>
+              </p:cTn>
+              <p:prevCondLst>
+                <p:cond evt="onPrev" delay="0">
+                  <p:tgtEl>
+                    <p:sldTgt/>
+                  </p:tgtEl>
+                </p:cond>
+              </p:prevCondLst>
+              <p:nextCondLst>
+                <p:cond evt="onNext" delay="0">
+                  <p:tgtEl>
+                    <p:sldTgt/>
+                  </p:tgtEl>
+                </p:cond>
+              </p:nextCondLst>
+            </p:seq>
+          </p:childTnLst>
+        </p:cTn>
+      </p:par>
+    </p:tnLst>
+  </p:timing>
 </p:sld>
 </file>
 
@@ -8758,6 +9041,1066 @@
   <p:cSld>
     <p:spTree>
       <p:nvGrpSpPr>
+        <p:cNvPr id="1" name=""/>
+        <p:cNvGrpSpPr/>
+        <p:nvPr/>
+      </p:nvGrpSpPr>
+      <p:grpSpPr>
+        <a:xfrm>
+          <a:off x="0" y="0"/>
+          <a:ext cx="0" cy="0"/>
+          <a:chOff x="0" y="0"/>
+          <a:chExt cx="0" cy="0"/>
+        </a:xfrm>
+      </p:grpSpPr>
+      <mc:AlternateContent xmlns:mc="http://schemas.openxmlformats.org/markup-compatibility/2006" xmlns:a14="http://schemas.microsoft.com/office/drawing/2010/main">
+        <mc:Choice Requires="a14">
+          <p:sp>
+            <p:nvSpPr>
+              <p:cNvPr id="196" name="First define   as the proportion of instances in the   node that are from class…"/>
+              <p:cNvSpPr txBox="1">
+                <a:spLocks noGrp="1"/>
+              </p:cNvSpPr>
+              <p:nvPr>
+                <p:ph type="body" idx="1"/>
+              </p:nvPr>
+            </p:nvSpPr>
+            <p:spPr>
+              <a:prstGeom prst="rect">
+                <a:avLst/>
+              </a:prstGeom>
+            </p:spPr>
+            <p:txBody>
+              <a:bodyPr/>
+              <a:lstStyle/>
+              <a:p>
+                <a:r>
+                  <a:rPr lang="en-US" dirty="0"/>
+                  <a:t>Define </a:t>
+                </a:r>
+                <a14:m>
+                  <m:oMath xmlns:m="http://schemas.openxmlformats.org/officeDocument/2006/math">
+                    <m:sSub>
+                      <m:sSubPr>
+                        <m:ctrlPr>
+                          <a:rPr lang="ar-AE" sz="2285" i="1">
+                            <a:solidFill>
+                              <a:srgbClr val="000000"/>
+                            </a:solidFill>
+                            <a:latin typeface="Cambria Math" panose="02040503050406030204" pitchFamily="18" charset="0"/>
+                          </a:rPr>
+                        </m:ctrlPr>
+                      </m:sSubPr>
+                      <m:e>
+                        <m:r>
+                          <a:rPr lang="ar-AE" sz="2285" i="1">
+                            <a:solidFill>
+                              <a:srgbClr val="000000"/>
+                            </a:solidFill>
+                            <a:latin typeface="Cambria Math" panose="02040503050406030204" pitchFamily="18" charset="0"/>
+                          </a:rPr>
+                          <m:t>𝑝</m:t>
+                        </m:r>
+                      </m:e>
+                      <m:sub>
+                        <m:r>
+                          <a:rPr lang="ar-AE" sz="2285" i="1">
+                            <a:solidFill>
+                              <a:srgbClr val="000000"/>
+                            </a:solidFill>
+                            <a:latin typeface="Cambria Math" panose="02040503050406030204" pitchFamily="18" charset="0"/>
+                          </a:rPr>
+                          <m:t>𝑖𝑘</m:t>
+                        </m:r>
+                      </m:sub>
+                    </m:sSub>
+                  </m:oMath>
+                </a14:m>
+                <a:r>
+                  <a:rPr lang="ar-AE" dirty="0"/>
+                  <a:t> </a:t>
+                </a:r>
+                <a:r>
+                  <a:rPr lang="en-US" dirty="0"/>
+                  <a:t>as the proportion of instances in the </a:t>
+                </a:r>
+                <a14:m>
+                  <m:oMath xmlns:m="http://schemas.openxmlformats.org/officeDocument/2006/math">
+                    <m:sSup>
+                      <m:sSupPr>
+                        <m:ctrlPr>
+                          <a:rPr lang="ar-AE" sz="2285" i="1">
+                            <a:solidFill>
+                              <a:srgbClr val="000000"/>
+                            </a:solidFill>
+                            <a:latin typeface="Cambria Math" panose="02040503050406030204" pitchFamily="18" charset="0"/>
+                          </a:rPr>
+                        </m:ctrlPr>
+                      </m:sSupPr>
+                      <m:e>
+                        <m:r>
+                          <a:rPr lang="ar-AE" sz="2285" i="1">
+                            <a:solidFill>
+                              <a:srgbClr val="000000"/>
+                            </a:solidFill>
+                            <a:latin typeface="Cambria Math" panose="02040503050406030204" pitchFamily="18" charset="0"/>
+                          </a:rPr>
+                          <m:t>𝑖</m:t>
+                        </m:r>
+                      </m:e>
+                      <m:sup>
+                        <m:r>
+                          <a:rPr lang="ar-AE" sz="2285" i="1">
+                            <a:solidFill>
+                              <a:srgbClr val="000000"/>
+                            </a:solidFill>
+                            <a:latin typeface="Cambria Math" panose="02040503050406030204" pitchFamily="18" charset="0"/>
+                          </a:rPr>
+                          <m:t>𝑡</m:t>
+                        </m:r>
+                        <m:r>
+                          <a:rPr lang="ar-AE" sz="2285" i="1">
+                            <a:solidFill>
+                              <a:srgbClr val="000000"/>
+                            </a:solidFill>
+                            <a:latin typeface="Cambria Math" panose="02040503050406030204" pitchFamily="18" charset="0"/>
+                          </a:rPr>
+                          <m:t>h</m:t>
+                        </m:r>
+                      </m:sup>
+                    </m:sSup>
+                  </m:oMath>
+                </a14:m>
+                <a:r>
+                  <a:rPr lang="ar-AE" dirty="0"/>
+                  <a:t> </a:t>
+                </a:r>
+                <a:r>
+                  <a:rPr lang="en-US" dirty="0"/>
+                  <a:t>node that are from class </a:t>
+                </a:r>
+                <a14:m>
+                  <m:oMath xmlns:m="http://schemas.openxmlformats.org/officeDocument/2006/math">
+                    <m:r>
+                      <a:rPr lang="en-US" sz="2285" i="1">
+                        <a:solidFill>
+                          <a:srgbClr val="000000"/>
+                        </a:solidFill>
+                        <a:latin typeface="Cambria Math" panose="02040503050406030204" pitchFamily="18" charset="0"/>
+                      </a:rPr>
+                      <m:t>𝑘</m:t>
+                    </m:r>
+                  </m:oMath>
+                </a14:m>
+                <a:endParaRPr lang="en-US" dirty="0"/>
+              </a:p>
+              <a:p>
+                <a:r>
+                  <a:rPr lang="en-US" dirty="0"/>
+                  <a:t>Gini index </a:t>
+                </a:r>
+                <a:br>
+                  <a:rPr lang="en-US" dirty="0"/>
+                </a:br>
+                <a:br>
+                  <a:rPr lang="en-US" dirty="0"/>
+                </a:br>
+                <a14:m>
+                  <m:oMath xmlns:m="http://schemas.openxmlformats.org/officeDocument/2006/math">
+                    <m:r>
+                      <a:rPr lang="en-US" sz="2285" b="0" i="0" smtClean="0">
+                        <a:solidFill>
+                          <a:srgbClr val="000000"/>
+                        </a:solidFill>
+                        <a:latin typeface="Cambria Math" panose="02040503050406030204" pitchFamily="18" charset="0"/>
+                      </a:rPr>
+                      <m:t>                                                        </m:t>
+                    </m:r>
+                    <m:r>
+                      <a:rPr lang="en-US" sz="2285" b="0" i="1" smtClean="0">
+                        <a:solidFill>
+                          <a:srgbClr val="000000"/>
+                        </a:solidFill>
+                        <a:latin typeface="Cambria Math" panose="02040503050406030204" pitchFamily="18" charset="0"/>
+                      </a:rPr>
+                      <m:t> </m:t>
+                    </m:r>
+                    <m:sSub>
+                      <m:sSubPr>
+                        <m:ctrlPr>
+                          <a:rPr lang="ar-AE" sz="2285" i="1">
+                            <a:solidFill>
+                              <a:srgbClr val="000000"/>
+                            </a:solidFill>
+                            <a:latin typeface="Cambria Math" panose="02040503050406030204" pitchFamily="18" charset="0"/>
+                          </a:rPr>
+                        </m:ctrlPr>
+                      </m:sSubPr>
+                      <m:e>
+                        <m:r>
+                          <a:rPr lang="ar-AE" sz="2285" i="1">
+                            <a:solidFill>
+                              <a:srgbClr val="000000"/>
+                            </a:solidFill>
+                            <a:latin typeface="Cambria Math" panose="02040503050406030204" pitchFamily="18" charset="0"/>
+                          </a:rPr>
+                          <m:t>𝐺</m:t>
+                        </m:r>
+                      </m:e>
+                      <m:sub>
+                        <m:r>
+                          <a:rPr lang="ar-AE" sz="2285" i="1">
+                            <a:solidFill>
+                              <a:srgbClr val="000000"/>
+                            </a:solidFill>
+                            <a:latin typeface="Cambria Math" panose="02040503050406030204" pitchFamily="18" charset="0"/>
+                          </a:rPr>
+                          <m:t>𝑖</m:t>
+                        </m:r>
+                      </m:sub>
+                    </m:sSub>
+                    <m:r>
+                      <a:rPr lang="ar-AE" sz="2285" i="1">
+                        <a:solidFill>
+                          <a:srgbClr val="000000"/>
+                        </a:solidFill>
+                        <a:latin typeface="Cambria Math" panose="02040503050406030204" pitchFamily="18" charset="0"/>
+                      </a:rPr>
+                      <m:t>=</m:t>
+                    </m:r>
+                    <m:r>
+                      <a:rPr lang="ar-AE" sz="2285" i="1">
+                        <a:solidFill>
+                          <a:srgbClr val="000000"/>
+                        </a:solidFill>
+                        <a:latin typeface="Cambria Math" panose="02040503050406030204" pitchFamily="18" charset="0"/>
+                      </a:rPr>
+                      <m:t>1</m:t>
+                    </m:r>
+                    <m:r>
+                      <a:rPr lang="ar-AE" sz="2285" i="1">
+                        <a:solidFill>
+                          <a:srgbClr val="000000"/>
+                        </a:solidFill>
+                        <a:latin typeface="Cambria Math" panose="02040503050406030204" pitchFamily="18" charset="0"/>
+                      </a:rPr>
+                      <m:t>−</m:t>
+                    </m:r>
+                    <m:limUpp>
+                      <m:limUppPr>
+                        <m:ctrlPr>
+                          <a:rPr lang="ar-AE" sz="2285" i="1">
+                            <a:solidFill>
+                              <a:srgbClr val="000000"/>
+                            </a:solidFill>
+                            <a:latin typeface="Cambria Math" panose="02040503050406030204" pitchFamily="18" charset="0"/>
+                          </a:rPr>
+                        </m:ctrlPr>
+                      </m:limUppPr>
+                      <m:e>
+                        <m:limLow>
+                          <m:limLowPr>
+                            <m:ctrlPr>
+                              <a:rPr lang="ar-AE" sz="2285" i="1">
+                                <a:solidFill>
+                                  <a:srgbClr val="000000"/>
+                                </a:solidFill>
+                                <a:latin typeface="Cambria Math" panose="02040503050406030204" pitchFamily="18" charset="0"/>
+                              </a:rPr>
+                            </m:ctrlPr>
+                          </m:limLowPr>
+                          <m:e>
+                            <m:r>
+                              <a:rPr lang="ar-AE" sz="2285" i="1">
+                                <a:solidFill>
+                                  <a:srgbClr val="000000"/>
+                                </a:solidFill>
+                                <a:latin typeface="Cambria Math" panose="02040503050406030204" pitchFamily="18" charset="0"/>
+                              </a:rPr>
+                              <m:t>∑</m:t>
+                            </m:r>
+                          </m:e>
+                          <m:lim>
+                            <m:r>
+                              <a:rPr lang="ar-AE" sz="2285" i="1">
+                                <a:solidFill>
+                                  <a:srgbClr val="000000"/>
+                                </a:solidFill>
+                                <a:latin typeface="Cambria Math" panose="02040503050406030204" pitchFamily="18" charset="0"/>
+                              </a:rPr>
+                              <m:t>𝑘</m:t>
+                            </m:r>
+                            <m:r>
+                              <a:rPr lang="ar-AE" sz="2285" i="1">
+                                <a:solidFill>
+                                  <a:srgbClr val="000000"/>
+                                </a:solidFill>
+                                <a:latin typeface="Cambria Math" panose="02040503050406030204" pitchFamily="18" charset="0"/>
+                              </a:rPr>
+                              <m:t>=</m:t>
+                            </m:r>
+                            <m:r>
+                              <a:rPr lang="ar-AE" sz="2285" i="1">
+                                <a:solidFill>
+                                  <a:srgbClr val="000000"/>
+                                </a:solidFill>
+                                <a:latin typeface="Cambria Math" panose="02040503050406030204" pitchFamily="18" charset="0"/>
+                              </a:rPr>
+                              <m:t>1</m:t>
+                            </m:r>
+                          </m:lim>
+                        </m:limLow>
+                      </m:e>
+                      <m:lim>
+                        <m:r>
+                          <a:rPr lang="ar-AE" sz="2285" i="1">
+                            <a:solidFill>
+                              <a:srgbClr val="000000"/>
+                            </a:solidFill>
+                            <a:latin typeface="Cambria Math" panose="02040503050406030204" pitchFamily="18" charset="0"/>
+                          </a:rPr>
+                          <m:t>𝐾</m:t>
+                        </m:r>
+                      </m:lim>
+                    </m:limUpp>
+                    <m:sSubSup>
+                      <m:sSubSupPr>
+                        <m:ctrlPr>
+                          <a:rPr lang="ar-AE" sz="2285" i="1">
+                            <a:solidFill>
+                              <a:srgbClr val="000000"/>
+                            </a:solidFill>
+                            <a:latin typeface="Cambria Math" panose="02040503050406030204" pitchFamily="18" charset="0"/>
+                          </a:rPr>
+                        </m:ctrlPr>
+                      </m:sSubSupPr>
+                      <m:e>
+                        <m:r>
+                          <a:rPr lang="ar-AE" sz="2285" i="1">
+                            <a:solidFill>
+                              <a:srgbClr val="000000"/>
+                            </a:solidFill>
+                            <a:latin typeface="Cambria Math" panose="02040503050406030204" pitchFamily="18" charset="0"/>
+                          </a:rPr>
+                          <m:t>𝑝</m:t>
+                        </m:r>
+                      </m:e>
+                      <m:sub>
+                        <m:r>
+                          <a:rPr lang="ar-AE" sz="2285" i="1">
+                            <a:solidFill>
+                              <a:srgbClr val="000000"/>
+                            </a:solidFill>
+                            <a:latin typeface="Cambria Math" panose="02040503050406030204" pitchFamily="18" charset="0"/>
+                          </a:rPr>
+                          <m:t>𝑖𝑘</m:t>
+                        </m:r>
+                      </m:sub>
+                      <m:sup>
+                        <m:r>
+                          <a:rPr lang="ar-AE" sz="2285" i="1">
+                            <a:solidFill>
+                              <a:srgbClr val="000000"/>
+                            </a:solidFill>
+                            <a:latin typeface="Cambria Math" panose="02040503050406030204" pitchFamily="18" charset="0"/>
+                          </a:rPr>
+                          <m:t>2</m:t>
+                        </m:r>
+                      </m:sup>
+                    </m:sSubSup>
+                    <m:r>
+                      <a:rPr lang="ar-AE" sz="2285" i="1">
+                        <a:solidFill>
+                          <a:srgbClr val="000000"/>
+                        </a:solidFill>
+                        <a:latin typeface="Cambria Math" panose="02040503050406030204" pitchFamily="18" charset="0"/>
+                      </a:rPr>
+                      <m:t>=</m:t>
+                    </m:r>
+                    <m:limUpp>
+                      <m:limUppPr>
+                        <m:ctrlPr>
+                          <a:rPr lang="ar-AE" sz="2285" i="1">
+                            <a:solidFill>
+                              <a:srgbClr val="000000"/>
+                            </a:solidFill>
+                            <a:latin typeface="Cambria Math" panose="02040503050406030204" pitchFamily="18" charset="0"/>
+                          </a:rPr>
+                        </m:ctrlPr>
+                      </m:limUppPr>
+                      <m:e>
+                        <m:limLow>
+                          <m:limLowPr>
+                            <m:ctrlPr>
+                              <a:rPr lang="ar-AE" sz="2285" i="1">
+                                <a:solidFill>
+                                  <a:srgbClr val="000000"/>
+                                </a:solidFill>
+                                <a:latin typeface="Cambria Math" panose="02040503050406030204" pitchFamily="18" charset="0"/>
+                              </a:rPr>
+                            </m:ctrlPr>
+                          </m:limLowPr>
+                          <m:e>
+                            <m:r>
+                              <a:rPr lang="ar-AE" sz="2285" i="1">
+                                <a:solidFill>
+                                  <a:srgbClr val="000000"/>
+                                </a:solidFill>
+                                <a:latin typeface="Cambria Math" panose="02040503050406030204" pitchFamily="18" charset="0"/>
+                              </a:rPr>
+                              <m:t>∑</m:t>
+                            </m:r>
+                          </m:e>
+                          <m:lim>
+                            <m:r>
+                              <a:rPr lang="ar-AE" sz="2285" i="1">
+                                <a:solidFill>
+                                  <a:srgbClr val="000000"/>
+                                </a:solidFill>
+                                <a:latin typeface="Cambria Math" panose="02040503050406030204" pitchFamily="18" charset="0"/>
+                              </a:rPr>
+                              <m:t>𝑘</m:t>
+                            </m:r>
+                            <m:r>
+                              <a:rPr lang="ar-AE" sz="2285" i="1">
+                                <a:solidFill>
+                                  <a:srgbClr val="000000"/>
+                                </a:solidFill>
+                                <a:latin typeface="Cambria Math" panose="02040503050406030204" pitchFamily="18" charset="0"/>
+                              </a:rPr>
+                              <m:t>=</m:t>
+                            </m:r>
+                            <m:r>
+                              <a:rPr lang="ar-AE" sz="2285" i="1">
+                                <a:solidFill>
+                                  <a:srgbClr val="000000"/>
+                                </a:solidFill>
+                                <a:latin typeface="Cambria Math" panose="02040503050406030204" pitchFamily="18" charset="0"/>
+                              </a:rPr>
+                              <m:t>1</m:t>
+                            </m:r>
+                          </m:lim>
+                        </m:limLow>
+                      </m:e>
+                      <m:lim>
+                        <m:r>
+                          <a:rPr lang="ar-AE" sz="2285" i="1">
+                            <a:solidFill>
+                              <a:srgbClr val="000000"/>
+                            </a:solidFill>
+                            <a:latin typeface="Cambria Math" panose="02040503050406030204" pitchFamily="18" charset="0"/>
+                          </a:rPr>
+                          <m:t>𝐾</m:t>
+                        </m:r>
+                      </m:lim>
+                    </m:limUpp>
+                    <m:sSub>
+                      <m:sSubPr>
+                        <m:ctrlPr>
+                          <a:rPr lang="ar-AE" sz="2285" i="1">
+                            <a:solidFill>
+                              <a:srgbClr val="000000"/>
+                            </a:solidFill>
+                            <a:latin typeface="Cambria Math" panose="02040503050406030204" pitchFamily="18" charset="0"/>
+                          </a:rPr>
+                        </m:ctrlPr>
+                      </m:sSubPr>
+                      <m:e>
+                        <m:r>
+                          <a:rPr lang="ar-AE" sz="2285" i="1">
+                            <a:solidFill>
+                              <a:srgbClr val="000000"/>
+                            </a:solidFill>
+                            <a:latin typeface="Cambria Math" panose="02040503050406030204" pitchFamily="18" charset="0"/>
+                          </a:rPr>
+                          <m:t>𝑝</m:t>
+                        </m:r>
+                      </m:e>
+                      <m:sub>
+                        <m:r>
+                          <a:rPr lang="ar-AE" sz="2285" i="1">
+                            <a:solidFill>
+                              <a:srgbClr val="000000"/>
+                            </a:solidFill>
+                            <a:latin typeface="Cambria Math" panose="02040503050406030204" pitchFamily="18" charset="0"/>
+                          </a:rPr>
+                          <m:t>𝑖𝑘</m:t>
+                        </m:r>
+                      </m:sub>
+                    </m:sSub>
+                    <m:r>
+                      <a:rPr lang="ar-AE" sz="2285" i="1">
+                        <a:solidFill>
+                          <a:srgbClr val="000000"/>
+                        </a:solidFill>
+                        <a:latin typeface="Cambria Math" panose="02040503050406030204" pitchFamily="18" charset="0"/>
+                      </a:rPr>
+                      <m:t>(</m:t>
+                    </m:r>
+                    <m:r>
+                      <a:rPr lang="ar-AE" sz="2285" i="1">
+                        <a:solidFill>
+                          <a:srgbClr val="000000"/>
+                        </a:solidFill>
+                        <a:latin typeface="Cambria Math" panose="02040503050406030204" pitchFamily="18" charset="0"/>
+                      </a:rPr>
+                      <m:t>1</m:t>
+                    </m:r>
+                    <m:r>
+                      <a:rPr lang="ar-AE" sz="2285" i="1">
+                        <a:solidFill>
+                          <a:srgbClr val="000000"/>
+                        </a:solidFill>
+                        <a:latin typeface="Cambria Math" panose="02040503050406030204" pitchFamily="18" charset="0"/>
+                      </a:rPr>
+                      <m:t>−</m:t>
+                    </m:r>
+                    <m:sSub>
+                      <m:sSubPr>
+                        <m:ctrlPr>
+                          <a:rPr lang="ar-AE" sz="2285" i="1">
+                            <a:solidFill>
+                              <a:srgbClr val="000000"/>
+                            </a:solidFill>
+                            <a:latin typeface="Cambria Math" panose="02040503050406030204" pitchFamily="18" charset="0"/>
+                          </a:rPr>
+                        </m:ctrlPr>
+                      </m:sSubPr>
+                      <m:e>
+                        <m:r>
+                          <a:rPr lang="ar-AE" sz="2285" i="1">
+                            <a:solidFill>
+                              <a:srgbClr val="000000"/>
+                            </a:solidFill>
+                            <a:latin typeface="Cambria Math" panose="02040503050406030204" pitchFamily="18" charset="0"/>
+                          </a:rPr>
+                          <m:t>𝑝</m:t>
+                        </m:r>
+                      </m:e>
+                      <m:sub>
+                        <m:r>
+                          <a:rPr lang="ar-AE" sz="2285" i="1">
+                            <a:solidFill>
+                              <a:srgbClr val="000000"/>
+                            </a:solidFill>
+                            <a:latin typeface="Cambria Math" panose="02040503050406030204" pitchFamily="18" charset="0"/>
+                          </a:rPr>
+                          <m:t>𝑖𝑘</m:t>
+                        </m:r>
+                      </m:sub>
+                    </m:sSub>
+                    <m:r>
+                      <a:rPr lang="ar-AE" sz="2285" i="1">
+                        <a:solidFill>
+                          <a:srgbClr val="000000"/>
+                        </a:solidFill>
+                        <a:latin typeface="Cambria Math" panose="02040503050406030204" pitchFamily="18" charset="0"/>
+                      </a:rPr>
+                      <m:t>)</m:t>
+                    </m:r>
+                  </m:oMath>
+                </a14:m>
+                <a:r>
+                  <a:rPr lang="ar-AE" dirty="0"/>
+                  <a:t>    </a:t>
+                </a:r>
+              </a:p>
+              <a:p>
+                <a:r>
+                  <a:rPr lang="en-US" dirty="0"/>
+                  <a:t>Cross Entropy </a:t>
+                </a:r>
+                <a:br>
+                  <a:rPr lang="en-US" dirty="0"/>
+                </a:br>
+                <a14:m>
+                  <m:oMath xmlns:m="http://schemas.openxmlformats.org/officeDocument/2006/math">
+                    <m:sSub>
+                      <m:sSubPr>
+                        <m:ctrlPr>
+                          <a:rPr lang="ar-AE" sz="2285" i="1">
+                            <a:solidFill>
+                              <a:srgbClr val="000000"/>
+                            </a:solidFill>
+                            <a:latin typeface="Cambria Math" panose="02040503050406030204" pitchFamily="18" charset="0"/>
+                          </a:rPr>
+                        </m:ctrlPr>
+                      </m:sSubPr>
+                      <m:e>
+                        <m:r>
+                          <a:rPr lang="ar-AE" sz="2285" i="1">
+                            <a:solidFill>
+                              <a:srgbClr val="000000"/>
+                            </a:solidFill>
+                            <a:latin typeface="Cambria Math" panose="02040503050406030204" pitchFamily="18" charset="0"/>
+                          </a:rPr>
+                          <m:t>𝐻</m:t>
+                        </m:r>
+                      </m:e>
+                      <m:sub>
+                        <m:r>
+                          <a:rPr lang="ar-AE" sz="2285" i="1">
+                            <a:solidFill>
+                              <a:srgbClr val="000000"/>
+                            </a:solidFill>
+                            <a:latin typeface="Cambria Math" panose="02040503050406030204" pitchFamily="18" charset="0"/>
+                          </a:rPr>
+                          <m:t>𝑖</m:t>
+                        </m:r>
+                      </m:sub>
+                    </m:sSub>
+                    <m:r>
+                      <a:rPr lang="ar-AE" sz="2285" i="1">
+                        <a:solidFill>
+                          <a:srgbClr val="000000"/>
+                        </a:solidFill>
+                        <a:latin typeface="Cambria Math" panose="02040503050406030204" pitchFamily="18" charset="0"/>
+                      </a:rPr>
+                      <m:t>=−</m:t>
+                    </m:r>
+                    <m:limUpp>
+                      <m:limUppPr>
+                        <m:ctrlPr>
+                          <a:rPr lang="ar-AE" sz="2285" i="1">
+                            <a:solidFill>
+                              <a:srgbClr val="000000"/>
+                            </a:solidFill>
+                            <a:latin typeface="Cambria Math" panose="02040503050406030204" pitchFamily="18" charset="0"/>
+                          </a:rPr>
+                        </m:ctrlPr>
+                      </m:limUppPr>
+                      <m:e>
+                        <m:limLow>
+                          <m:limLowPr>
+                            <m:ctrlPr>
+                              <a:rPr lang="ar-AE" sz="2285" i="1">
+                                <a:solidFill>
+                                  <a:srgbClr val="000000"/>
+                                </a:solidFill>
+                                <a:latin typeface="Cambria Math" panose="02040503050406030204" pitchFamily="18" charset="0"/>
+                              </a:rPr>
+                            </m:ctrlPr>
+                          </m:limLowPr>
+                          <m:e>
+                            <m:r>
+                              <a:rPr lang="ar-AE" sz="2285" i="1">
+                                <a:solidFill>
+                                  <a:srgbClr val="000000"/>
+                                </a:solidFill>
+                                <a:latin typeface="Cambria Math" panose="02040503050406030204" pitchFamily="18" charset="0"/>
+                              </a:rPr>
+                              <m:t>∑</m:t>
+                            </m:r>
+                          </m:e>
+                          <m:lim>
+                            <m:r>
+                              <a:rPr lang="ar-AE" sz="2285" i="1">
+                                <a:solidFill>
+                                  <a:srgbClr val="000000"/>
+                                </a:solidFill>
+                                <a:latin typeface="Cambria Math" panose="02040503050406030204" pitchFamily="18" charset="0"/>
+                              </a:rPr>
+                              <m:t>𝑘</m:t>
+                            </m:r>
+                            <m:r>
+                              <a:rPr lang="ar-AE" sz="2285" i="1">
+                                <a:solidFill>
+                                  <a:srgbClr val="000000"/>
+                                </a:solidFill>
+                                <a:latin typeface="Cambria Math" panose="02040503050406030204" pitchFamily="18" charset="0"/>
+                              </a:rPr>
+                              <m:t>=</m:t>
+                            </m:r>
+                            <m:r>
+                              <a:rPr lang="ar-AE" sz="2285" i="1">
+                                <a:solidFill>
+                                  <a:srgbClr val="000000"/>
+                                </a:solidFill>
+                                <a:latin typeface="Cambria Math" panose="02040503050406030204" pitchFamily="18" charset="0"/>
+                              </a:rPr>
+                              <m:t>1</m:t>
+                            </m:r>
+                          </m:lim>
+                        </m:limLow>
+                      </m:e>
+                      <m:lim>
+                        <m:r>
+                          <a:rPr lang="ar-AE" sz="2285" i="1">
+                            <a:solidFill>
+                              <a:srgbClr val="000000"/>
+                            </a:solidFill>
+                            <a:latin typeface="Cambria Math" panose="02040503050406030204" pitchFamily="18" charset="0"/>
+                          </a:rPr>
+                          <m:t>𝐾</m:t>
+                        </m:r>
+                      </m:lim>
+                    </m:limUpp>
+                    <m:sSub>
+                      <m:sSubPr>
+                        <m:ctrlPr>
+                          <a:rPr lang="ar-AE" sz="2285" i="1">
+                            <a:solidFill>
+                              <a:srgbClr val="000000"/>
+                            </a:solidFill>
+                            <a:latin typeface="Cambria Math" panose="02040503050406030204" pitchFamily="18" charset="0"/>
+                          </a:rPr>
+                        </m:ctrlPr>
+                      </m:sSubPr>
+                      <m:e>
+                        <m:r>
+                          <a:rPr lang="ar-AE" sz="2285" i="1">
+                            <a:solidFill>
+                              <a:srgbClr val="000000"/>
+                            </a:solidFill>
+                            <a:latin typeface="Cambria Math" panose="02040503050406030204" pitchFamily="18" charset="0"/>
+                          </a:rPr>
+                          <m:t>𝑝</m:t>
+                        </m:r>
+                      </m:e>
+                      <m:sub>
+                        <m:r>
+                          <a:rPr lang="ar-AE" sz="2285" i="1">
+                            <a:solidFill>
+                              <a:srgbClr val="000000"/>
+                            </a:solidFill>
+                            <a:latin typeface="Cambria Math" panose="02040503050406030204" pitchFamily="18" charset="0"/>
+                          </a:rPr>
+                          <m:t>𝑖𝑘</m:t>
+                        </m:r>
+                      </m:sub>
+                    </m:sSub>
+                    <m:sSub>
+                      <m:sSubPr>
+                        <m:ctrlPr>
+                          <a:rPr lang="ar-AE" sz="2285" i="1">
+                            <a:solidFill>
+                              <a:srgbClr val="000000"/>
+                            </a:solidFill>
+                            <a:latin typeface="Cambria Math" panose="02040503050406030204" pitchFamily="18" charset="0"/>
+                          </a:rPr>
+                        </m:ctrlPr>
+                      </m:sSubPr>
+                      <m:e>
+                        <m:r>
+                          <m:rPr>
+                            <m:sty m:val="p"/>
+                          </m:rPr>
+                          <a:rPr lang="en-US" sz="2285" i="1">
+                            <a:solidFill>
+                              <a:srgbClr val="000000"/>
+                            </a:solidFill>
+                            <a:latin typeface="Cambria Math" panose="02040503050406030204" pitchFamily="18" charset="0"/>
+                          </a:rPr>
+                          <m:t>log</m:t>
+                        </m:r>
+                      </m:e>
+                      <m:sub>
+                        <m:r>
+                          <a:rPr lang="ar-AE" sz="2285" i="1">
+                            <a:solidFill>
+                              <a:srgbClr val="000000"/>
+                            </a:solidFill>
+                            <a:latin typeface="Cambria Math" panose="02040503050406030204" pitchFamily="18" charset="0"/>
+                          </a:rPr>
+                          <m:t>2</m:t>
+                        </m:r>
+                      </m:sub>
+                    </m:sSub>
+                    <m:r>
+                      <a:rPr lang="ar-AE" sz="2285" i="1">
+                        <a:solidFill>
+                          <a:srgbClr val="000000"/>
+                        </a:solidFill>
+                        <a:latin typeface="Cambria Math" panose="02040503050406030204" pitchFamily="18" charset="0"/>
+                      </a:rPr>
+                      <m:t>(</m:t>
+                    </m:r>
+                    <m:sSub>
+                      <m:sSubPr>
+                        <m:ctrlPr>
+                          <a:rPr lang="ar-AE" sz="2285" i="1">
+                            <a:solidFill>
+                              <a:srgbClr val="000000"/>
+                            </a:solidFill>
+                            <a:latin typeface="Cambria Math" panose="02040503050406030204" pitchFamily="18" charset="0"/>
+                          </a:rPr>
+                        </m:ctrlPr>
+                      </m:sSubPr>
+                      <m:e>
+                        <m:r>
+                          <a:rPr lang="ar-AE" sz="2285" i="1">
+                            <a:solidFill>
+                              <a:srgbClr val="000000"/>
+                            </a:solidFill>
+                            <a:latin typeface="Cambria Math" panose="02040503050406030204" pitchFamily="18" charset="0"/>
+                          </a:rPr>
+                          <m:t>𝑝</m:t>
+                        </m:r>
+                      </m:e>
+                      <m:sub>
+                        <m:r>
+                          <a:rPr lang="ar-AE" sz="2285" i="1">
+                            <a:solidFill>
+                              <a:srgbClr val="000000"/>
+                            </a:solidFill>
+                            <a:latin typeface="Cambria Math" panose="02040503050406030204" pitchFamily="18" charset="0"/>
+                          </a:rPr>
+                          <m:t>𝑖𝑘</m:t>
+                        </m:r>
+                      </m:sub>
+                    </m:sSub>
+                    <m:r>
+                      <a:rPr lang="ar-AE" sz="2285" i="1">
+                        <a:solidFill>
+                          <a:srgbClr val="000000"/>
+                        </a:solidFill>
+                        <a:latin typeface="Cambria Math" panose="02040503050406030204" pitchFamily="18" charset="0"/>
+                      </a:rPr>
+                      <m:t>)</m:t>
+                    </m:r>
+                  </m:oMath>
+                </a14:m>
+                <a:endParaRPr dirty="0"/>
+              </a:p>
+            </p:txBody>
+          </p:sp>
+        </mc:Choice>
+        <mc:Fallback xmlns="">
+          <p:sp>
+            <p:nvSpPr>
+              <p:cNvPr id="196" name="First define   as the proportion of instances in the   node that are from class…"/>
+              <p:cNvSpPr txBox="1">
+                <a:spLocks noGrp="1" noRot="1" noChangeAspect="1" noMove="1" noResize="1" noEditPoints="1" noAdjustHandles="1" noChangeArrowheads="1" noChangeShapeType="1" noTextEdit="1"/>
+              </p:cNvSpPr>
+              <p:nvPr>
+                <p:ph type="body" idx="1"/>
+              </p:nvPr>
+            </p:nvSpPr>
+            <p:spPr>
+              <a:prstGeom prst="rect">
+                <a:avLst/>
+              </a:prstGeom>
+              <a:blipFill>
+                <a:blip r:embed="rId2"/>
+                <a:stretch>
+                  <a:fillRect l="-513"/>
+                </a:stretch>
+              </a:blipFill>
+            </p:spPr>
+            <p:txBody>
+              <a:bodyPr/>
+              <a:lstStyle/>
+              <a:p>
+                <a:r>
+                  <a:rPr lang="en-US">
+                    <a:noFill/>
+                  </a:rPr>
+                  <a:t> </a:t>
+                </a:r>
+              </a:p>
+            </p:txBody>
+          </p:sp>
+        </mc:Fallback>
+      </mc:AlternateContent>
+      <p:sp>
+        <p:nvSpPr>
+          <p:cNvPr id="197" name="Node Impurity Measures (Classification)"/>
+          <p:cNvSpPr txBox="1">
+            <a:spLocks noGrp="1"/>
+          </p:cNvSpPr>
+          <p:nvPr>
+            <p:ph type="title"/>
+          </p:nvPr>
+        </p:nvSpPr>
+        <p:spPr>
+          <a:prstGeom prst="rect">
+            <a:avLst/>
+          </a:prstGeom>
+        </p:spPr>
+        <p:txBody>
+          <a:bodyPr>
+            <a:normAutofit/>
+          </a:bodyPr>
+          <a:lstStyle>
+            <a:lvl1pPr defTabSz="1473840">
+              <a:defRPr sz="5100" spc="-102"/>
+            </a:lvl1pPr>
+          </a:lstStyle>
+          <a:p>
+            <a:r>
+              <a:rPr sz="4000" dirty="0"/>
+              <a:t>Node Impurity Measures (Classification)</a:t>
+            </a:r>
+          </a:p>
+        </p:txBody>
+      </p:sp>
+      <mc:AlternateContent xmlns:mc="http://schemas.openxmlformats.org/markup-compatibility/2006" xmlns:a14="http://schemas.microsoft.com/office/drawing/2010/main">
+        <mc:Choice Requires="a14">
+          <p:sp>
+            <p:nvSpPr>
+              <p:cNvPr id="198" name="equation.pdf"/>
+              <p:cNvSpPr txBox="1"/>
+              <p:nvPr/>
+            </p:nvSpPr>
+            <p:spPr>
+              <a:xfrm>
+                <a:off x="5449348" y="5513123"/>
+                <a:ext cx="646652" cy="194797"/>
+              </a:xfrm>
+              <a:prstGeom prst="rect">
+                <a:avLst/>
+              </a:prstGeom>
+              <a:ln w="12700">
+                <a:miter lim="400000"/>
+              </a:ln>
+            </p:spPr>
+            <p:txBody>
+              <a:bodyPr wrap="none" lIns="0" tIns="0" rIns="0" bIns="0">
+                <a:spAutoFit/>
+              </a:bodyPr>
+              <a:lstStyle/>
+              <a:p>
+                <a:pPr defTabSz="642915" latinLnBrk="1">
+                  <a:defRPr sz="1800">
+                    <a:solidFill>
+                      <a:srgbClr val="000000"/>
+                    </a:solidFill>
+                  </a:defRPr>
+                </a:pPr>
+                <a14:m>
+                  <m:oMathPara xmlns:m="http://schemas.openxmlformats.org/officeDocument/2006/math">
+                    <m:oMathParaPr>
+                      <m:jc m:val="centerGroup"/>
+                    </m:oMathParaPr>
+                    <m:oMath xmlns:m="http://schemas.openxmlformats.org/officeDocument/2006/math">
+                      <m:r>
+                        <m:rPr>
+                          <m:nor/>
+                        </m:rPr>
+                        <a:rPr sz="1266" i="1">
+                          <a:solidFill>
+                            <a:srgbClr val="000000"/>
+                          </a:solidFill>
+                          <a:latin typeface="Cambria Math" panose="02040503050406030204" pitchFamily="18" charset="0"/>
+                        </a:rPr>
+                        <m:t>if</m:t>
+                      </m:r>
+                      <m:sSub>
+                        <m:sSubPr>
+                          <m:ctrlPr>
+                            <a:rPr sz="1266" i="1">
+                              <a:solidFill>
+                                <a:srgbClr val="000000"/>
+                              </a:solidFill>
+                              <a:latin typeface="Cambria Math" panose="02040503050406030204" pitchFamily="18" charset="0"/>
+                            </a:rPr>
+                          </m:ctrlPr>
+                        </m:sSubPr>
+                        <m:e>
+                          <m:r>
+                            <a:rPr sz="1266" i="1">
+                              <a:solidFill>
+                                <a:srgbClr val="000000"/>
+                              </a:solidFill>
+                              <a:latin typeface="Cambria Math" panose="02040503050406030204" pitchFamily="18" charset="0"/>
+                            </a:rPr>
+                            <m:t>𝑝</m:t>
+                          </m:r>
+                        </m:e>
+                        <m:sub>
+                          <m:r>
+                            <a:rPr sz="1266" i="1">
+                              <a:solidFill>
+                                <a:srgbClr val="000000"/>
+                              </a:solidFill>
+                              <a:latin typeface="Cambria Math" panose="02040503050406030204" pitchFamily="18" charset="0"/>
+                            </a:rPr>
+                            <m:t>𝑖𝑘</m:t>
+                          </m:r>
+                        </m:sub>
+                      </m:sSub>
+                      <m:r>
+                        <a:rPr sz="1266" i="1">
+                          <a:solidFill>
+                            <a:srgbClr val="000000"/>
+                          </a:solidFill>
+                          <a:latin typeface="Cambria Math" panose="02040503050406030204" pitchFamily="18" charset="0"/>
+                        </a:rPr>
+                        <m:t>≠</m:t>
+                      </m:r>
+                      <m:r>
+                        <a:rPr sz="1266" i="1">
+                          <a:solidFill>
+                            <a:srgbClr val="000000"/>
+                          </a:solidFill>
+                          <a:latin typeface="Cambria Math" panose="02040503050406030204" pitchFamily="18" charset="0"/>
+                        </a:rPr>
+                        <m:t>0</m:t>
+                      </m:r>
+                    </m:oMath>
+                  </m:oMathPara>
+                </a14:m>
+                <a:endParaRPr sz="1266" dirty="0"/>
+              </a:p>
+            </p:txBody>
+          </p:sp>
+        </mc:Choice>
+        <mc:Fallback xmlns="">
+          <p:sp>
+            <p:nvSpPr>
+              <p:cNvPr id="198" name="equation.pdf"/>
+              <p:cNvSpPr txBox="1">
+                <a:spLocks noRot="1" noChangeAspect="1" noMove="1" noResize="1" noEditPoints="1" noAdjustHandles="1" noChangeArrowheads="1" noChangeShapeType="1" noTextEdit="1"/>
+              </p:cNvSpPr>
+              <p:nvPr/>
+            </p:nvSpPr>
+            <p:spPr>
+              <a:xfrm>
+                <a:off x="5449348" y="5513123"/>
+                <a:ext cx="646652" cy="194797"/>
+              </a:xfrm>
+              <a:prstGeom prst="rect">
+                <a:avLst/>
+              </a:prstGeom>
+              <a:blipFill>
+                <a:blip r:embed="rId3"/>
+                <a:stretch>
+                  <a:fillRect l="-5660" r="-4717" b="-21875"/>
+                </a:stretch>
+              </a:blipFill>
+              <a:ln w="12700">
+                <a:miter lim="400000"/>
+              </a:ln>
+            </p:spPr>
+            <p:txBody>
+              <a:bodyPr/>
+              <a:lstStyle/>
+              <a:p>
+                <a:r>
+                  <a:rPr lang="en-US">
+                    <a:noFill/>
+                  </a:rPr>
+                  <a:t> </a:t>
+                </a:r>
+              </a:p>
+            </p:txBody>
+          </p:sp>
+        </mc:Fallback>
+      </mc:AlternateContent>
+    </p:spTree>
+  </p:cSld>
+  <p:clrMapOvr>
+    <a:masterClrMapping/>
+  </p:clrMapOvr>
+  <p:transition spd="med"/>
+</p:sld>
+</file>
+
+<file path=ppt/slides/slide7.xml><?xml version="1.0" encoding="utf-8"?>
+<p:sld xmlns:a="http://schemas.openxmlformats.org/drawingml/2006/main" xmlns:r="http://schemas.openxmlformats.org/officeDocument/2006/relationships" xmlns:p="http://schemas.openxmlformats.org/presentationml/2006/main">
+  <p:cSld>
+    <p:spTree>
+      <p:nvGrpSpPr>
         <p:cNvPr id="1" name="">
           <a:extLst>
             <a:ext uri="{FF2B5EF4-FFF2-40B4-BE49-F238E27FC236}">
@@ -8776,8 +10119,8 @@
           <a:chExt cx="0" cy="0"/>
         </a:xfrm>
       </p:grpSpPr>
-      <mc:AlternateContent xmlns:mc="http://schemas.openxmlformats.org/markup-compatibility/2006">
-        <mc:Choice xmlns:a14="http://schemas.microsoft.com/office/drawing/2010/main" Requires="a14">
+      <mc:AlternateContent xmlns:mc="http://schemas.openxmlformats.org/markup-compatibility/2006" xmlns:a14="http://schemas.microsoft.com/office/drawing/2010/main">
+        <mc:Choice Requires="a14">
           <p:sp>
             <p:nvSpPr>
               <p:cNvPr id="188" name="Classification and Regression Tree (CART) algorithm:…">
@@ -8964,7 +10307,7 @@
             </p:txBody>
           </p:sp>
         </mc:Choice>
-        <mc:Fallback>
+        <mc:Fallback xmlns="">
           <p:sp>
             <p:nvSpPr>
               <p:cNvPr id="188" name="Classification and Regression Tree (CART) algorithm:…">
@@ -9049,8 +10392,8 @@
           </a:p>
         </p:txBody>
       </p:sp>
-      <mc:AlternateContent xmlns:mc="http://schemas.openxmlformats.org/markup-compatibility/2006">
-        <mc:Choice xmlns:a14="http://schemas.microsoft.com/office/drawing/2010/main" Requires="a14">
+      <mc:AlternateContent xmlns:mc="http://schemas.openxmlformats.org/markup-compatibility/2006" xmlns:a14="http://schemas.microsoft.com/office/drawing/2010/main">
+        <mc:Choice Requires="a14">
           <p:sp>
             <p:nvSpPr>
               <p:cNvPr id="190" name="equation.pdf">
@@ -9337,7 +10680,7 @@
             </p:txBody>
           </p:sp>
         </mc:Choice>
-        <mc:Fallback>
+        <mc:Fallback xmlns="">
           <p:sp>
             <p:nvSpPr>
               <p:cNvPr id="190" name="equation.pdf">
@@ -9385,8 +10728,8 @@
           </p:sp>
         </mc:Fallback>
       </mc:AlternateContent>
-      <mc:AlternateContent xmlns:mc="http://schemas.openxmlformats.org/markup-compatibility/2006">
-        <mc:Choice xmlns:a14="http://schemas.microsoft.com/office/drawing/2010/main" Requires="a14">
+      <mc:AlternateContent xmlns:mc="http://schemas.openxmlformats.org/markup-compatibility/2006" xmlns:a14="http://schemas.microsoft.com/office/drawing/2010/main">
+        <mc:Choice Requires="a14">
           <p:sp>
             <p:nvSpPr>
               <p:cNvPr id="191" name="equation.pdf">
@@ -9691,7 +11034,7 @@
             </p:txBody>
           </p:sp>
         </mc:Choice>
-        <mc:Fallback>
+        <mc:Fallback xmlns="">
           <p:sp>
             <p:nvSpPr>
               <p:cNvPr id="191" name="equation.pdf">
@@ -9739,8 +11082,8 @@
           </p:sp>
         </mc:Fallback>
       </mc:AlternateContent>
-      <mc:AlternateContent xmlns:mc="http://schemas.openxmlformats.org/markup-compatibility/2006">
-        <mc:Choice xmlns:a14="http://schemas.microsoft.com/office/drawing/2010/main" Requires="a14">
+      <mc:AlternateContent xmlns:mc="http://schemas.openxmlformats.org/markup-compatibility/2006" xmlns:a14="http://schemas.microsoft.com/office/drawing/2010/main">
+        <mc:Choice Requires="a14">
           <p:sp>
             <p:nvSpPr>
               <p:cNvPr id="192" name="Where   is a measure of node impurity">
@@ -9766,7 +11109,7 @@
               </a:ln>
               <a:extLst>
                 <a:ext uri="{C572A759-6A51-4108-AA02-DFA0A04FC94B}">
-                  <ma14:wrappingTextBoxFlag xmlns="" xmlns:m="http://schemas.openxmlformats.org/officeDocument/2006/math" xmlns:ma14="http://schemas.microsoft.com/office/mac/drawingml/2011/main" val="1"/>
+                  <ma14:wrappingTextBoxFlag xmlns:ma14="http://schemas.microsoft.com/office/mac/drawingml/2011/main" xmlns:m="http://schemas.openxmlformats.org/officeDocument/2006/math" xmlns="" val="1"/>
                 </a:ext>
               </a:extLst>
             </p:spPr>
@@ -9808,7 +11151,7 @@
             </p:txBody>
           </p:sp>
         </mc:Choice>
-        <mc:Fallback>
+        <mc:Fallback xmlns="">
           <p:sp>
             <p:nvSpPr>
               <p:cNvPr id="192" name="Where   is a measure of node impurity">
@@ -9886,7 +11229,7 @@
           </a:ln>
           <a:extLst>
             <a:ext uri="{C572A759-6A51-4108-AA02-DFA0A04FC94B}">
-              <ma14:wrappingTextBoxFlag xmlns="" xmlns:m="http://schemas.openxmlformats.org/officeDocument/2006/math" xmlns:a14="http://schemas.microsoft.com/office/drawing/2010/main" xmlns:ma14="http://schemas.microsoft.com/office/mac/drawingml/2011/main" val="1"/>
+              <ma14:wrappingTextBoxFlag xmlns:ma14="http://schemas.microsoft.com/office/mac/drawingml/2011/main" xmlns:a14="http://schemas.microsoft.com/office/drawing/2010/main" xmlns:m="http://schemas.openxmlformats.org/officeDocument/2006/math" xmlns="" val="1"/>
             </a:ext>
           </a:extLst>
         </p:spPr>
@@ -9936,7 +11279,7 @@
           </a:ln>
           <a:extLst>
             <a:ext uri="{C572A759-6A51-4108-AA02-DFA0A04FC94B}">
-              <ma14:wrappingTextBoxFlag xmlns="" xmlns:m="http://schemas.openxmlformats.org/officeDocument/2006/math" xmlns:a14="http://schemas.microsoft.com/office/drawing/2010/main" xmlns:ma14="http://schemas.microsoft.com/office/mac/drawingml/2011/main" val="1"/>
+              <ma14:wrappingTextBoxFlag xmlns:ma14="http://schemas.microsoft.com/office/mac/drawingml/2011/main" xmlns:a14="http://schemas.microsoft.com/office/drawing/2010/main" xmlns:m="http://schemas.openxmlformats.org/officeDocument/2006/math" xmlns="" val="1"/>
             </a:ext>
           </a:extLst>
         </p:spPr>
@@ -9967,1066 +11310,6 @@
         <p14:creationId xmlns:p14="http://schemas.microsoft.com/office/powerpoint/2010/main" val="857437704"/>
       </p:ext>
     </p:extLst>
-  </p:cSld>
-  <p:clrMapOvr>
-    <a:masterClrMapping/>
-  </p:clrMapOvr>
-  <p:transition spd="med"/>
-</p:sld>
-</file>
-
-<file path=ppt/slides/slide7.xml><?xml version="1.0" encoding="utf-8"?>
-<p:sld xmlns:a="http://schemas.openxmlformats.org/drawingml/2006/main" xmlns:r="http://schemas.openxmlformats.org/officeDocument/2006/relationships" xmlns:p="http://schemas.openxmlformats.org/presentationml/2006/main">
-  <p:cSld>
-    <p:spTree>
-      <p:nvGrpSpPr>
-        <p:cNvPr id="1" name=""/>
-        <p:cNvGrpSpPr/>
-        <p:nvPr/>
-      </p:nvGrpSpPr>
-      <p:grpSpPr>
-        <a:xfrm>
-          <a:off x="0" y="0"/>
-          <a:ext cx="0" cy="0"/>
-          <a:chOff x="0" y="0"/>
-          <a:chExt cx="0" cy="0"/>
-        </a:xfrm>
-      </p:grpSpPr>
-      <mc:AlternateContent xmlns:mc="http://schemas.openxmlformats.org/markup-compatibility/2006">
-        <mc:Choice xmlns:a14="http://schemas.microsoft.com/office/drawing/2010/main" Requires="a14">
-          <p:sp>
-            <p:nvSpPr>
-              <p:cNvPr id="196" name="First define   as the proportion of instances in the   node that are from class…"/>
-              <p:cNvSpPr txBox="1">
-                <a:spLocks noGrp="1"/>
-              </p:cNvSpPr>
-              <p:nvPr>
-                <p:ph type="body" idx="1"/>
-              </p:nvPr>
-            </p:nvSpPr>
-            <p:spPr>
-              <a:prstGeom prst="rect">
-                <a:avLst/>
-              </a:prstGeom>
-            </p:spPr>
-            <p:txBody>
-              <a:bodyPr/>
-              <a:lstStyle/>
-              <a:p>
-                <a:r>
-                  <a:rPr lang="en-US" dirty="0"/>
-                  <a:t>Define </a:t>
-                </a:r>
-                <a14:m>
-                  <m:oMath xmlns:m="http://schemas.openxmlformats.org/officeDocument/2006/math">
-                    <m:sSub>
-                      <m:sSubPr>
-                        <m:ctrlPr>
-                          <a:rPr lang="ar-AE" sz="2285" i="1">
-                            <a:solidFill>
-                              <a:srgbClr val="000000"/>
-                            </a:solidFill>
-                            <a:latin typeface="Cambria Math" panose="02040503050406030204" pitchFamily="18" charset="0"/>
-                          </a:rPr>
-                        </m:ctrlPr>
-                      </m:sSubPr>
-                      <m:e>
-                        <m:r>
-                          <a:rPr lang="ar-AE" sz="2285" i="1">
-                            <a:solidFill>
-                              <a:srgbClr val="000000"/>
-                            </a:solidFill>
-                            <a:latin typeface="Cambria Math" panose="02040503050406030204" pitchFamily="18" charset="0"/>
-                          </a:rPr>
-                          <m:t>𝑝</m:t>
-                        </m:r>
-                      </m:e>
-                      <m:sub>
-                        <m:r>
-                          <a:rPr lang="ar-AE" sz="2285" i="1">
-                            <a:solidFill>
-                              <a:srgbClr val="000000"/>
-                            </a:solidFill>
-                            <a:latin typeface="Cambria Math" panose="02040503050406030204" pitchFamily="18" charset="0"/>
-                          </a:rPr>
-                          <m:t>𝑖𝑘</m:t>
-                        </m:r>
-                      </m:sub>
-                    </m:sSub>
-                  </m:oMath>
-                </a14:m>
-                <a:r>
-                  <a:rPr lang="ar-AE" dirty="0"/>
-                  <a:t> </a:t>
-                </a:r>
-                <a:r>
-                  <a:rPr lang="en-US" dirty="0"/>
-                  <a:t>as the proportion of instances in the </a:t>
-                </a:r>
-                <a14:m>
-                  <m:oMath xmlns:m="http://schemas.openxmlformats.org/officeDocument/2006/math">
-                    <m:sSup>
-                      <m:sSupPr>
-                        <m:ctrlPr>
-                          <a:rPr lang="ar-AE" sz="2285" i="1">
-                            <a:solidFill>
-                              <a:srgbClr val="000000"/>
-                            </a:solidFill>
-                            <a:latin typeface="Cambria Math" panose="02040503050406030204" pitchFamily="18" charset="0"/>
-                          </a:rPr>
-                        </m:ctrlPr>
-                      </m:sSupPr>
-                      <m:e>
-                        <m:r>
-                          <a:rPr lang="ar-AE" sz="2285" i="1">
-                            <a:solidFill>
-                              <a:srgbClr val="000000"/>
-                            </a:solidFill>
-                            <a:latin typeface="Cambria Math" panose="02040503050406030204" pitchFamily="18" charset="0"/>
-                          </a:rPr>
-                          <m:t>𝑖</m:t>
-                        </m:r>
-                      </m:e>
-                      <m:sup>
-                        <m:r>
-                          <a:rPr lang="ar-AE" sz="2285" i="1">
-                            <a:solidFill>
-                              <a:srgbClr val="000000"/>
-                            </a:solidFill>
-                            <a:latin typeface="Cambria Math" panose="02040503050406030204" pitchFamily="18" charset="0"/>
-                          </a:rPr>
-                          <m:t>𝑡</m:t>
-                        </m:r>
-                        <m:r>
-                          <a:rPr lang="ar-AE" sz="2285" i="1">
-                            <a:solidFill>
-                              <a:srgbClr val="000000"/>
-                            </a:solidFill>
-                            <a:latin typeface="Cambria Math" panose="02040503050406030204" pitchFamily="18" charset="0"/>
-                          </a:rPr>
-                          <m:t>h</m:t>
-                        </m:r>
-                      </m:sup>
-                    </m:sSup>
-                  </m:oMath>
-                </a14:m>
-                <a:r>
-                  <a:rPr lang="ar-AE" dirty="0"/>
-                  <a:t> </a:t>
-                </a:r>
-                <a:r>
-                  <a:rPr lang="en-US" dirty="0"/>
-                  <a:t>node that are from class </a:t>
-                </a:r>
-                <a14:m>
-                  <m:oMath xmlns:m="http://schemas.openxmlformats.org/officeDocument/2006/math">
-                    <m:r>
-                      <a:rPr lang="en-US" sz="2285" i="1">
-                        <a:solidFill>
-                          <a:srgbClr val="000000"/>
-                        </a:solidFill>
-                        <a:latin typeface="Cambria Math" panose="02040503050406030204" pitchFamily="18" charset="0"/>
-                      </a:rPr>
-                      <m:t>𝑘</m:t>
-                    </m:r>
-                  </m:oMath>
-                </a14:m>
-                <a:endParaRPr lang="en-US" dirty="0"/>
-              </a:p>
-              <a:p>
-                <a:r>
-                  <a:rPr lang="en-US" dirty="0"/>
-                  <a:t>Gini index </a:t>
-                </a:r>
-                <a:br>
-                  <a:rPr lang="en-US" dirty="0"/>
-                </a:br>
-                <a:br>
-                  <a:rPr lang="en-US" dirty="0"/>
-                </a:br>
-                <a14:m>
-                  <m:oMath xmlns:m="http://schemas.openxmlformats.org/officeDocument/2006/math">
-                    <m:r>
-                      <a:rPr lang="en-US" sz="2285" b="0" i="0" smtClean="0">
-                        <a:solidFill>
-                          <a:srgbClr val="000000"/>
-                        </a:solidFill>
-                        <a:latin typeface="Cambria Math" panose="02040503050406030204" pitchFamily="18" charset="0"/>
-                      </a:rPr>
-                      <m:t>                                                        </m:t>
-                    </m:r>
-                    <m:r>
-                      <a:rPr lang="en-US" sz="2285" b="0" i="1" smtClean="0">
-                        <a:solidFill>
-                          <a:srgbClr val="000000"/>
-                        </a:solidFill>
-                        <a:latin typeface="Cambria Math" panose="02040503050406030204" pitchFamily="18" charset="0"/>
-                      </a:rPr>
-                      <m:t> </m:t>
-                    </m:r>
-                    <m:sSub>
-                      <m:sSubPr>
-                        <m:ctrlPr>
-                          <a:rPr lang="ar-AE" sz="2285" i="1">
-                            <a:solidFill>
-                              <a:srgbClr val="000000"/>
-                            </a:solidFill>
-                            <a:latin typeface="Cambria Math" panose="02040503050406030204" pitchFamily="18" charset="0"/>
-                          </a:rPr>
-                        </m:ctrlPr>
-                      </m:sSubPr>
-                      <m:e>
-                        <m:r>
-                          <a:rPr lang="ar-AE" sz="2285" i="1">
-                            <a:solidFill>
-                              <a:srgbClr val="000000"/>
-                            </a:solidFill>
-                            <a:latin typeface="Cambria Math" panose="02040503050406030204" pitchFamily="18" charset="0"/>
-                          </a:rPr>
-                          <m:t>𝐺</m:t>
-                        </m:r>
-                      </m:e>
-                      <m:sub>
-                        <m:r>
-                          <a:rPr lang="ar-AE" sz="2285" i="1">
-                            <a:solidFill>
-                              <a:srgbClr val="000000"/>
-                            </a:solidFill>
-                            <a:latin typeface="Cambria Math" panose="02040503050406030204" pitchFamily="18" charset="0"/>
-                          </a:rPr>
-                          <m:t>𝑖</m:t>
-                        </m:r>
-                      </m:sub>
-                    </m:sSub>
-                    <m:r>
-                      <a:rPr lang="ar-AE" sz="2285" i="1">
-                        <a:solidFill>
-                          <a:srgbClr val="000000"/>
-                        </a:solidFill>
-                        <a:latin typeface="Cambria Math" panose="02040503050406030204" pitchFamily="18" charset="0"/>
-                      </a:rPr>
-                      <m:t>=</m:t>
-                    </m:r>
-                    <m:r>
-                      <a:rPr lang="ar-AE" sz="2285" i="1">
-                        <a:solidFill>
-                          <a:srgbClr val="000000"/>
-                        </a:solidFill>
-                        <a:latin typeface="Cambria Math" panose="02040503050406030204" pitchFamily="18" charset="0"/>
-                      </a:rPr>
-                      <m:t>1</m:t>
-                    </m:r>
-                    <m:r>
-                      <a:rPr lang="ar-AE" sz="2285" i="1">
-                        <a:solidFill>
-                          <a:srgbClr val="000000"/>
-                        </a:solidFill>
-                        <a:latin typeface="Cambria Math" panose="02040503050406030204" pitchFamily="18" charset="0"/>
-                      </a:rPr>
-                      <m:t>−</m:t>
-                    </m:r>
-                    <m:limUpp>
-                      <m:limUppPr>
-                        <m:ctrlPr>
-                          <a:rPr lang="ar-AE" sz="2285" i="1">
-                            <a:solidFill>
-                              <a:srgbClr val="000000"/>
-                            </a:solidFill>
-                            <a:latin typeface="Cambria Math" panose="02040503050406030204" pitchFamily="18" charset="0"/>
-                          </a:rPr>
-                        </m:ctrlPr>
-                      </m:limUppPr>
-                      <m:e>
-                        <m:limLow>
-                          <m:limLowPr>
-                            <m:ctrlPr>
-                              <a:rPr lang="ar-AE" sz="2285" i="1">
-                                <a:solidFill>
-                                  <a:srgbClr val="000000"/>
-                                </a:solidFill>
-                                <a:latin typeface="Cambria Math" panose="02040503050406030204" pitchFamily="18" charset="0"/>
-                              </a:rPr>
-                            </m:ctrlPr>
-                          </m:limLowPr>
-                          <m:e>
-                            <m:r>
-                              <a:rPr lang="ar-AE" sz="2285" i="1">
-                                <a:solidFill>
-                                  <a:srgbClr val="000000"/>
-                                </a:solidFill>
-                                <a:latin typeface="Cambria Math" panose="02040503050406030204" pitchFamily="18" charset="0"/>
-                              </a:rPr>
-                              <m:t>∑</m:t>
-                            </m:r>
-                          </m:e>
-                          <m:lim>
-                            <m:r>
-                              <a:rPr lang="ar-AE" sz="2285" i="1">
-                                <a:solidFill>
-                                  <a:srgbClr val="000000"/>
-                                </a:solidFill>
-                                <a:latin typeface="Cambria Math" panose="02040503050406030204" pitchFamily="18" charset="0"/>
-                              </a:rPr>
-                              <m:t>𝑘</m:t>
-                            </m:r>
-                            <m:r>
-                              <a:rPr lang="ar-AE" sz="2285" i="1">
-                                <a:solidFill>
-                                  <a:srgbClr val="000000"/>
-                                </a:solidFill>
-                                <a:latin typeface="Cambria Math" panose="02040503050406030204" pitchFamily="18" charset="0"/>
-                              </a:rPr>
-                              <m:t>=</m:t>
-                            </m:r>
-                            <m:r>
-                              <a:rPr lang="ar-AE" sz="2285" i="1">
-                                <a:solidFill>
-                                  <a:srgbClr val="000000"/>
-                                </a:solidFill>
-                                <a:latin typeface="Cambria Math" panose="02040503050406030204" pitchFamily="18" charset="0"/>
-                              </a:rPr>
-                              <m:t>1</m:t>
-                            </m:r>
-                          </m:lim>
-                        </m:limLow>
-                      </m:e>
-                      <m:lim>
-                        <m:r>
-                          <a:rPr lang="ar-AE" sz="2285" i="1">
-                            <a:solidFill>
-                              <a:srgbClr val="000000"/>
-                            </a:solidFill>
-                            <a:latin typeface="Cambria Math" panose="02040503050406030204" pitchFamily="18" charset="0"/>
-                          </a:rPr>
-                          <m:t>𝐾</m:t>
-                        </m:r>
-                      </m:lim>
-                    </m:limUpp>
-                    <m:sSubSup>
-                      <m:sSubSupPr>
-                        <m:ctrlPr>
-                          <a:rPr lang="ar-AE" sz="2285" i="1">
-                            <a:solidFill>
-                              <a:srgbClr val="000000"/>
-                            </a:solidFill>
-                            <a:latin typeface="Cambria Math" panose="02040503050406030204" pitchFamily="18" charset="0"/>
-                          </a:rPr>
-                        </m:ctrlPr>
-                      </m:sSubSupPr>
-                      <m:e>
-                        <m:r>
-                          <a:rPr lang="ar-AE" sz="2285" i="1">
-                            <a:solidFill>
-                              <a:srgbClr val="000000"/>
-                            </a:solidFill>
-                            <a:latin typeface="Cambria Math" panose="02040503050406030204" pitchFamily="18" charset="0"/>
-                          </a:rPr>
-                          <m:t>𝑝</m:t>
-                        </m:r>
-                      </m:e>
-                      <m:sub>
-                        <m:r>
-                          <a:rPr lang="ar-AE" sz="2285" i="1">
-                            <a:solidFill>
-                              <a:srgbClr val="000000"/>
-                            </a:solidFill>
-                            <a:latin typeface="Cambria Math" panose="02040503050406030204" pitchFamily="18" charset="0"/>
-                          </a:rPr>
-                          <m:t>𝑖𝑘</m:t>
-                        </m:r>
-                      </m:sub>
-                      <m:sup>
-                        <m:r>
-                          <a:rPr lang="ar-AE" sz="2285" i="1">
-                            <a:solidFill>
-                              <a:srgbClr val="000000"/>
-                            </a:solidFill>
-                            <a:latin typeface="Cambria Math" panose="02040503050406030204" pitchFamily="18" charset="0"/>
-                          </a:rPr>
-                          <m:t>2</m:t>
-                        </m:r>
-                      </m:sup>
-                    </m:sSubSup>
-                    <m:r>
-                      <a:rPr lang="ar-AE" sz="2285" i="1">
-                        <a:solidFill>
-                          <a:srgbClr val="000000"/>
-                        </a:solidFill>
-                        <a:latin typeface="Cambria Math" panose="02040503050406030204" pitchFamily="18" charset="0"/>
-                      </a:rPr>
-                      <m:t>=</m:t>
-                    </m:r>
-                    <m:limUpp>
-                      <m:limUppPr>
-                        <m:ctrlPr>
-                          <a:rPr lang="ar-AE" sz="2285" i="1">
-                            <a:solidFill>
-                              <a:srgbClr val="000000"/>
-                            </a:solidFill>
-                            <a:latin typeface="Cambria Math" panose="02040503050406030204" pitchFamily="18" charset="0"/>
-                          </a:rPr>
-                        </m:ctrlPr>
-                      </m:limUppPr>
-                      <m:e>
-                        <m:limLow>
-                          <m:limLowPr>
-                            <m:ctrlPr>
-                              <a:rPr lang="ar-AE" sz="2285" i="1">
-                                <a:solidFill>
-                                  <a:srgbClr val="000000"/>
-                                </a:solidFill>
-                                <a:latin typeface="Cambria Math" panose="02040503050406030204" pitchFamily="18" charset="0"/>
-                              </a:rPr>
-                            </m:ctrlPr>
-                          </m:limLowPr>
-                          <m:e>
-                            <m:r>
-                              <a:rPr lang="ar-AE" sz="2285" i="1">
-                                <a:solidFill>
-                                  <a:srgbClr val="000000"/>
-                                </a:solidFill>
-                                <a:latin typeface="Cambria Math" panose="02040503050406030204" pitchFamily="18" charset="0"/>
-                              </a:rPr>
-                              <m:t>∑</m:t>
-                            </m:r>
-                          </m:e>
-                          <m:lim>
-                            <m:r>
-                              <a:rPr lang="ar-AE" sz="2285" i="1">
-                                <a:solidFill>
-                                  <a:srgbClr val="000000"/>
-                                </a:solidFill>
-                                <a:latin typeface="Cambria Math" panose="02040503050406030204" pitchFamily="18" charset="0"/>
-                              </a:rPr>
-                              <m:t>𝑘</m:t>
-                            </m:r>
-                            <m:r>
-                              <a:rPr lang="ar-AE" sz="2285" i="1">
-                                <a:solidFill>
-                                  <a:srgbClr val="000000"/>
-                                </a:solidFill>
-                                <a:latin typeface="Cambria Math" panose="02040503050406030204" pitchFamily="18" charset="0"/>
-                              </a:rPr>
-                              <m:t>=</m:t>
-                            </m:r>
-                            <m:r>
-                              <a:rPr lang="ar-AE" sz="2285" i="1">
-                                <a:solidFill>
-                                  <a:srgbClr val="000000"/>
-                                </a:solidFill>
-                                <a:latin typeface="Cambria Math" panose="02040503050406030204" pitchFamily="18" charset="0"/>
-                              </a:rPr>
-                              <m:t>1</m:t>
-                            </m:r>
-                          </m:lim>
-                        </m:limLow>
-                      </m:e>
-                      <m:lim>
-                        <m:r>
-                          <a:rPr lang="ar-AE" sz="2285" i="1">
-                            <a:solidFill>
-                              <a:srgbClr val="000000"/>
-                            </a:solidFill>
-                            <a:latin typeface="Cambria Math" panose="02040503050406030204" pitchFamily="18" charset="0"/>
-                          </a:rPr>
-                          <m:t>𝐾</m:t>
-                        </m:r>
-                      </m:lim>
-                    </m:limUpp>
-                    <m:sSub>
-                      <m:sSubPr>
-                        <m:ctrlPr>
-                          <a:rPr lang="ar-AE" sz="2285" i="1">
-                            <a:solidFill>
-                              <a:srgbClr val="000000"/>
-                            </a:solidFill>
-                            <a:latin typeface="Cambria Math" panose="02040503050406030204" pitchFamily="18" charset="0"/>
-                          </a:rPr>
-                        </m:ctrlPr>
-                      </m:sSubPr>
-                      <m:e>
-                        <m:r>
-                          <a:rPr lang="ar-AE" sz="2285" i="1">
-                            <a:solidFill>
-                              <a:srgbClr val="000000"/>
-                            </a:solidFill>
-                            <a:latin typeface="Cambria Math" panose="02040503050406030204" pitchFamily="18" charset="0"/>
-                          </a:rPr>
-                          <m:t>𝑝</m:t>
-                        </m:r>
-                      </m:e>
-                      <m:sub>
-                        <m:r>
-                          <a:rPr lang="ar-AE" sz="2285" i="1">
-                            <a:solidFill>
-                              <a:srgbClr val="000000"/>
-                            </a:solidFill>
-                            <a:latin typeface="Cambria Math" panose="02040503050406030204" pitchFamily="18" charset="0"/>
-                          </a:rPr>
-                          <m:t>𝑖𝑘</m:t>
-                        </m:r>
-                      </m:sub>
-                    </m:sSub>
-                    <m:r>
-                      <a:rPr lang="ar-AE" sz="2285" i="1">
-                        <a:solidFill>
-                          <a:srgbClr val="000000"/>
-                        </a:solidFill>
-                        <a:latin typeface="Cambria Math" panose="02040503050406030204" pitchFamily="18" charset="0"/>
-                      </a:rPr>
-                      <m:t>(</m:t>
-                    </m:r>
-                    <m:r>
-                      <a:rPr lang="ar-AE" sz="2285" i="1">
-                        <a:solidFill>
-                          <a:srgbClr val="000000"/>
-                        </a:solidFill>
-                        <a:latin typeface="Cambria Math" panose="02040503050406030204" pitchFamily="18" charset="0"/>
-                      </a:rPr>
-                      <m:t>1</m:t>
-                    </m:r>
-                    <m:r>
-                      <a:rPr lang="ar-AE" sz="2285" i="1">
-                        <a:solidFill>
-                          <a:srgbClr val="000000"/>
-                        </a:solidFill>
-                        <a:latin typeface="Cambria Math" panose="02040503050406030204" pitchFamily="18" charset="0"/>
-                      </a:rPr>
-                      <m:t>−</m:t>
-                    </m:r>
-                    <m:sSub>
-                      <m:sSubPr>
-                        <m:ctrlPr>
-                          <a:rPr lang="ar-AE" sz="2285" i="1">
-                            <a:solidFill>
-                              <a:srgbClr val="000000"/>
-                            </a:solidFill>
-                            <a:latin typeface="Cambria Math" panose="02040503050406030204" pitchFamily="18" charset="0"/>
-                          </a:rPr>
-                        </m:ctrlPr>
-                      </m:sSubPr>
-                      <m:e>
-                        <m:r>
-                          <a:rPr lang="ar-AE" sz="2285" i="1">
-                            <a:solidFill>
-                              <a:srgbClr val="000000"/>
-                            </a:solidFill>
-                            <a:latin typeface="Cambria Math" panose="02040503050406030204" pitchFamily="18" charset="0"/>
-                          </a:rPr>
-                          <m:t>𝑝</m:t>
-                        </m:r>
-                      </m:e>
-                      <m:sub>
-                        <m:r>
-                          <a:rPr lang="ar-AE" sz="2285" i="1">
-                            <a:solidFill>
-                              <a:srgbClr val="000000"/>
-                            </a:solidFill>
-                            <a:latin typeface="Cambria Math" panose="02040503050406030204" pitchFamily="18" charset="0"/>
-                          </a:rPr>
-                          <m:t>𝑖𝑘</m:t>
-                        </m:r>
-                      </m:sub>
-                    </m:sSub>
-                    <m:r>
-                      <a:rPr lang="ar-AE" sz="2285" i="1">
-                        <a:solidFill>
-                          <a:srgbClr val="000000"/>
-                        </a:solidFill>
-                        <a:latin typeface="Cambria Math" panose="02040503050406030204" pitchFamily="18" charset="0"/>
-                      </a:rPr>
-                      <m:t>)</m:t>
-                    </m:r>
-                  </m:oMath>
-                </a14:m>
-                <a:r>
-                  <a:rPr lang="ar-AE" dirty="0"/>
-                  <a:t>    </a:t>
-                </a:r>
-              </a:p>
-              <a:p>
-                <a:r>
-                  <a:rPr lang="en-US" dirty="0"/>
-                  <a:t>Cross Entropy </a:t>
-                </a:r>
-                <a:br>
-                  <a:rPr lang="en-US" dirty="0"/>
-                </a:br>
-                <a14:m>
-                  <m:oMath xmlns:m="http://schemas.openxmlformats.org/officeDocument/2006/math">
-                    <m:sSub>
-                      <m:sSubPr>
-                        <m:ctrlPr>
-                          <a:rPr lang="ar-AE" sz="2285" i="1">
-                            <a:solidFill>
-                              <a:srgbClr val="000000"/>
-                            </a:solidFill>
-                            <a:latin typeface="Cambria Math" panose="02040503050406030204" pitchFamily="18" charset="0"/>
-                          </a:rPr>
-                        </m:ctrlPr>
-                      </m:sSubPr>
-                      <m:e>
-                        <m:r>
-                          <a:rPr lang="ar-AE" sz="2285" i="1">
-                            <a:solidFill>
-                              <a:srgbClr val="000000"/>
-                            </a:solidFill>
-                            <a:latin typeface="Cambria Math" panose="02040503050406030204" pitchFamily="18" charset="0"/>
-                          </a:rPr>
-                          <m:t>𝐻</m:t>
-                        </m:r>
-                      </m:e>
-                      <m:sub>
-                        <m:r>
-                          <a:rPr lang="ar-AE" sz="2285" i="1">
-                            <a:solidFill>
-                              <a:srgbClr val="000000"/>
-                            </a:solidFill>
-                            <a:latin typeface="Cambria Math" panose="02040503050406030204" pitchFamily="18" charset="0"/>
-                          </a:rPr>
-                          <m:t>𝑖</m:t>
-                        </m:r>
-                      </m:sub>
-                    </m:sSub>
-                    <m:r>
-                      <a:rPr lang="ar-AE" sz="2285" i="1">
-                        <a:solidFill>
-                          <a:srgbClr val="000000"/>
-                        </a:solidFill>
-                        <a:latin typeface="Cambria Math" panose="02040503050406030204" pitchFamily="18" charset="0"/>
-                      </a:rPr>
-                      <m:t>=−</m:t>
-                    </m:r>
-                    <m:limUpp>
-                      <m:limUppPr>
-                        <m:ctrlPr>
-                          <a:rPr lang="ar-AE" sz="2285" i="1">
-                            <a:solidFill>
-                              <a:srgbClr val="000000"/>
-                            </a:solidFill>
-                            <a:latin typeface="Cambria Math" panose="02040503050406030204" pitchFamily="18" charset="0"/>
-                          </a:rPr>
-                        </m:ctrlPr>
-                      </m:limUppPr>
-                      <m:e>
-                        <m:limLow>
-                          <m:limLowPr>
-                            <m:ctrlPr>
-                              <a:rPr lang="ar-AE" sz="2285" i="1">
-                                <a:solidFill>
-                                  <a:srgbClr val="000000"/>
-                                </a:solidFill>
-                                <a:latin typeface="Cambria Math" panose="02040503050406030204" pitchFamily="18" charset="0"/>
-                              </a:rPr>
-                            </m:ctrlPr>
-                          </m:limLowPr>
-                          <m:e>
-                            <m:r>
-                              <a:rPr lang="ar-AE" sz="2285" i="1">
-                                <a:solidFill>
-                                  <a:srgbClr val="000000"/>
-                                </a:solidFill>
-                                <a:latin typeface="Cambria Math" panose="02040503050406030204" pitchFamily="18" charset="0"/>
-                              </a:rPr>
-                              <m:t>∑</m:t>
-                            </m:r>
-                          </m:e>
-                          <m:lim>
-                            <m:r>
-                              <a:rPr lang="ar-AE" sz="2285" i="1">
-                                <a:solidFill>
-                                  <a:srgbClr val="000000"/>
-                                </a:solidFill>
-                                <a:latin typeface="Cambria Math" panose="02040503050406030204" pitchFamily="18" charset="0"/>
-                              </a:rPr>
-                              <m:t>𝑘</m:t>
-                            </m:r>
-                            <m:r>
-                              <a:rPr lang="ar-AE" sz="2285" i="1">
-                                <a:solidFill>
-                                  <a:srgbClr val="000000"/>
-                                </a:solidFill>
-                                <a:latin typeface="Cambria Math" panose="02040503050406030204" pitchFamily="18" charset="0"/>
-                              </a:rPr>
-                              <m:t>=</m:t>
-                            </m:r>
-                            <m:r>
-                              <a:rPr lang="ar-AE" sz="2285" i="1">
-                                <a:solidFill>
-                                  <a:srgbClr val="000000"/>
-                                </a:solidFill>
-                                <a:latin typeface="Cambria Math" panose="02040503050406030204" pitchFamily="18" charset="0"/>
-                              </a:rPr>
-                              <m:t>1</m:t>
-                            </m:r>
-                          </m:lim>
-                        </m:limLow>
-                      </m:e>
-                      <m:lim>
-                        <m:r>
-                          <a:rPr lang="ar-AE" sz="2285" i="1">
-                            <a:solidFill>
-                              <a:srgbClr val="000000"/>
-                            </a:solidFill>
-                            <a:latin typeface="Cambria Math" panose="02040503050406030204" pitchFamily="18" charset="0"/>
-                          </a:rPr>
-                          <m:t>𝐾</m:t>
-                        </m:r>
-                      </m:lim>
-                    </m:limUpp>
-                    <m:sSub>
-                      <m:sSubPr>
-                        <m:ctrlPr>
-                          <a:rPr lang="ar-AE" sz="2285" i="1">
-                            <a:solidFill>
-                              <a:srgbClr val="000000"/>
-                            </a:solidFill>
-                            <a:latin typeface="Cambria Math" panose="02040503050406030204" pitchFamily="18" charset="0"/>
-                          </a:rPr>
-                        </m:ctrlPr>
-                      </m:sSubPr>
-                      <m:e>
-                        <m:r>
-                          <a:rPr lang="ar-AE" sz="2285" i="1">
-                            <a:solidFill>
-                              <a:srgbClr val="000000"/>
-                            </a:solidFill>
-                            <a:latin typeface="Cambria Math" panose="02040503050406030204" pitchFamily="18" charset="0"/>
-                          </a:rPr>
-                          <m:t>𝑝</m:t>
-                        </m:r>
-                      </m:e>
-                      <m:sub>
-                        <m:r>
-                          <a:rPr lang="ar-AE" sz="2285" i="1">
-                            <a:solidFill>
-                              <a:srgbClr val="000000"/>
-                            </a:solidFill>
-                            <a:latin typeface="Cambria Math" panose="02040503050406030204" pitchFamily="18" charset="0"/>
-                          </a:rPr>
-                          <m:t>𝑖𝑘</m:t>
-                        </m:r>
-                      </m:sub>
-                    </m:sSub>
-                    <m:sSub>
-                      <m:sSubPr>
-                        <m:ctrlPr>
-                          <a:rPr lang="ar-AE" sz="2285" i="1">
-                            <a:solidFill>
-                              <a:srgbClr val="000000"/>
-                            </a:solidFill>
-                            <a:latin typeface="Cambria Math" panose="02040503050406030204" pitchFamily="18" charset="0"/>
-                          </a:rPr>
-                        </m:ctrlPr>
-                      </m:sSubPr>
-                      <m:e>
-                        <m:r>
-                          <m:rPr>
-                            <m:sty m:val="p"/>
-                          </m:rPr>
-                          <a:rPr lang="en-US" sz="2285" i="1">
-                            <a:solidFill>
-                              <a:srgbClr val="000000"/>
-                            </a:solidFill>
-                            <a:latin typeface="Cambria Math" panose="02040503050406030204" pitchFamily="18" charset="0"/>
-                          </a:rPr>
-                          <m:t>log</m:t>
-                        </m:r>
-                      </m:e>
-                      <m:sub>
-                        <m:r>
-                          <a:rPr lang="ar-AE" sz="2285" i="1">
-                            <a:solidFill>
-                              <a:srgbClr val="000000"/>
-                            </a:solidFill>
-                            <a:latin typeface="Cambria Math" panose="02040503050406030204" pitchFamily="18" charset="0"/>
-                          </a:rPr>
-                          <m:t>2</m:t>
-                        </m:r>
-                      </m:sub>
-                    </m:sSub>
-                    <m:r>
-                      <a:rPr lang="ar-AE" sz="2285" i="1">
-                        <a:solidFill>
-                          <a:srgbClr val="000000"/>
-                        </a:solidFill>
-                        <a:latin typeface="Cambria Math" panose="02040503050406030204" pitchFamily="18" charset="0"/>
-                      </a:rPr>
-                      <m:t>(</m:t>
-                    </m:r>
-                    <m:sSub>
-                      <m:sSubPr>
-                        <m:ctrlPr>
-                          <a:rPr lang="ar-AE" sz="2285" i="1">
-                            <a:solidFill>
-                              <a:srgbClr val="000000"/>
-                            </a:solidFill>
-                            <a:latin typeface="Cambria Math" panose="02040503050406030204" pitchFamily="18" charset="0"/>
-                          </a:rPr>
-                        </m:ctrlPr>
-                      </m:sSubPr>
-                      <m:e>
-                        <m:r>
-                          <a:rPr lang="ar-AE" sz="2285" i="1">
-                            <a:solidFill>
-                              <a:srgbClr val="000000"/>
-                            </a:solidFill>
-                            <a:latin typeface="Cambria Math" panose="02040503050406030204" pitchFamily="18" charset="0"/>
-                          </a:rPr>
-                          <m:t>𝑝</m:t>
-                        </m:r>
-                      </m:e>
-                      <m:sub>
-                        <m:r>
-                          <a:rPr lang="ar-AE" sz="2285" i="1">
-                            <a:solidFill>
-                              <a:srgbClr val="000000"/>
-                            </a:solidFill>
-                            <a:latin typeface="Cambria Math" panose="02040503050406030204" pitchFamily="18" charset="0"/>
-                          </a:rPr>
-                          <m:t>𝑖𝑘</m:t>
-                        </m:r>
-                      </m:sub>
-                    </m:sSub>
-                    <m:r>
-                      <a:rPr lang="ar-AE" sz="2285" i="1">
-                        <a:solidFill>
-                          <a:srgbClr val="000000"/>
-                        </a:solidFill>
-                        <a:latin typeface="Cambria Math" panose="02040503050406030204" pitchFamily="18" charset="0"/>
-                      </a:rPr>
-                      <m:t>)</m:t>
-                    </m:r>
-                  </m:oMath>
-                </a14:m>
-                <a:endParaRPr dirty="0"/>
-              </a:p>
-            </p:txBody>
-          </p:sp>
-        </mc:Choice>
-        <mc:Fallback>
-          <p:sp>
-            <p:nvSpPr>
-              <p:cNvPr id="196" name="First define   as the proportion of instances in the   node that are from class…"/>
-              <p:cNvSpPr txBox="1">
-                <a:spLocks noGrp="1" noRot="1" noChangeAspect="1" noMove="1" noResize="1" noEditPoints="1" noAdjustHandles="1" noChangeArrowheads="1" noChangeShapeType="1" noTextEdit="1"/>
-              </p:cNvSpPr>
-              <p:nvPr>
-                <p:ph type="body" idx="1"/>
-              </p:nvPr>
-            </p:nvSpPr>
-            <p:spPr>
-              <a:prstGeom prst="rect">
-                <a:avLst/>
-              </a:prstGeom>
-              <a:blipFill>
-                <a:blip r:embed="rId2"/>
-                <a:stretch>
-                  <a:fillRect l="-513"/>
-                </a:stretch>
-              </a:blipFill>
-            </p:spPr>
-            <p:txBody>
-              <a:bodyPr/>
-              <a:lstStyle/>
-              <a:p>
-                <a:r>
-                  <a:rPr lang="en-US">
-                    <a:noFill/>
-                  </a:rPr>
-                  <a:t> </a:t>
-                </a:r>
-              </a:p>
-            </p:txBody>
-          </p:sp>
-        </mc:Fallback>
-      </mc:AlternateContent>
-      <p:sp>
-        <p:nvSpPr>
-          <p:cNvPr id="197" name="Node Impurity Measures (Classification)"/>
-          <p:cNvSpPr txBox="1">
-            <a:spLocks noGrp="1"/>
-          </p:cNvSpPr>
-          <p:nvPr>
-            <p:ph type="title"/>
-          </p:nvPr>
-        </p:nvSpPr>
-        <p:spPr>
-          <a:prstGeom prst="rect">
-            <a:avLst/>
-          </a:prstGeom>
-        </p:spPr>
-        <p:txBody>
-          <a:bodyPr>
-            <a:normAutofit/>
-          </a:bodyPr>
-          <a:lstStyle>
-            <a:lvl1pPr defTabSz="1473840">
-              <a:defRPr sz="5100" spc="-102"/>
-            </a:lvl1pPr>
-          </a:lstStyle>
-          <a:p>
-            <a:r>
-              <a:rPr sz="4000" dirty="0"/>
-              <a:t>Node Impurity Measures (Classification)</a:t>
-            </a:r>
-          </a:p>
-        </p:txBody>
-      </p:sp>
-      <mc:AlternateContent xmlns:mc="http://schemas.openxmlformats.org/markup-compatibility/2006">
-        <mc:Choice xmlns:a14="http://schemas.microsoft.com/office/drawing/2010/main" Requires="a14">
-          <p:sp>
-            <p:nvSpPr>
-              <p:cNvPr id="198" name="equation.pdf"/>
-              <p:cNvSpPr txBox="1"/>
-              <p:nvPr/>
-            </p:nvSpPr>
-            <p:spPr>
-              <a:xfrm>
-                <a:off x="5449348" y="5513123"/>
-                <a:ext cx="646652" cy="194797"/>
-              </a:xfrm>
-              <a:prstGeom prst="rect">
-                <a:avLst/>
-              </a:prstGeom>
-              <a:ln w="12700">
-                <a:miter lim="400000"/>
-              </a:ln>
-            </p:spPr>
-            <p:txBody>
-              <a:bodyPr wrap="none" lIns="0" tIns="0" rIns="0" bIns="0">
-                <a:spAutoFit/>
-              </a:bodyPr>
-              <a:lstStyle/>
-              <a:p>
-                <a:pPr defTabSz="642915" latinLnBrk="1">
-                  <a:defRPr sz="1800">
-                    <a:solidFill>
-                      <a:srgbClr val="000000"/>
-                    </a:solidFill>
-                  </a:defRPr>
-                </a:pPr>
-                <a14:m>
-                  <m:oMathPara xmlns:m="http://schemas.openxmlformats.org/officeDocument/2006/math">
-                    <m:oMathParaPr>
-                      <m:jc m:val="centerGroup"/>
-                    </m:oMathParaPr>
-                    <m:oMath xmlns:m="http://schemas.openxmlformats.org/officeDocument/2006/math">
-                      <m:r>
-                        <m:rPr>
-                          <m:nor/>
-                        </m:rPr>
-                        <a:rPr sz="1266" i="1">
-                          <a:solidFill>
-                            <a:srgbClr val="000000"/>
-                          </a:solidFill>
-                          <a:latin typeface="Cambria Math" panose="02040503050406030204" pitchFamily="18" charset="0"/>
-                        </a:rPr>
-                        <m:t>if</m:t>
-                      </m:r>
-                      <m:sSub>
-                        <m:sSubPr>
-                          <m:ctrlPr>
-                            <a:rPr sz="1266" i="1">
-                              <a:solidFill>
-                                <a:srgbClr val="000000"/>
-                              </a:solidFill>
-                              <a:latin typeface="Cambria Math" panose="02040503050406030204" pitchFamily="18" charset="0"/>
-                            </a:rPr>
-                          </m:ctrlPr>
-                        </m:sSubPr>
-                        <m:e>
-                          <m:r>
-                            <a:rPr sz="1266" i="1">
-                              <a:solidFill>
-                                <a:srgbClr val="000000"/>
-                              </a:solidFill>
-                              <a:latin typeface="Cambria Math" panose="02040503050406030204" pitchFamily="18" charset="0"/>
-                            </a:rPr>
-                            <m:t>𝑝</m:t>
-                          </m:r>
-                        </m:e>
-                        <m:sub>
-                          <m:r>
-                            <a:rPr sz="1266" i="1">
-                              <a:solidFill>
-                                <a:srgbClr val="000000"/>
-                              </a:solidFill>
-                              <a:latin typeface="Cambria Math" panose="02040503050406030204" pitchFamily="18" charset="0"/>
-                            </a:rPr>
-                            <m:t>𝑖𝑘</m:t>
-                          </m:r>
-                        </m:sub>
-                      </m:sSub>
-                      <m:r>
-                        <a:rPr sz="1266" i="1">
-                          <a:solidFill>
-                            <a:srgbClr val="000000"/>
-                          </a:solidFill>
-                          <a:latin typeface="Cambria Math" panose="02040503050406030204" pitchFamily="18" charset="0"/>
-                        </a:rPr>
-                        <m:t>≠</m:t>
-                      </m:r>
-                      <m:r>
-                        <a:rPr sz="1266" i="1">
-                          <a:solidFill>
-                            <a:srgbClr val="000000"/>
-                          </a:solidFill>
-                          <a:latin typeface="Cambria Math" panose="02040503050406030204" pitchFamily="18" charset="0"/>
-                        </a:rPr>
-                        <m:t>0</m:t>
-                      </m:r>
-                    </m:oMath>
-                  </m:oMathPara>
-                </a14:m>
-                <a:endParaRPr sz="1266" dirty="0"/>
-              </a:p>
-            </p:txBody>
-          </p:sp>
-        </mc:Choice>
-        <mc:Fallback>
-          <p:sp>
-            <p:nvSpPr>
-              <p:cNvPr id="198" name="equation.pdf"/>
-              <p:cNvSpPr txBox="1">
-                <a:spLocks noRot="1" noChangeAspect="1" noMove="1" noResize="1" noEditPoints="1" noAdjustHandles="1" noChangeArrowheads="1" noChangeShapeType="1" noTextEdit="1"/>
-              </p:cNvSpPr>
-              <p:nvPr/>
-            </p:nvSpPr>
-            <p:spPr>
-              <a:xfrm>
-                <a:off x="5449348" y="5513123"/>
-                <a:ext cx="646652" cy="194797"/>
-              </a:xfrm>
-              <a:prstGeom prst="rect">
-                <a:avLst/>
-              </a:prstGeom>
-              <a:blipFill>
-                <a:blip r:embed="rId3"/>
-                <a:stretch>
-                  <a:fillRect l="-5660" r="-4717" b="-21875"/>
-                </a:stretch>
-              </a:blipFill>
-              <a:ln w="12700">
-                <a:miter lim="400000"/>
-              </a:ln>
-            </p:spPr>
-            <p:txBody>
-              <a:bodyPr/>
-              <a:lstStyle/>
-              <a:p>
-                <a:r>
-                  <a:rPr lang="en-US">
-                    <a:noFill/>
-                  </a:rPr>
-                  <a:t> </a:t>
-                </a:r>
-              </a:p>
-            </p:txBody>
-          </p:sp>
-        </mc:Fallback>
-      </mc:AlternateContent>
-    </p:spTree>
   </p:cSld>
   <p:clrMapOvr>
     <a:masterClrMapping/>
@@ -11079,8 +11362,8 @@
           </a:ln>
         </p:spPr>
       </p:pic>
-      <mc:AlternateContent xmlns:mc="http://schemas.openxmlformats.org/markup-compatibility/2006">
-        <mc:Choice xmlns:a14="http://schemas.microsoft.com/office/drawing/2010/main" Requires="a14">
+      <mc:AlternateContent xmlns:mc="http://schemas.openxmlformats.org/markup-compatibility/2006" xmlns:a14="http://schemas.microsoft.com/office/drawing/2010/main">
+        <mc:Choice Requires="a14">
           <p:sp>
             <p:nvSpPr>
               <p:cNvPr id="201" name="Gini index :…"/>
@@ -11151,8 +11434,181 @@
                         </a:solidFill>
                         <a:latin typeface="Cambria Math" panose="02040503050406030204" pitchFamily="18" charset="0"/>
                       </a:rPr>
-                      <m:t>=</m:t>
+                      <m:t>=1−</m:t>
                     </m:r>
+                    <m:limUpp>
+                      <m:limUppPr>
+                        <m:ctrlPr>
+                          <a:rPr sz="2285" i="1">
+                            <a:solidFill>
+                              <a:srgbClr val="000000"/>
+                            </a:solidFill>
+                            <a:latin typeface="Cambria Math" panose="02040503050406030204" pitchFamily="18" charset="0"/>
+                          </a:rPr>
+                        </m:ctrlPr>
+                      </m:limUppPr>
+                      <m:e>
+                        <m:limLow>
+                          <m:limLowPr>
+                            <m:ctrlPr>
+                              <a:rPr sz="2285" i="1">
+                                <a:solidFill>
+                                  <a:srgbClr val="000000"/>
+                                </a:solidFill>
+                                <a:latin typeface="Cambria Math" panose="02040503050406030204" pitchFamily="18" charset="0"/>
+                              </a:rPr>
+                            </m:ctrlPr>
+                          </m:limLowPr>
+                          <m:e>
+                            <m:r>
+                              <a:rPr sz="2285" i="1">
+                                <a:solidFill>
+                                  <a:srgbClr val="000000"/>
+                                </a:solidFill>
+                                <a:latin typeface="Cambria Math" panose="02040503050406030204" pitchFamily="18" charset="0"/>
+                              </a:rPr>
+                              <m:t>∑</m:t>
+                            </m:r>
+                          </m:e>
+                          <m:lim>
+                            <m:r>
+                              <a:rPr sz="2285" i="1">
+                                <a:solidFill>
+                                  <a:srgbClr val="000000"/>
+                                </a:solidFill>
+                                <a:latin typeface="Cambria Math" panose="02040503050406030204" pitchFamily="18" charset="0"/>
+                              </a:rPr>
+                              <m:t>𝑘</m:t>
+                            </m:r>
+                            <m:r>
+                              <a:rPr sz="2285" i="1">
+                                <a:solidFill>
+                                  <a:srgbClr val="000000"/>
+                                </a:solidFill>
+                                <a:latin typeface="Cambria Math" panose="02040503050406030204" pitchFamily="18" charset="0"/>
+                              </a:rPr>
+                              <m:t>=1</m:t>
+                            </m:r>
+                          </m:lim>
+                        </m:limLow>
+                      </m:e>
+                      <m:lim>
+                        <m:r>
+                          <a:rPr sz="2285" i="1">
+                            <a:solidFill>
+                              <a:srgbClr val="000000"/>
+                            </a:solidFill>
+                            <a:latin typeface="Cambria Math" panose="02040503050406030204" pitchFamily="18" charset="0"/>
+                          </a:rPr>
+                          <m:t>𝐾</m:t>
+                        </m:r>
+                      </m:lim>
+                    </m:limUpp>
+                    <m:sSubSup>
+                      <m:sSubSupPr>
+                        <m:ctrlPr>
+                          <a:rPr sz="2285" i="1">
+                            <a:solidFill>
+                              <a:srgbClr val="000000"/>
+                            </a:solidFill>
+                            <a:latin typeface="Cambria Math" panose="02040503050406030204" pitchFamily="18" charset="0"/>
+                          </a:rPr>
+                        </m:ctrlPr>
+                      </m:sSubSupPr>
+                      <m:e>
+                        <m:r>
+                          <a:rPr sz="2285" i="1">
+                            <a:solidFill>
+                              <a:srgbClr val="000000"/>
+                            </a:solidFill>
+                            <a:latin typeface="Cambria Math" panose="02040503050406030204" pitchFamily="18" charset="0"/>
+                          </a:rPr>
+                          <m:t>𝑝</m:t>
+                        </m:r>
+                      </m:e>
+                      <m:sub>
+                        <m:r>
+                          <a:rPr sz="2285" i="1">
+                            <a:solidFill>
+                              <a:srgbClr val="000000"/>
+                            </a:solidFill>
+                            <a:latin typeface="Cambria Math" panose="02040503050406030204" pitchFamily="18" charset="0"/>
+                          </a:rPr>
+                          <m:t>𝑖𝑘</m:t>
+                        </m:r>
+                      </m:sub>
+                      <m:sup>
+                        <m:r>
+                          <a:rPr sz="2285" i="1">
+                            <a:solidFill>
+                              <a:srgbClr val="000000"/>
+                            </a:solidFill>
+                            <a:latin typeface="Cambria Math" panose="02040503050406030204" pitchFamily="18" charset="0"/>
+                          </a:rPr>
+                          <m:t>2</m:t>
+                        </m:r>
+                      </m:sup>
+                    </m:sSubSup>
+                  </m:oMath>
+                </a14:m>
+                <a:r>
+                  <a:rPr dirty="0"/>
+                  <a:t>    </a:t>
+                </a:r>
+              </a:p>
+              <a:p>
+                <a:r>
+                  <a:rPr dirty="0"/>
+                  <a:t>For the “green” node</a:t>
+                </a:r>
+                <a:br>
+                  <a:rPr dirty="0"/>
+                </a:br>
+                <a14:m>
+                  <m:oMath xmlns:m="http://schemas.openxmlformats.org/officeDocument/2006/math">
+                    <m:sSub>
+                      <m:sSubPr>
+                        <m:ctrlPr>
+                          <a:rPr sz="2285" i="1">
+                            <a:solidFill>
+                              <a:srgbClr val="000000"/>
+                            </a:solidFill>
+                            <a:latin typeface="Cambria Math" panose="02040503050406030204" pitchFamily="18" charset="0"/>
+                          </a:rPr>
+                        </m:ctrlPr>
+                      </m:sSubPr>
+                      <m:e>
+                        <m:r>
+                          <a:rPr sz="2285" i="1">
+                            <a:solidFill>
+                              <a:srgbClr val="000000"/>
+                            </a:solidFill>
+                            <a:latin typeface="Cambria Math" panose="02040503050406030204" pitchFamily="18" charset="0"/>
+                          </a:rPr>
+                          <m:t>𝑝</m:t>
+                        </m:r>
+                      </m:e>
+                      <m:sub>
+                        <m:r>
+                          <a:rPr sz="2285" i="1">
+                            <a:solidFill>
+                              <a:srgbClr val="000000"/>
+                            </a:solidFill>
+                            <a:latin typeface="Cambria Math" panose="02040503050406030204" pitchFamily="18" charset="0"/>
+                          </a:rPr>
+                          <m:t>𝑖</m:t>
+                        </m:r>
+                        <m:r>
+                          <a:rPr sz="2285" i="1">
+                            <a:solidFill>
+                              <a:srgbClr val="000000"/>
+                            </a:solidFill>
+                            <a:latin typeface="Cambria Math" panose="02040503050406030204" pitchFamily="18" charset="0"/>
+                          </a:rPr>
+                          <m:t>1</m:t>
+                        </m:r>
+                      </m:sub>
+                    </m:sSub>
                     <m:r>
                       <a:rPr sz="2285" i="1">
                         <a:solidFill>
@@ -11160,8 +11616,63 @@
                         </a:solidFill>
                         <a:latin typeface="Cambria Math" panose="02040503050406030204" pitchFamily="18" charset="0"/>
                       </a:rPr>
-                      <m:t>1</m:t>
+                      <m:t>=(0/54);</m:t>
                     </m:r>
+                    <m:r>
+                      <m:rPr>
+                        <m:nor/>
+                      </m:rPr>
+                      <a:rPr sz="2285" i="1">
+                        <a:solidFill>
+                          <a:srgbClr val="000000"/>
+                        </a:solidFill>
+                        <a:latin typeface="Cambria Math" panose="02040503050406030204" pitchFamily="18" charset="0"/>
+                      </a:rPr>
+                      <m:t> </m:t>
+                    </m:r>
+                    <m:sSub>
+                      <m:sSubPr>
+                        <m:ctrlPr>
+                          <a:rPr sz="2285" i="1">
+                            <a:solidFill>
+                              <a:srgbClr val="000000"/>
+                            </a:solidFill>
+                            <a:latin typeface="Cambria Math" panose="02040503050406030204" pitchFamily="18" charset="0"/>
+                          </a:rPr>
+                        </m:ctrlPr>
+                      </m:sSubPr>
+                      <m:e>
+                        <m:r>
+                          <a:rPr sz="2285" i="1">
+                            <a:solidFill>
+                              <a:srgbClr val="000000"/>
+                            </a:solidFill>
+                            <a:latin typeface="Cambria Math" panose="02040503050406030204" pitchFamily="18" charset="0"/>
+                          </a:rPr>
+                          <m:t>𝑝</m:t>
+                        </m:r>
+                      </m:e>
+                      <m:sub>
+                        <m:r>
+                          <a:rPr sz="2285" i="1">
+                            <a:solidFill>
+                              <a:srgbClr val="000000"/>
+                            </a:solidFill>
+                            <a:latin typeface="Cambria Math" panose="02040503050406030204" pitchFamily="18" charset="0"/>
+                          </a:rPr>
+                          <m:t>𝑖</m:t>
+                        </m:r>
+                        <m:r>
+                          <a:rPr sz="2285" i="1">
+                            <a:solidFill>
+                              <a:srgbClr val="000000"/>
+                            </a:solidFill>
+                            <a:latin typeface="Cambria Math" panose="02040503050406030204" pitchFamily="18" charset="0"/>
+                          </a:rPr>
+                          <m:t>2</m:t>
+                        </m:r>
+                      </m:sub>
+                    </m:sSub>
                     <m:r>
                       <a:rPr sz="2285" i="1">
                         <a:solidFill>
@@ -11169,7 +11680,961 @@
                         </a:solidFill>
                         <a:latin typeface="Cambria Math" panose="02040503050406030204" pitchFamily="18" charset="0"/>
                       </a:rPr>
-                      <m:t>−</m:t>
+                      <m:t>=(49/54);</m:t>
+                    </m:r>
+                    <m:r>
+                      <m:rPr>
+                        <m:nor/>
+                      </m:rPr>
+                      <a:rPr sz="2285" i="1">
+                        <a:solidFill>
+                          <a:srgbClr val="000000"/>
+                        </a:solidFill>
+                        <a:latin typeface="Cambria Math" panose="02040503050406030204" pitchFamily="18" charset="0"/>
+                      </a:rPr>
+                      <m:t> </m:t>
+                    </m:r>
+                    <m:sSub>
+                      <m:sSubPr>
+                        <m:ctrlPr>
+                          <a:rPr sz="2285" i="1">
+                            <a:solidFill>
+                              <a:srgbClr val="000000"/>
+                            </a:solidFill>
+                            <a:latin typeface="Cambria Math" panose="02040503050406030204" pitchFamily="18" charset="0"/>
+                          </a:rPr>
+                        </m:ctrlPr>
+                      </m:sSubPr>
+                      <m:e>
+                        <m:r>
+                          <a:rPr sz="2285" i="1">
+                            <a:solidFill>
+                              <a:srgbClr val="000000"/>
+                            </a:solidFill>
+                            <a:latin typeface="Cambria Math" panose="02040503050406030204" pitchFamily="18" charset="0"/>
+                          </a:rPr>
+                          <m:t>𝑝</m:t>
+                        </m:r>
+                      </m:e>
+                      <m:sub>
+                        <m:r>
+                          <a:rPr sz="2285" i="1">
+                            <a:solidFill>
+                              <a:srgbClr val="000000"/>
+                            </a:solidFill>
+                            <a:latin typeface="Cambria Math" panose="02040503050406030204" pitchFamily="18" charset="0"/>
+                          </a:rPr>
+                          <m:t>𝑖</m:t>
+                        </m:r>
+                        <m:r>
+                          <a:rPr sz="2285" i="1">
+                            <a:solidFill>
+                              <a:srgbClr val="000000"/>
+                            </a:solidFill>
+                            <a:latin typeface="Cambria Math" panose="02040503050406030204" pitchFamily="18" charset="0"/>
+                          </a:rPr>
+                          <m:t>3</m:t>
+                        </m:r>
+                      </m:sub>
+                    </m:sSub>
+                    <m:r>
+                      <a:rPr sz="2285" i="1">
+                        <a:solidFill>
+                          <a:srgbClr val="000000"/>
+                        </a:solidFill>
+                        <a:latin typeface="Cambria Math" panose="02040503050406030204" pitchFamily="18" charset="0"/>
+                      </a:rPr>
+                      <m:t>=(5/54)</m:t>
+                    </m:r>
+                  </m:oMath>
+                </a14:m>
+                <a:br>
+                  <a:rPr dirty="0"/>
+                </a:br>
+                <a:br>
+                  <a:rPr dirty="0"/>
+                </a:br>
+                <a14:m>
+                  <m:oMath xmlns:m="http://schemas.openxmlformats.org/officeDocument/2006/math">
+                    <m:sSub>
+                      <m:sSubPr>
+                        <m:ctrlPr>
+                          <a:rPr sz="2285" i="1">
+                            <a:solidFill>
+                              <a:srgbClr val="000000"/>
+                            </a:solidFill>
+                            <a:latin typeface="Cambria Math" panose="02040503050406030204" pitchFamily="18" charset="0"/>
+                          </a:rPr>
+                        </m:ctrlPr>
+                      </m:sSubPr>
+                      <m:e>
+                        <m:r>
+                          <a:rPr sz="2285" i="1">
+                            <a:solidFill>
+                              <a:srgbClr val="000000"/>
+                            </a:solidFill>
+                            <a:latin typeface="Cambria Math" panose="02040503050406030204" pitchFamily="18" charset="0"/>
+                          </a:rPr>
+                          <m:t>𝐺</m:t>
+                        </m:r>
+                      </m:e>
+                      <m:sub>
+                        <m:r>
+                          <a:rPr sz="2285" i="1">
+                            <a:solidFill>
+                              <a:srgbClr val="000000"/>
+                            </a:solidFill>
+                            <a:latin typeface="Cambria Math" panose="02040503050406030204" pitchFamily="18" charset="0"/>
+                          </a:rPr>
+                          <m:t>𝑖</m:t>
+                        </m:r>
+                      </m:sub>
+                    </m:sSub>
+                    <m:r>
+                      <a:rPr sz="2285" i="1">
+                        <a:solidFill>
+                          <a:srgbClr val="000000"/>
+                        </a:solidFill>
+                        <a:latin typeface="Cambria Math" panose="02040503050406030204" pitchFamily="18" charset="0"/>
+                      </a:rPr>
+                      <m:t>=1−</m:t>
+                    </m:r>
+                    <m:d>
+                      <m:dPr>
+                        <m:ctrlPr>
+                          <a:rPr sz="2285" i="1">
+                            <a:solidFill>
+                              <a:srgbClr val="000000"/>
+                            </a:solidFill>
+                            <a:latin typeface="Cambria Math" panose="02040503050406030204" pitchFamily="18" charset="0"/>
+                          </a:rPr>
+                        </m:ctrlPr>
+                      </m:dPr>
+                      <m:e>
+                        <m:r>
+                          <a:rPr sz="2285" i="1">
+                            <a:solidFill>
+                              <a:srgbClr val="000000"/>
+                            </a:solidFill>
+                            <a:latin typeface="Cambria Math" panose="02040503050406030204" pitchFamily="18" charset="0"/>
+                          </a:rPr>
+                          <m:t>(0/54</m:t>
+                        </m:r>
+                        <m:sSup>
+                          <m:sSupPr>
+                            <m:ctrlPr>
+                              <a:rPr sz="2285" i="1">
+                                <a:solidFill>
+                                  <a:srgbClr val="000000"/>
+                                </a:solidFill>
+                                <a:latin typeface="Cambria Math" panose="02040503050406030204" pitchFamily="18" charset="0"/>
+                              </a:rPr>
+                            </m:ctrlPr>
+                          </m:sSupPr>
+                          <m:e>
+                            <m:r>
+                              <a:rPr sz="2285" i="1">
+                                <a:solidFill>
+                                  <a:srgbClr val="000000"/>
+                                </a:solidFill>
+                                <a:latin typeface="Cambria Math" panose="02040503050406030204" pitchFamily="18" charset="0"/>
+                              </a:rPr>
+                              <m:t>)</m:t>
+                            </m:r>
+                          </m:e>
+                          <m:sup>
+                            <m:r>
+                              <a:rPr sz="2285" i="1">
+                                <a:solidFill>
+                                  <a:srgbClr val="000000"/>
+                                </a:solidFill>
+                                <a:latin typeface="Cambria Math" panose="02040503050406030204" pitchFamily="18" charset="0"/>
+                              </a:rPr>
+                              <m:t>2</m:t>
+                            </m:r>
+                          </m:sup>
+                        </m:sSup>
+                        <m:r>
+                          <a:rPr sz="2285" i="1">
+                            <a:solidFill>
+                              <a:srgbClr val="000000"/>
+                            </a:solidFill>
+                            <a:latin typeface="Cambria Math" panose="02040503050406030204" pitchFamily="18" charset="0"/>
+                          </a:rPr>
+                          <m:t>+(49/54</m:t>
+                        </m:r>
+                        <m:sSup>
+                          <m:sSupPr>
+                            <m:ctrlPr>
+                              <a:rPr sz="2285" i="1">
+                                <a:solidFill>
+                                  <a:srgbClr val="000000"/>
+                                </a:solidFill>
+                                <a:latin typeface="Cambria Math" panose="02040503050406030204" pitchFamily="18" charset="0"/>
+                              </a:rPr>
+                            </m:ctrlPr>
+                          </m:sSupPr>
+                          <m:e>
+                            <m:r>
+                              <a:rPr sz="2285" i="1">
+                                <a:solidFill>
+                                  <a:srgbClr val="000000"/>
+                                </a:solidFill>
+                                <a:latin typeface="Cambria Math" panose="02040503050406030204" pitchFamily="18" charset="0"/>
+                              </a:rPr>
+                              <m:t>)</m:t>
+                            </m:r>
+                          </m:e>
+                          <m:sup>
+                            <m:r>
+                              <a:rPr sz="2285" i="1">
+                                <a:solidFill>
+                                  <a:srgbClr val="000000"/>
+                                </a:solidFill>
+                                <a:latin typeface="Cambria Math" panose="02040503050406030204" pitchFamily="18" charset="0"/>
+                              </a:rPr>
+                              <m:t>2</m:t>
+                            </m:r>
+                          </m:sup>
+                        </m:sSup>
+                        <m:r>
+                          <a:rPr sz="2285" i="1">
+                            <a:solidFill>
+                              <a:srgbClr val="000000"/>
+                            </a:solidFill>
+                            <a:latin typeface="Cambria Math" panose="02040503050406030204" pitchFamily="18" charset="0"/>
+                          </a:rPr>
+                          <m:t>+(5/54</m:t>
+                        </m:r>
+                        <m:sSup>
+                          <m:sSupPr>
+                            <m:ctrlPr>
+                              <a:rPr sz="2285" i="1">
+                                <a:solidFill>
+                                  <a:srgbClr val="000000"/>
+                                </a:solidFill>
+                                <a:latin typeface="Cambria Math" panose="02040503050406030204" pitchFamily="18" charset="0"/>
+                              </a:rPr>
+                            </m:ctrlPr>
+                          </m:sSupPr>
+                          <m:e>
+                            <m:r>
+                              <a:rPr sz="2285" i="1">
+                                <a:solidFill>
+                                  <a:srgbClr val="000000"/>
+                                </a:solidFill>
+                                <a:latin typeface="Cambria Math" panose="02040503050406030204" pitchFamily="18" charset="0"/>
+                              </a:rPr>
+                              <m:t>)</m:t>
+                            </m:r>
+                          </m:e>
+                          <m:sup>
+                            <m:r>
+                              <a:rPr sz="2285" i="1">
+                                <a:solidFill>
+                                  <a:srgbClr val="000000"/>
+                                </a:solidFill>
+                                <a:latin typeface="Cambria Math" panose="02040503050406030204" pitchFamily="18" charset="0"/>
+                              </a:rPr>
+                              <m:t>2</m:t>
+                            </m:r>
+                          </m:sup>
+                        </m:sSup>
+                      </m:e>
+                    </m:d>
+                  </m:oMath>
+                </a14:m>
+                <a:br>
+                  <a:rPr dirty="0"/>
+                </a:br>
+                <a14:m>
+                  <m:oMath xmlns:m="http://schemas.openxmlformats.org/officeDocument/2006/math">
+                    <m:r>
+                      <a:rPr sz="2285" i="1">
+                        <a:solidFill>
+                          <a:srgbClr val="000000"/>
+                        </a:solidFill>
+                        <a:latin typeface="Cambria Math" panose="02040503050406030204" pitchFamily="18" charset="0"/>
+                      </a:rPr>
+                      <m:t>=0.168</m:t>
+                    </m:r>
+                  </m:oMath>
+                </a14:m>
+                <a:endParaRPr dirty="0"/>
+              </a:p>
+              <a:p>
+                <a:r>
+                  <a:rPr dirty="0"/>
+                  <a:t>For the “purple” node</a:t>
+                </a:r>
+                <a:br>
+                  <a:rPr dirty="0"/>
+                </a:br>
+                <a14:m>
+                  <m:oMath xmlns:m="http://schemas.openxmlformats.org/officeDocument/2006/math">
+                    <m:sSub>
+                      <m:sSubPr>
+                        <m:ctrlPr>
+                          <a:rPr sz="2285" i="1">
+                            <a:solidFill>
+                              <a:srgbClr val="000000"/>
+                            </a:solidFill>
+                            <a:latin typeface="Cambria Math" panose="02040503050406030204" pitchFamily="18" charset="0"/>
+                          </a:rPr>
+                        </m:ctrlPr>
+                      </m:sSubPr>
+                      <m:e>
+                        <m:r>
+                          <a:rPr sz="2285" i="1">
+                            <a:solidFill>
+                              <a:srgbClr val="000000"/>
+                            </a:solidFill>
+                            <a:latin typeface="Cambria Math" panose="02040503050406030204" pitchFamily="18" charset="0"/>
+                          </a:rPr>
+                          <m:t>𝑝</m:t>
+                        </m:r>
+                      </m:e>
+                      <m:sub>
+                        <m:r>
+                          <a:rPr sz="2285" i="1">
+                            <a:solidFill>
+                              <a:srgbClr val="000000"/>
+                            </a:solidFill>
+                            <a:latin typeface="Cambria Math" panose="02040503050406030204" pitchFamily="18" charset="0"/>
+                          </a:rPr>
+                          <m:t>𝑖</m:t>
+                        </m:r>
+                        <m:r>
+                          <a:rPr sz="2285" i="1">
+                            <a:solidFill>
+                              <a:srgbClr val="000000"/>
+                            </a:solidFill>
+                            <a:latin typeface="Cambria Math" panose="02040503050406030204" pitchFamily="18" charset="0"/>
+                          </a:rPr>
+                          <m:t>1</m:t>
+                        </m:r>
+                      </m:sub>
+                    </m:sSub>
+                    <m:r>
+                      <a:rPr sz="2285" i="1">
+                        <a:solidFill>
+                          <a:srgbClr val="000000"/>
+                        </a:solidFill>
+                        <a:latin typeface="Cambria Math" panose="02040503050406030204" pitchFamily="18" charset="0"/>
+                      </a:rPr>
+                      <m:t>=(0/46);</m:t>
+                    </m:r>
+                    <m:r>
+                      <m:rPr>
+                        <m:nor/>
+                      </m:rPr>
+                      <a:rPr sz="2285" i="1">
+                        <a:solidFill>
+                          <a:srgbClr val="000000"/>
+                        </a:solidFill>
+                        <a:latin typeface="Cambria Math" panose="02040503050406030204" pitchFamily="18" charset="0"/>
+                      </a:rPr>
+                      <m:t> </m:t>
+                    </m:r>
+                    <m:sSub>
+                      <m:sSubPr>
+                        <m:ctrlPr>
+                          <a:rPr sz="2285" i="1">
+                            <a:solidFill>
+                              <a:srgbClr val="000000"/>
+                            </a:solidFill>
+                            <a:latin typeface="Cambria Math" panose="02040503050406030204" pitchFamily="18" charset="0"/>
+                          </a:rPr>
+                        </m:ctrlPr>
+                      </m:sSubPr>
+                      <m:e>
+                        <m:r>
+                          <a:rPr sz="2285" i="1">
+                            <a:solidFill>
+                              <a:srgbClr val="000000"/>
+                            </a:solidFill>
+                            <a:latin typeface="Cambria Math" panose="02040503050406030204" pitchFamily="18" charset="0"/>
+                          </a:rPr>
+                          <m:t>𝑝</m:t>
+                        </m:r>
+                      </m:e>
+                      <m:sub>
+                        <m:r>
+                          <a:rPr sz="2285" i="1">
+                            <a:solidFill>
+                              <a:srgbClr val="000000"/>
+                            </a:solidFill>
+                            <a:latin typeface="Cambria Math" panose="02040503050406030204" pitchFamily="18" charset="0"/>
+                          </a:rPr>
+                          <m:t>𝑖</m:t>
+                        </m:r>
+                        <m:r>
+                          <a:rPr sz="2285" i="1">
+                            <a:solidFill>
+                              <a:srgbClr val="000000"/>
+                            </a:solidFill>
+                            <a:latin typeface="Cambria Math" panose="02040503050406030204" pitchFamily="18" charset="0"/>
+                          </a:rPr>
+                          <m:t>2</m:t>
+                        </m:r>
+                      </m:sub>
+                    </m:sSub>
+                    <m:r>
+                      <a:rPr sz="2285" i="1">
+                        <a:solidFill>
+                          <a:srgbClr val="000000"/>
+                        </a:solidFill>
+                        <a:latin typeface="Cambria Math" panose="02040503050406030204" pitchFamily="18" charset="0"/>
+                      </a:rPr>
+                      <m:t>=(1/46);</m:t>
+                    </m:r>
+                    <m:r>
+                      <m:rPr>
+                        <m:nor/>
+                      </m:rPr>
+                      <a:rPr sz="2285" i="1">
+                        <a:solidFill>
+                          <a:srgbClr val="000000"/>
+                        </a:solidFill>
+                        <a:latin typeface="Cambria Math" panose="02040503050406030204" pitchFamily="18" charset="0"/>
+                      </a:rPr>
+                      <m:t> </m:t>
+                    </m:r>
+                    <m:sSub>
+                      <m:sSubPr>
+                        <m:ctrlPr>
+                          <a:rPr sz="2285" i="1">
+                            <a:solidFill>
+                              <a:srgbClr val="000000"/>
+                            </a:solidFill>
+                            <a:latin typeface="Cambria Math" panose="02040503050406030204" pitchFamily="18" charset="0"/>
+                          </a:rPr>
+                        </m:ctrlPr>
+                      </m:sSubPr>
+                      <m:e>
+                        <m:r>
+                          <a:rPr sz="2285" i="1">
+                            <a:solidFill>
+                              <a:srgbClr val="000000"/>
+                            </a:solidFill>
+                            <a:latin typeface="Cambria Math" panose="02040503050406030204" pitchFamily="18" charset="0"/>
+                          </a:rPr>
+                          <m:t>𝑝</m:t>
+                        </m:r>
+                      </m:e>
+                      <m:sub>
+                        <m:r>
+                          <a:rPr sz="2285" i="1">
+                            <a:solidFill>
+                              <a:srgbClr val="000000"/>
+                            </a:solidFill>
+                            <a:latin typeface="Cambria Math" panose="02040503050406030204" pitchFamily="18" charset="0"/>
+                          </a:rPr>
+                          <m:t>𝑖</m:t>
+                        </m:r>
+                        <m:r>
+                          <a:rPr sz="2285" i="1">
+                            <a:solidFill>
+                              <a:srgbClr val="000000"/>
+                            </a:solidFill>
+                            <a:latin typeface="Cambria Math" panose="02040503050406030204" pitchFamily="18" charset="0"/>
+                          </a:rPr>
+                          <m:t>3</m:t>
+                        </m:r>
+                      </m:sub>
+                    </m:sSub>
+                    <m:r>
+                      <a:rPr sz="2285" i="1">
+                        <a:solidFill>
+                          <a:srgbClr val="000000"/>
+                        </a:solidFill>
+                        <a:latin typeface="Cambria Math" panose="02040503050406030204" pitchFamily="18" charset="0"/>
+                      </a:rPr>
+                      <m:t>=(45/46)</m:t>
+                    </m:r>
+                  </m:oMath>
+                </a14:m>
+                <a:br>
+                  <a:rPr dirty="0"/>
+                </a:br>
+                <a:br>
+                  <a:rPr dirty="0"/>
+                </a:br>
+                <a14:m>
+                  <m:oMath xmlns:m="http://schemas.openxmlformats.org/officeDocument/2006/math">
+                    <m:sSub>
+                      <m:sSubPr>
+                        <m:ctrlPr>
+                          <a:rPr sz="2285" i="1">
+                            <a:solidFill>
+                              <a:srgbClr val="000000"/>
+                            </a:solidFill>
+                            <a:latin typeface="Cambria Math" panose="02040503050406030204" pitchFamily="18" charset="0"/>
+                          </a:rPr>
+                        </m:ctrlPr>
+                      </m:sSubPr>
+                      <m:e>
+                        <m:r>
+                          <a:rPr sz="2285" i="1">
+                            <a:solidFill>
+                              <a:srgbClr val="000000"/>
+                            </a:solidFill>
+                            <a:latin typeface="Cambria Math" panose="02040503050406030204" pitchFamily="18" charset="0"/>
+                          </a:rPr>
+                          <m:t>𝐺</m:t>
+                        </m:r>
+                      </m:e>
+                      <m:sub>
+                        <m:r>
+                          <a:rPr sz="2285" i="1">
+                            <a:solidFill>
+                              <a:srgbClr val="000000"/>
+                            </a:solidFill>
+                            <a:latin typeface="Cambria Math" panose="02040503050406030204" pitchFamily="18" charset="0"/>
+                          </a:rPr>
+                          <m:t>𝑖</m:t>
+                        </m:r>
+                      </m:sub>
+                    </m:sSub>
+                    <m:r>
+                      <a:rPr sz="2285" i="1">
+                        <a:solidFill>
+                          <a:srgbClr val="000000"/>
+                        </a:solidFill>
+                        <a:latin typeface="Cambria Math" panose="02040503050406030204" pitchFamily="18" charset="0"/>
+                      </a:rPr>
+                      <m:t>=1−</m:t>
+                    </m:r>
+                    <m:d>
+                      <m:dPr>
+                        <m:ctrlPr>
+                          <a:rPr sz="2285" i="1">
+                            <a:solidFill>
+                              <a:srgbClr val="000000"/>
+                            </a:solidFill>
+                            <a:latin typeface="Cambria Math" panose="02040503050406030204" pitchFamily="18" charset="0"/>
+                          </a:rPr>
+                        </m:ctrlPr>
+                      </m:dPr>
+                      <m:e>
+                        <m:r>
+                          <a:rPr sz="2285" i="1">
+                            <a:solidFill>
+                              <a:srgbClr val="000000"/>
+                            </a:solidFill>
+                            <a:latin typeface="Cambria Math" panose="02040503050406030204" pitchFamily="18" charset="0"/>
+                          </a:rPr>
+                          <m:t>(0/46</m:t>
+                        </m:r>
+                        <m:sSup>
+                          <m:sSupPr>
+                            <m:ctrlPr>
+                              <a:rPr sz="2285" i="1">
+                                <a:solidFill>
+                                  <a:srgbClr val="000000"/>
+                                </a:solidFill>
+                                <a:latin typeface="Cambria Math" panose="02040503050406030204" pitchFamily="18" charset="0"/>
+                              </a:rPr>
+                            </m:ctrlPr>
+                          </m:sSupPr>
+                          <m:e>
+                            <m:r>
+                              <a:rPr sz="2285" i="1">
+                                <a:solidFill>
+                                  <a:srgbClr val="000000"/>
+                                </a:solidFill>
+                                <a:latin typeface="Cambria Math" panose="02040503050406030204" pitchFamily="18" charset="0"/>
+                              </a:rPr>
+                              <m:t>)</m:t>
+                            </m:r>
+                          </m:e>
+                          <m:sup>
+                            <m:r>
+                              <a:rPr sz="2285" i="1">
+                                <a:solidFill>
+                                  <a:srgbClr val="000000"/>
+                                </a:solidFill>
+                                <a:latin typeface="Cambria Math" panose="02040503050406030204" pitchFamily="18" charset="0"/>
+                              </a:rPr>
+                              <m:t>2</m:t>
+                            </m:r>
+                          </m:sup>
+                        </m:sSup>
+                        <m:r>
+                          <a:rPr sz="2285" i="1">
+                            <a:solidFill>
+                              <a:srgbClr val="000000"/>
+                            </a:solidFill>
+                            <a:latin typeface="Cambria Math" panose="02040503050406030204" pitchFamily="18" charset="0"/>
+                          </a:rPr>
+                          <m:t>+(1/46</m:t>
+                        </m:r>
+                        <m:sSup>
+                          <m:sSupPr>
+                            <m:ctrlPr>
+                              <a:rPr sz="2285" i="1">
+                                <a:solidFill>
+                                  <a:srgbClr val="000000"/>
+                                </a:solidFill>
+                                <a:latin typeface="Cambria Math" panose="02040503050406030204" pitchFamily="18" charset="0"/>
+                              </a:rPr>
+                            </m:ctrlPr>
+                          </m:sSupPr>
+                          <m:e>
+                            <m:r>
+                              <a:rPr sz="2285" i="1">
+                                <a:solidFill>
+                                  <a:srgbClr val="000000"/>
+                                </a:solidFill>
+                                <a:latin typeface="Cambria Math" panose="02040503050406030204" pitchFamily="18" charset="0"/>
+                              </a:rPr>
+                              <m:t>)</m:t>
+                            </m:r>
+                          </m:e>
+                          <m:sup>
+                            <m:r>
+                              <a:rPr sz="2285" i="1">
+                                <a:solidFill>
+                                  <a:srgbClr val="000000"/>
+                                </a:solidFill>
+                                <a:latin typeface="Cambria Math" panose="02040503050406030204" pitchFamily="18" charset="0"/>
+                              </a:rPr>
+                              <m:t>2</m:t>
+                            </m:r>
+                          </m:sup>
+                        </m:sSup>
+                        <m:r>
+                          <a:rPr sz="2285" i="1">
+                            <a:solidFill>
+                              <a:srgbClr val="000000"/>
+                            </a:solidFill>
+                            <a:latin typeface="Cambria Math" panose="02040503050406030204" pitchFamily="18" charset="0"/>
+                          </a:rPr>
+                          <m:t>+(45/46</m:t>
+                        </m:r>
+                        <m:sSup>
+                          <m:sSupPr>
+                            <m:ctrlPr>
+                              <a:rPr sz="2285" i="1">
+                                <a:solidFill>
+                                  <a:srgbClr val="000000"/>
+                                </a:solidFill>
+                                <a:latin typeface="Cambria Math" panose="02040503050406030204" pitchFamily="18" charset="0"/>
+                              </a:rPr>
+                            </m:ctrlPr>
+                          </m:sSupPr>
+                          <m:e>
+                            <m:r>
+                              <a:rPr sz="2285" i="1">
+                                <a:solidFill>
+                                  <a:srgbClr val="000000"/>
+                                </a:solidFill>
+                                <a:latin typeface="Cambria Math" panose="02040503050406030204" pitchFamily="18" charset="0"/>
+                              </a:rPr>
+                              <m:t>)</m:t>
+                            </m:r>
+                          </m:e>
+                          <m:sup>
+                            <m:r>
+                              <a:rPr sz="2285" i="1">
+                                <a:solidFill>
+                                  <a:srgbClr val="000000"/>
+                                </a:solidFill>
+                                <a:latin typeface="Cambria Math" panose="02040503050406030204" pitchFamily="18" charset="0"/>
+                              </a:rPr>
+                              <m:t>2</m:t>
+                            </m:r>
+                          </m:sup>
+                        </m:sSup>
+                      </m:e>
+                    </m:d>
+                  </m:oMath>
+                </a14:m>
+                <a:br>
+                  <a:rPr dirty="0"/>
+                </a:br>
+                <a14:m>
+                  <m:oMath xmlns:m="http://schemas.openxmlformats.org/officeDocument/2006/math">
+                    <m:r>
+                      <a:rPr sz="2285" i="1">
+                        <a:solidFill>
+                          <a:srgbClr val="000000"/>
+                        </a:solidFill>
+                        <a:latin typeface="Cambria Math" panose="02040503050406030204" pitchFamily="18" charset="0"/>
+                      </a:rPr>
+                      <m:t>=0.043</m:t>
+                    </m:r>
+                  </m:oMath>
+                </a14:m>
+                <a:br>
+                  <a:rPr dirty="0"/>
+                </a:br>
+                <a:endParaRPr dirty="0"/>
+              </a:p>
+            </p:txBody>
+          </p:sp>
+        </mc:Choice>
+        <mc:Fallback xmlns="">
+          <p:sp>
+            <p:nvSpPr>
+              <p:cNvPr id="201" name="Gini index :…"/>
+              <p:cNvSpPr txBox="1">
+                <a:spLocks noGrp="1" noRot="1" noChangeAspect="1" noMove="1" noResize="1" noEditPoints="1" noAdjustHandles="1" noChangeArrowheads="1" noChangeShapeType="1" noTextEdit="1"/>
+              </p:cNvSpPr>
+              <p:nvPr>
+                <p:ph type="body" idx="1"/>
+              </p:nvPr>
+            </p:nvSpPr>
+            <p:spPr>
+              <a:xfrm>
+                <a:off x="755679" y="1750021"/>
+                <a:ext cx="8161734" cy="5372253"/>
+              </a:xfrm>
+              <a:prstGeom prst="rect">
+                <a:avLst/>
+              </a:prstGeom>
+              <a:blipFill>
+                <a:blip r:embed="rId3"/>
+                <a:stretch>
+                  <a:fillRect l="-672"/>
+                </a:stretch>
+              </a:blipFill>
+            </p:spPr>
+            <p:txBody>
+              <a:bodyPr/>
+              <a:lstStyle/>
+              <a:p>
+                <a:r>
+                  <a:rPr lang="en-US">
+                    <a:noFill/>
+                  </a:rPr>
+                  <a:t> </a:t>
+                </a:r>
+              </a:p>
+            </p:txBody>
+          </p:sp>
+        </mc:Fallback>
+      </mc:AlternateContent>
+      <p:sp>
+        <p:nvSpPr>
+          <p:cNvPr id="202" name="Node Impurity Measures (Classification)"/>
+          <p:cNvSpPr txBox="1">
+            <a:spLocks noGrp="1"/>
+          </p:cNvSpPr>
+          <p:nvPr>
+            <p:ph type="title"/>
+          </p:nvPr>
+        </p:nvSpPr>
+        <p:spPr>
+          <a:prstGeom prst="rect">
+            <a:avLst/>
+          </a:prstGeom>
+        </p:spPr>
+        <p:txBody>
+          <a:bodyPr>
+            <a:normAutofit/>
+          </a:bodyPr>
+          <a:lstStyle>
+            <a:lvl1pPr defTabSz="1473840">
+              <a:defRPr sz="5100" spc="-102"/>
+            </a:lvl1pPr>
+          </a:lstStyle>
+          <a:p>
+            <a:r>
+              <a:rPr sz="4000" dirty="0"/>
+              <a:t>Node Impurity Measures (Classification)</a:t>
+            </a:r>
+          </a:p>
+        </p:txBody>
+      </p:sp>
+      <p:sp>
+        <p:nvSpPr>
+          <p:cNvPr id="203" name="Line"/>
+          <p:cNvSpPr/>
+          <p:nvPr/>
+        </p:nvSpPr>
+        <p:spPr>
+          <a:xfrm>
+            <a:off x="3665698" y="4468219"/>
+            <a:ext cx="4814068" cy="303247"/>
+          </a:xfrm>
+          <a:prstGeom prst="line">
+            <a:avLst/>
+          </a:prstGeom>
+          <a:ln w="25400">
+            <a:solidFill>
+              <a:srgbClr val="919191"/>
+            </a:solidFill>
+            <a:prstDash val="sysDot"/>
+            <a:miter lim="400000"/>
+            <a:tailEnd type="triangle"/>
+          </a:ln>
+        </p:spPr>
+        <p:txBody>
+          <a:bodyPr lIns="35719" tIns="35719" rIns="35719" bIns="35719" anchor="ctr"/>
+          <a:lstStyle/>
+          <a:p>
+            <a:endParaRPr sz="1266"/>
+          </a:p>
+        </p:txBody>
+      </p:sp>
+      <p:sp>
+        <p:nvSpPr>
+          <p:cNvPr id="204" name="Line"/>
+          <p:cNvSpPr/>
+          <p:nvPr/>
+        </p:nvSpPr>
+        <p:spPr>
+          <a:xfrm flipV="1">
+            <a:off x="3510423" y="5356706"/>
+            <a:ext cx="7393366" cy="1307593"/>
+          </a:xfrm>
+          <a:prstGeom prst="line">
+            <a:avLst/>
+          </a:prstGeom>
+          <a:ln w="25400">
+            <a:solidFill>
+              <a:srgbClr val="919191"/>
+            </a:solidFill>
+            <a:prstDash val="sysDot"/>
+            <a:miter lim="400000"/>
+            <a:tailEnd type="triangle"/>
+          </a:ln>
+        </p:spPr>
+        <p:txBody>
+          <a:bodyPr lIns="35719" tIns="35719" rIns="35719" bIns="35719" anchor="ctr"/>
+          <a:lstStyle/>
+          <a:p>
+            <a:endParaRPr sz="1266"/>
+          </a:p>
+        </p:txBody>
+      </p:sp>
+    </p:spTree>
+  </p:cSld>
+  <p:clrMapOvr>
+    <a:masterClrMapping/>
+  </p:clrMapOvr>
+  <p:transition spd="med"/>
+</p:sld>
+</file>
+
+<file path=ppt/slides/slide9.xml><?xml version="1.0" encoding="utf-8"?>
+<p:sld xmlns:a="http://schemas.openxmlformats.org/drawingml/2006/main" xmlns:r="http://schemas.openxmlformats.org/officeDocument/2006/relationships" xmlns:p="http://schemas.openxmlformats.org/presentationml/2006/main">
+  <p:cSld>
+    <p:spTree>
+      <p:nvGrpSpPr>
+        <p:cNvPr id="1" name=""/>
+        <p:cNvGrpSpPr/>
+        <p:nvPr/>
+      </p:nvGrpSpPr>
+      <p:grpSpPr>
+        <a:xfrm>
+          <a:off x="0" y="0"/>
+          <a:ext cx="0" cy="0"/>
+          <a:chOff x="0" y="0"/>
+          <a:chExt cx="0" cy="0"/>
+        </a:xfrm>
+      </p:grpSpPr>
+      <p:pic>
+        <p:nvPicPr>
+          <p:cNvPr id="206" name="iris_tree_no_impurity.png" descr="iris_tree_no_impurity.png"/>
+          <p:cNvPicPr>
+            <a:picLocks noChangeAspect="1"/>
+          </p:cNvPicPr>
+          <p:nvPr/>
+        </p:nvPicPr>
+        <p:blipFill>
+          <a:blip r:embed="rId2"/>
+          <a:stretch>
+            <a:fillRect/>
+          </a:stretch>
+        </p:blipFill>
+        <p:spPr>
+          <a:xfrm>
+            <a:off x="7178810" y="1351653"/>
+            <a:ext cx="5299314" cy="5299313"/>
+          </a:xfrm>
+          <a:prstGeom prst="rect">
+            <a:avLst/>
+          </a:prstGeom>
+          <a:ln w="12700">
+            <a:miter lim="400000"/>
+          </a:ln>
+        </p:spPr>
+      </p:pic>
+      <mc:AlternateContent xmlns:mc="http://schemas.openxmlformats.org/markup-compatibility/2006" xmlns:a14="http://schemas.microsoft.com/office/drawing/2010/main">
+        <mc:Choice Requires="a14">
+          <p:sp>
+            <p:nvSpPr>
+              <p:cNvPr id="207" name="Entropy :…"/>
+              <p:cNvSpPr txBox="1">
+                <a:spLocks noGrp="1"/>
+              </p:cNvSpPr>
+              <p:nvPr>
+                <p:ph type="body" idx="1"/>
+              </p:nvPr>
+            </p:nvSpPr>
+            <p:spPr>
+              <a:xfrm>
+                <a:off x="591775" y="1949882"/>
+                <a:ext cx="8161734" cy="5372253"/>
+              </a:xfrm>
+              <a:prstGeom prst="rect">
+                <a:avLst/>
+              </a:prstGeom>
+            </p:spPr>
+            <p:txBody>
+              <a:bodyPr/>
+              <a:lstStyle/>
+              <a:p>
+                <a:r>
+                  <a:rPr dirty="0"/>
+                  <a:t>Entropy :  </a:t>
+                </a:r>
+                <a14:m>
+                  <m:oMath xmlns:m="http://schemas.openxmlformats.org/officeDocument/2006/math">
+                    <m:sSub>
+                      <m:sSubPr>
+                        <m:ctrlPr>
+                          <a:rPr sz="2285" i="1">
+                            <a:solidFill>
+                              <a:srgbClr val="000000"/>
+                            </a:solidFill>
+                            <a:latin typeface="Cambria Math" panose="02040503050406030204" pitchFamily="18" charset="0"/>
+                          </a:rPr>
+                        </m:ctrlPr>
+                      </m:sSubPr>
+                      <m:e>
+                        <m:r>
+                          <a:rPr sz="2285" i="1">
+                            <a:solidFill>
+                              <a:srgbClr val="000000"/>
+                            </a:solidFill>
+                            <a:latin typeface="Cambria Math" panose="02040503050406030204" pitchFamily="18" charset="0"/>
+                          </a:rPr>
+                          <m:t>𝐻</m:t>
+                        </m:r>
+                      </m:e>
+                      <m:sub>
+                        <m:r>
+                          <a:rPr sz="2285" i="1">
+                            <a:solidFill>
+                              <a:srgbClr val="000000"/>
+                            </a:solidFill>
+                            <a:latin typeface="Cambria Math" panose="02040503050406030204" pitchFamily="18" charset="0"/>
+                          </a:rPr>
+                          <m:t>𝑖</m:t>
+                        </m:r>
+                      </m:sub>
+                    </m:sSub>
+                    <m:r>
+                      <a:rPr sz="2285" i="1">
+                        <a:solidFill>
+                          <a:srgbClr val="000000"/>
+                        </a:solidFill>
+                        <a:latin typeface="Cambria Math" panose="02040503050406030204" pitchFamily="18" charset="0"/>
+                      </a:rPr>
+                      <m:t>=−</m:t>
                     </m:r>
                     <m:limUpp>
                       <m:limUppPr>
@@ -11248,8 +12713,8 @@
                         </m:r>
                       </m:lim>
                     </m:limUpp>
-                    <m:sSubSup>
-                      <m:sSubSupPr>
+                    <m:sSub>
+                      <m:sSubPr>
                         <m:ctrlPr>
                           <a:rPr sz="2285" i="1">
                             <a:solidFill>
@@ -11258,7 +12723,7 @@
                             <a:latin typeface="Cambria Math" panose="02040503050406030204" pitchFamily="18" charset="0"/>
                           </a:rPr>
                         </m:ctrlPr>
-                      </m:sSubSupPr>
+                      </m:sSubPr>
                       <m:e>
                         <m:r>
                           <a:rPr sz="2285" i="1">
@@ -11281,7 +12746,33 @@
                           <m:t>𝑖𝑘</m:t>
                         </m:r>
                       </m:sub>
-                      <m:sup>
+                    </m:sSub>
+                    <m:sSub>
+                      <m:sSubPr>
+                        <m:ctrlPr>
+                          <a:rPr sz="2285" i="1">
+                            <a:solidFill>
+                              <a:srgbClr val="000000"/>
+                            </a:solidFill>
+                            <a:latin typeface="Cambria Math" panose="02040503050406030204" pitchFamily="18" charset="0"/>
+                          </a:rPr>
+                        </m:ctrlPr>
+                      </m:sSubPr>
+                      <m:e>
+                        <m:r>
+                          <m:rPr>
+                            <m:sty m:val="p"/>
+                          </m:rPr>
+                          <a:rPr sz="2285" i="1">
+                            <a:solidFill>
+                              <a:srgbClr val="000000"/>
+                            </a:solidFill>
+                            <a:latin typeface="Cambria Math" panose="02040503050406030204" pitchFamily="18" charset="0"/>
+                          </a:rPr>
+                          <m:t>log</m:t>
+                        </m:r>
+                      </m:e>
+                      <m:sub>
                         <m:r>
                           <a:rPr sz="2285" i="1">
                             <a:solidFill>
@@ -11291,13 +12782,65 @@
                           </a:rPr>
                           <m:t>2</m:t>
                         </m:r>
-                      </m:sup>
-                    </m:sSubSup>
+                      </m:sub>
+                    </m:sSub>
+                    <m:r>
+                      <a:rPr sz="2285" i="1">
+                        <a:solidFill>
+                          <a:srgbClr val="000000"/>
+                        </a:solidFill>
+                        <a:latin typeface="Cambria Math" panose="02040503050406030204" pitchFamily="18" charset="0"/>
+                      </a:rPr>
+                      <m:t>(</m:t>
+                    </m:r>
+                    <m:sSub>
+                      <m:sSubPr>
+                        <m:ctrlPr>
+                          <a:rPr sz="2285" i="1">
+                            <a:solidFill>
+                              <a:srgbClr val="000000"/>
+                            </a:solidFill>
+                            <a:latin typeface="Cambria Math" panose="02040503050406030204" pitchFamily="18" charset="0"/>
+                          </a:rPr>
+                        </m:ctrlPr>
+                      </m:sSubPr>
+                      <m:e>
+                        <m:r>
+                          <a:rPr sz="2285" i="1">
+                            <a:solidFill>
+                              <a:srgbClr val="000000"/>
+                            </a:solidFill>
+                            <a:latin typeface="Cambria Math" panose="02040503050406030204" pitchFamily="18" charset="0"/>
+                          </a:rPr>
+                          <m:t>𝑝</m:t>
+                        </m:r>
+                      </m:e>
+                      <m:sub>
+                        <m:r>
+                          <a:rPr sz="2285" i="1">
+                            <a:solidFill>
+                              <a:srgbClr val="000000"/>
+                            </a:solidFill>
+                            <a:latin typeface="Cambria Math" panose="02040503050406030204" pitchFamily="18" charset="0"/>
+                          </a:rPr>
+                          <m:t>𝑖𝑘</m:t>
+                        </m:r>
+                      </m:sub>
+                    </m:sSub>
+                    <m:r>
+                      <a:rPr sz="2285" i="1">
+                        <a:solidFill>
+                          <a:srgbClr val="000000"/>
+                        </a:solidFill>
+                        <a:latin typeface="Cambria Math" panose="02040503050406030204" pitchFamily="18" charset="0"/>
+                      </a:rPr>
+                      <m:t>)</m:t>
+                    </m:r>
                   </m:oMath>
                 </a14:m>
                 <a:r>
                   <a:rPr dirty="0"/>
-                  <a:t>    </a:t>
+                  <a:t>   </a:t>
                 </a:r>
               </a:p>
               <a:p>
@@ -11627,7 +13170,7 @@
                             </a:solidFill>
                             <a:latin typeface="Cambria Math" panose="02040503050406030204" pitchFamily="18" charset="0"/>
                           </a:rPr>
-                          <m:t>𝐺</m:t>
+                          <m:t>𝐻</m:t>
                         </m:r>
                       </m:e>
                       <m:sub>
@@ -11649,25 +13192,7 @@
                         </a:solidFill>
                         <a:latin typeface="Cambria Math" panose="02040503050406030204" pitchFamily="18" charset="0"/>
                       </a:rPr>
-                      <m:t>=</m:t>
-                    </m:r>
-                    <m:r>
-                      <a:rPr sz="2285" i="1">
-                        <a:solidFill>
-                          <a:srgbClr val="000000"/>
-                        </a:solidFill>
-                        <a:latin typeface="Cambria Math" panose="02040503050406030204" pitchFamily="18" charset="0"/>
-                      </a:rPr>
-                      <m:t>1</m:t>
-                    </m:r>
-                    <m:r>
-                      <a:rPr sz="2285" i="1">
-                        <a:solidFill>
-                          <a:srgbClr val="000000"/>
-                        </a:solidFill>
-                        <a:latin typeface="Cambria Math" panose="02040503050406030204" pitchFamily="18" charset="0"/>
-                      </a:rPr>
-                      <m:t>−</m:t>
+                      <m:t>=−</m:t>
                     </m:r>
                     <m:d>
                       <m:dPr>
@@ -11697,7 +13222,7 @@
                             </a:solidFill>
                             <a:latin typeface="Cambria Math" panose="02040503050406030204" pitchFamily="18" charset="0"/>
                           </a:rPr>
-                          <m:t>0</m:t>
+                          <m:t>49</m:t>
                         </m:r>
                         <m:r>
                           <a:rPr sz="2285" i="1">
@@ -11717,8 +13242,17 @@
                           </a:rPr>
                           <m:t>54</m:t>
                         </m:r>
-                        <m:sSup>
-                          <m:sSupPr>
+                        <m:r>
+                          <a:rPr sz="2285" i="1">
+                            <a:solidFill>
+                              <a:srgbClr val="000000"/>
+                            </a:solidFill>
+                            <a:latin typeface="Cambria Math" panose="02040503050406030204" pitchFamily="18" charset="0"/>
+                          </a:rPr>
+                          <m:t>)</m:t>
+                        </m:r>
+                        <m:sSub>
+                          <m:sSubPr>
                             <m:ctrlPr>
                               <a:rPr sz="2285" i="1">
                                 <a:solidFill>
@@ -11727,19 +13261,22 @@
                                 <a:latin typeface="Cambria Math" panose="02040503050406030204" pitchFamily="18" charset="0"/>
                               </a:rPr>
                             </m:ctrlPr>
-                          </m:sSupPr>
+                          </m:sSubPr>
                           <m:e>
                             <m:r>
+                              <m:rPr>
+                                <m:sty m:val="p"/>
+                              </m:rPr>
                               <a:rPr sz="2285" i="1">
                                 <a:solidFill>
                                   <a:srgbClr val="000000"/>
                                 </a:solidFill>
                                 <a:latin typeface="Cambria Math" panose="02040503050406030204" pitchFamily="18" charset="0"/>
                               </a:rPr>
-                              <m:t>)</m:t>
+                              <m:t>log</m:t>
                             </m:r>
                           </m:e>
-                          <m:sup>
+                          <m:sub>
                             <m:r>
                               <a:rPr sz="2285" i="1">
                                 <a:solidFill>
@@ -11749,8 +13286,8 @@
                               </a:rPr>
                               <m:t>2</m:t>
                             </m:r>
-                          </m:sup>
-                        </m:sSup>
+                          </m:sub>
+                        </m:sSub>
                         <m:r>
                           <a:rPr sz="2285" i="1">
                             <a:solidFill>
@@ -11758,7 +13295,7 @@
                             </a:solidFill>
                             <a:latin typeface="Cambria Math" panose="02040503050406030204" pitchFamily="18" charset="0"/>
                           </a:rPr>
-                          <m:t>+(</m:t>
+                          <m:t>(</m:t>
                         </m:r>
                         <m:r>
                           <a:rPr sz="2285" i="1">
@@ -11787,8 +13324,53 @@
                           </a:rPr>
                           <m:t>54</m:t>
                         </m:r>
-                        <m:sSup>
-                          <m:sSupPr>
+                        <m:r>
+                          <a:rPr sz="2285" i="1">
+                            <a:solidFill>
+                              <a:srgbClr val="000000"/>
+                            </a:solidFill>
+                            <a:latin typeface="Cambria Math" panose="02040503050406030204" pitchFamily="18" charset="0"/>
+                          </a:rPr>
+                          <m:t>)+(</m:t>
+                        </m:r>
+                        <m:r>
+                          <a:rPr sz="2285" i="1">
+                            <a:solidFill>
+                              <a:srgbClr val="000000"/>
+                            </a:solidFill>
+                            <a:latin typeface="Cambria Math" panose="02040503050406030204" pitchFamily="18" charset="0"/>
+                          </a:rPr>
+                          <m:t>5</m:t>
+                        </m:r>
+                        <m:r>
+                          <a:rPr sz="2285" i="1">
+                            <a:solidFill>
+                              <a:srgbClr val="000000"/>
+                            </a:solidFill>
+                            <a:latin typeface="Cambria Math" panose="02040503050406030204" pitchFamily="18" charset="0"/>
+                          </a:rPr>
+                          <m:t>/</m:t>
+                        </m:r>
+                        <m:r>
+                          <a:rPr sz="2285" i="1">
+                            <a:solidFill>
+                              <a:srgbClr val="000000"/>
+                            </a:solidFill>
+                            <a:latin typeface="Cambria Math" panose="02040503050406030204" pitchFamily="18" charset="0"/>
+                          </a:rPr>
+                          <m:t>54</m:t>
+                        </m:r>
+                        <m:r>
+                          <a:rPr sz="2285" i="1">
+                            <a:solidFill>
+                              <a:srgbClr val="000000"/>
+                            </a:solidFill>
+                            <a:latin typeface="Cambria Math" panose="02040503050406030204" pitchFamily="18" charset="0"/>
+                          </a:rPr>
+                          <m:t>)</m:t>
+                        </m:r>
+                        <m:sSub>
+                          <m:sSubPr>
                             <m:ctrlPr>
                               <a:rPr sz="2285" i="1">
                                 <a:solidFill>
@@ -11797,19 +13379,22 @@
                                 <a:latin typeface="Cambria Math" panose="02040503050406030204" pitchFamily="18" charset="0"/>
                               </a:rPr>
                             </m:ctrlPr>
-                          </m:sSupPr>
+                          </m:sSubPr>
                           <m:e>
                             <m:r>
+                              <m:rPr>
+                                <m:sty m:val="p"/>
+                              </m:rPr>
                               <a:rPr sz="2285" i="1">
                                 <a:solidFill>
                                   <a:srgbClr val="000000"/>
                                 </a:solidFill>
                                 <a:latin typeface="Cambria Math" panose="02040503050406030204" pitchFamily="18" charset="0"/>
                               </a:rPr>
-                              <m:t>)</m:t>
+                              <m:t>log</m:t>
                             </m:r>
                           </m:e>
-                          <m:sup>
+                          <m:sub>
                             <m:r>
                               <a:rPr sz="2285" i="1">
                                 <a:solidFill>
@@ -11819,8 +13404,8 @@
                               </a:rPr>
                               <m:t>2</m:t>
                             </m:r>
-                          </m:sup>
-                        </m:sSup>
+                          </m:sub>
+                        </m:sSub>
                         <m:r>
                           <a:rPr sz="2285" i="1">
                             <a:solidFill>
@@ -11828,7 +13413,7 @@
                             </a:solidFill>
                             <a:latin typeface="Cambria Math" panose="02040503050406030204" pitchFamily="18" charset="0"/>
                           </a:rPr>
-                          <m:t>+(</m:t>
+                          <m:t>(</m:t>
                         </m:r>
                         <m:r>
                           <a:rPr sz="2285" i="1">
@@ -11857,40 +13442,15 @@
                           </a:rPr>
                           <m:t>54</m:t>
                         </m:r>
-                        <m:sSup>
-                          <m:sSupPr>
-                            <m:ctrlPr>
-                              <a:rPr sz="2285" i="1">
-                                <a:solidFill>
-                                  <a:srgbClr val="000000"/>
-                                </a:solidFill>
-                                <a:latin typeface="Cambria Math" panose="02040503050406030204" pitchFamily="18" charset="0"/>
-                              </a:rPr>
-                            </m:ctrlPr>
-                          </m:sSupPr>
-                          <m:e>
-                            <m:r>
-                              <a:rPr sz="2285" i="1">
-                                <a:solidFill>
-                                  <a:srgbClr val="000000"/>
-                                </a:solidFill>
-                                <a:latin typeface="Cambria Math" panose="02040503050406030204" pitchFamily="18" charset="0"/>
-                              </a:rPr>
-                              <m:t>)</m:t>
-                            </m:r>
-                          </m:e>
-                          <m:sup>
-                            <m:r>
-                              <a:rPr sz="2285" i="1">
-                                <a:solidFill>
-                                  <a:srgbClr val="000000"/>
-                                </a:solidFill>
-                                <a:latin typeface="Cambria Math" panose="02040503050406030204" pitchFamily="18" charset="0"/>
-                              </a:rPr>
-                              <m:t>2</m:t>
-                            </m:r>
-                          </m:sup>
-                        </m:sSup>
+                        <m:r>
+                          <a:rPr sz="2285" i="1">
+                            <a:solidFill>
+                              <a:srgbClr val="000000"/>
+                            </a:solidFill>
+                            <a:latin typeface="Cambria Math" panose="02040503050406030204" pitchFamily="18" charset="0"/>
+                          </a:rPr>
+                          <m:t>)</m:t>
+                        </m:r>
                       </m:e>
                     </m:d>
                   </m:oMath>
@@ -11934,7 +13494,7 @@
                         </a:solidFill>
                         <a:latin typeface="Cambria Math" panose="02040503050406030204" pitchFamily="18" charset="0"/>
                       </a:rPr>
-                      <m:t>168</m:t>
+                      <m:t>445</m:t>
                     </m:r>
                   </m:oMath>
                 </a14:m>
@@ -12267,1778 +13827,6 @@
                             </a:solidFill>
                             <a:latin typeface="Cambria Math" panose="02040503050406030204" pitchFamily="18" charset="0"/>
                           </a:rPr>
-                          <m:t>𝐺</m:t>
-                        </m:r>
-                      </m:e>
-                      <m:sub>
-                        <m:r>
-                          <a:rPr sz="2285" i="1">
-                            <a:solidFill>
-                              <a:srgbClr val="000000"/>
-                            </a:solidFill>
-                            <a:latin typeface="Cambria Math" panose="02040503050406030204" pitchFamily="18" charset="0"/>
-                          </a:rPr>
-                          <m:t>𝑖</m:t>
-                        </m:r>
-                      </m:sub>
-                    </m:sSub>
-                    <m:r>
-                      <a:rPr sz="2285" i="1">
-                        <a:solidFill>
-                          <a:srgbClr val="000000"/>
-                        </a:solidFill>
-                        <a:latin typeface="Cambria Math" panose="02040503050406030204" pitchFamily="18" charset="0"/>
-                      </a:rPr>
-                      <m:t>=</m:t>
-                    </m:r>
-                    <m:r>
-                      <a:rPr sz="2285" i="1">
-                        <a:solidFill>
-                          <a:srgbClr val="000000"/>
-                        </a:solidFill>
-                        <a:latin typeface="Cambria Math" panose="02040503050406030204" pitchFamily="18" charset="0"/>
-                      </a:rPr>
-                      <m:t>1</m:t>
-                    </m:r>
-                    <m:r>
-                      <a:rPr sz="2285" i="1">
-                        <a:solidFill>
-                          <a:srgbClr val="000000"/>
-                        </a:solidFill>
-                        <a:latin typeface="Cambria Math" panose="02040503050406030204" pitchFamily="18" charset="0"/>
-                      </a:rPr>
-                      <m:t>−</m:t>
-                    </m:r>
-                    <m:d>
-                      <m:dPr>
-                        <m:ctrlPr>
-                          <a:rPr sz="2285" i="1">
-                            <a:solidFill>
-                              <a:srgbClr val="000000"/>
-                            </a:solidFill>
-                            <a:latin typeface="Cambria Math" panose="02040503050406030204" pitchFamily="18" charset="0"/>
-                          </a:rPr>
-                        </m:ctrlPr>
-                      </m:dPr>
-                      <m:e>
-                        <m:r>
-                          <a:rPr sz="2285" i="1">
-                            <a:solidFill>
-                              <a:srgbClr val="000000"/>
-                            </a:solidFill>
-                            <a:latin typeface="Cambria Math" panose="02040503050406030204" pitchFamily="18" charset="0"/>
-                          </a:rPr>
-                          <m:t>(</m:t>
-                        </m:r>
-                        <m:r>
-                          <a:rPr sz="2285" i="1">
-                            <a:solidFill>
-                              <a:srgbClr val="000000"/>
-                            </a:solidFill>
-                            <a:latin typeface="Cambria Math" panose="02040503050406030204" pitchFamily="18" charset="0"/>
-                          </a:rPr>
-                          <m:t>0</m:t>
-                        </m:r>
-                        <m:r>
-                          <a:rPr sz="2285" i="1">
-                            <a:solidFill>
-                              <a:srgbClr val="000000"/>
-                            </a:solidFill>
-                            <a:latin typeface="Cambria Math" panose="02040503050406030204" pitchFamily="18" charset="0"/>
-                          </a:rPr>
-                          <m:t>/</m:t>
-                        </m:r>
-                        <m:r>
-                          <a:rPr sz="2285" i="1">
-                            <a:solidFill>
-                              <a:srgbClr val="000000"/>
-                            </a:solidFill>
-                            <a:latin typeface="Cambria Math" panose="02040503050406030204" pitchFamily="18" charset="0"/>
-                          </a:rPr>
-                          <m:t>46</m:t>
-                        </m:r>
-                        <m:sSup>
-                          <m:sSupPr>
-                            <m:ctrlPr>
-                              <a:rPr sz="2285" i="1">
-                                <a:solidFill>
-                                  <a:srgbClr val="000000"/>
-                                </a:solidFill>
-                                <a:latin typeface="Cambria Math" panose="02040503050406030204" pitchFamily="18" charset="0"/>
-                              </a:rPr>
-                            </m:ctrlPr>
-                          </m:sSupPr>
-                          <m:e>
-                            <m:r>
-                              <a:rPr sz="2285" i="1">
-                                <a:solidFill>
-                                  <a:srgbClr val="000000"/>
-                                </a:solidFill>
-                                <a:latin typeface="Cambria Math" panose="02040503050406030204" pitchFamily="18" charset="0"/>
-                              </a:rPr>
-                              <m:t>)</m:t>
-                            </m:r>
-                          </m:e>
-                          <m:sup>
-                            <m:r>
-                              <a:rPr sz="2285" i="1">
-                                <a:solidFill>
-                                  <a:srgbClr val="000000"/>
-                                </a:solidFill>
-                                <a:latin typeface="Cambria Math" panose="02040503050406030204" pitchFamily="18" charset="0"/>
-                              </a:rPr>
-                              <m:t>2</m:t>
-                            </m:r>
-                          </m:sup>
-                        </m:sSup>
-                        <m:r>
-                          <a:rPr sz="2285" i="1">
-                            <a:solidFill>
-                              <a:srgbClr val="000000"/>
-                            </a:solidFill>
-                            <a:latin typeface="Cambria Math" panose="02040503050406030204" pitchFamily="18" charset="0"/>
-                          </a:rPr>
-                          <m:t>+(</m:t>
-                        </m:r>
-                        <m:r>
-                          <a:rPr sz="2285" i="1">
-                            <a:solidFill>
-                              <a:srgbClr val="000000"/>
-                            </a:solidFill>
-                            <a:latin typeface="Cambria Math" panose="02040503050406030204" pitchFamily="18" charset="0"/>
-                          </a:rPr>
-                          <m:t>1</m:t>
-                        </m:r>
-                        <m:r>
-                          <a:rPr sz="2285" i="1">
-                            <a:solidFill>
-                              <a:srgbClr val="000000"/>
-                            </a:solidFill>
-                            <a:latin typeface="Cambria Math" panose="02040503050406030204" pitchFamily="18" charset="0"/>
-                          </a:rPr>
-                          <m:t>/</m:t>
-                        </m:r>
-                        <m:r>
-                          <a:rPr sz="2285" i="1">
-                            <a:solidFill>
-                              <a:srgbClr val="000000"/>
-                            </a:solidFill>
-                            <a:latin typeface="Cambria Math" panose="02040503050406030204" pitchFamily="18" charset="0"/>
-                          </a:rPr>
-                          <m:t>46</m:t>
-                        </m:r>
-                        <m:sSup>
-                          <m:sSupPr>
-                            <m:ctrlPr>
-                              <a:rPr sz="2285" i="1">
-                                <a:solidFill>
-                                  <a:srgbClr val="000000"/>
-                                </a:solidFill>
-                                <a:latin typeface="Cambria Math" panose="02040503050406030204" pitchFamily="18" charset="0"/>
-                              </a:rPr>
-                            </m:ctrlPr>
-                          </m:sSupPr>
-                          <m:e>
-                            <m:r>
-                              <a:rPr sz="2285" i="1">
-                                <a:solidFill>
-                                  <a:srgbClr val="000000"/>
-                                </a:solidFill>
-                                <a:latin typeface="Cambria Math" panose="02040503050406030204" pitchFamily="18" charset="0"/>
-                              </a:rPr>
-                              <m:t>)</m:t>
-                            </m:r>
-                          </m:e>
-                          <m:sup>
-                            <m:r>
-                              <a:rPr sz="2285" i="1">
-                                <a:solidFill>
-                                  <a:srgbClr val="000000"/>
-                                </a:solidFill>
-                                <a:latin typeface="Cambria Math" panose="02040503050406030204" pitchFamily="18" charset="0"/>
-                              </a:rPr>
-                              <m:t>2</m:t>
-                            </m:r>
-                          </m:sup>
-                        </m:sSup>
-                        <m:r>
-                          <a:rPr sz="2285" i="1">
-                            <a:solidFill>
-                              <a:srgbClr val="000000"/>
-                            </a:solidFill>
-                            <a:latin typeface="Cambria Math" panose="02040503050406030204" pitchFamily="18" charset="0"/>
-                          </a:rPr>
-                          <m:t>+(</m:t>
-                        </m:r>
-                        <m:r>
-                          <a:rPr sz="2285" i="1">
-                            <a:solidFill>
-                              <a:srgbClr val="000000"/>
-                            </a:solidFill>
-                            <a:latin typeface="Cambria Math" panose="02040503050406030204" pitchFamily="18" charset="0"/>
-                          </a:rPr>
-                          <m:t>45</m:t>
-                        </m:r>
-                        <m:r>
-                          <a:rPr sz="2285" i="1">
-                            <a:solidFill>
-                              <a:srgbClr val="000000"/>
-                            </a:solidFill>
-                            <a:latin typeface="Cambria Math" panose="02040503050406030204" pitchFamily="18" charset="0"/>
-                          </a:rPr>
-                          <m:t>/</m:t>
-                        </m:r>
-                        <m:r>
-                          <a:rPr sz="2285" i="1">
-                            <a:solidFill>
-                              <a:srgbClr val="000000"/>
-                            </a:solidFill>
-                            <a:latin typeface="Cambria Math" panose="02040503050406030204" pitchFamily="18" charset="0"/>
-                          </a:rPr>
-                          <m:t>46</m:t>
-                        </m:r>
-                        <m:sSup>
-                          <m:sSupPr>
-                            <m:ctrlPr>
-                              <a:rPr sz="2285" i="1">
-                                <a:solidFill>
-                                  <a:srgbClr val="000000"/>
-                                </a:solidFill>
-                                <a:latin typeface="Cambria Math" panose="02040503050406030204" pitchFamily="18" charset="0"/>
-                              </a:rPr>
-                            </m:ctrlPr>
-                          </m:sSupPr>
-                          <m:e>
-                            <m:r>
-                              <a:rPr sz="2285" i="1">
-                                <a:solidFill>
-                                  <a:srgbClr val="000000"/>
-                                </a:solidFill>
-                                <a:latin typeface="Cambria Math" panose="02040503050406030204" pitchFamily="18" charset="0"/>
-                              </a:rPr>
-                              <m:t>)</m:t>
-                            </m:r>
-                          </m:e>
-                          <m:sup>
-                            <m:r>
-                              <a:rPr sz="2285" i="1">
-                                <a:solidFill>
-                                  <a:srgbClr val="000000"/>
-                                </a:solidFill>
-                                <a:latin typeface="Cambria Math" panose="02040503050406030204" pitchFamily="18" charset="0"/>
-                              </a:rPr>
-                              <m:t>2</m:t>
-                            </m:r>
-                          </m:sup>
-                        </m:sSup>
-                      </m:e>
-                    </m:d>
-                  </m:oMath>
-                </a14:m>
-                <a:br>
-                  <a:rPr dirty="0"/>
-                </a:br>
-                <a14:m>
-                  <m:oMath xmlns:m="http://schemas.openxmlformats.org/officeDocument/2006/math">
-                    <m:r>
-                      <a:rPr sz="2285" i="1">
-                        <a:solidFill>
-                          <a:srgbClr val="000000"/>
-                        </a:solidFill>
-                        <a:latin typeface="Cambria Math" panose="02040503050406030204" pitchFamily="18" charset="0"/>
-                      </a:rPr>
-                      <m:t>=</m:t>
-                    </m:r>
-                    <m:r>
-                      <a:rPr sz="2285" i="1">
-                        <a:solidFill>
-                          <a:srgbClr val="000000"/>
-                        </a:solidFill>
-                        <a:latin typeface="Cambria Math" panose="02040503050406030204" pitchFamily="18" charset="0"/>
-                      </a:rPr>
-                      <m:t>0</m:t>
-                    </m:r>
-                    <m:r>
-                      <a:rPr sz="2285" i="1">
-                        <a:solidFill>
-                          <a:srgbClr val="000000"/>
-                        </a:solidFill>
-                        <a:latin typeface="Cambria Math" panose="02040503050406030204" pitchFamily="18" charset="0"/>
-                      </a:rPr>
-                      <m:t>.</m:t>
-                    </m:r>
-                    <m:r>
-                      <a:rPr sz="2285" i="1">
-                        <a:solidFill>
-                          <a:srgbClr val="000000"/>
-                        </a:solidFill>
-                        <a:latin typeface="Cambria Math" panose="02040503050406030204" pitchFamily="18" charset="0"/>
-                      </a:rPr>
-                      <m:t>043</m:t>
-                    </m:r>
-                  </m:oMath>
-                </a14:m>
-                <a:br>
-                  <a:rPr dirty="0"/>
-                </a:br>
-                <a:endParaRPr dirty="0"/>
-              </a:p>
-            </p:txBody>
-          </p:sp>
-        </mc:Choice>
-        <mc:Fallback>
-          <p:sp>
-            <p:nvSpPr>
-              <p:cNvPr id="201" name="Gini index :…"/>
-              <p:cNvSpPr txBox="1">
-                <a:spLocks noGrp="1" noRot="1" noChangeAspect="1" noMove="1" noResize="1" noEditPoints="1" noAdjustHandles="1" noChangeArrowheads="1" noChangeShapeType="1" noTextEdit="1"/>
-              </p:cNvSpPr>
-              <p:nvPr>
-                <p:ph type="body" idx="1"/>
-              </p:nvPr>
-            </p:nvSpPr>
-            <p:spPr>
-              <a:xfrm>
-                <a:off x="755679" y="1750021"/>
-                <a:ext cx="8161734" cy="5372253"/>
-              </a:xfrm>
-              <a:prstGeom prst="rect">
-                <a:avLst/>
-              </a:prstGeom>
-              <a:blipFill>
-                <a:blip r:embed="rId3"/>
-                <a:stretch>
-                  <a:fillRect l="-672"/>
-                </a:stretch>
-              </a:blipFill>
-            </p:spPr>
-            <p:txBody>
-              <a:bodyPr/>
-              <a:lstStyle/>
-              <a:p>
-                <a:r>
-                  <a:rPr lang="en-US">
-                    <a:noFill/>
-                  </a:rPr>
-                  <a:t> </a:t>
-                </a:r>
-              </a:p>
-            </p:txBody>
-          </p:sp>
-        </mc:Fallback>
-      </mc:AlternateContent>
-      <p:sp>
-        <p:nvSpPr>
-          <p:cNvPr id="202" name="Node Impurity Measures (Classification)"/>
-          <p:cNvSpPr txBox="1">
-            <a:spLocks noGrp="1"/>
-          </p:cNvSpPr>
-          <p:nvPr>
-            <p:ph type="title"/>
-          </p:nvPr>
-        </p:nvSpPr>
-        <p:spPr>
-          <a:prstGeom prst="rect">
-            <a:avLst/>
-          </a:prstGeom>
-        </p:spPr>
-        <p:txBody>
-          <a:bodyPr>
-            <a:normAutofit/>
-          </a:bodyPr>
-          <a:lstStyle>
-            <a:lvl1pPr defTabSz="1473840">
-              <a:defRPr sz="5100" spc="-102"/>
-            </a:lvl1pPr>
-          </a:lstStyle>
-          <a:p>
-            <a:r>
-              <a:rPr sz="4000" dirty="0"/>
-              <a:t>Node Impurity Measures (Classification)</a:t>
-            </a:r>
-          </a:p>
-        </p:txBody>
-      </p:sp>
-      <p:sp>
-        <p:nvSpPr>
-          <p:cNvPr id="203" name="Line"/>
-          <p:cNvSpPr/>
-          <p:nvPr/>
-        </p:nvSpPr>
-        <p:spPr>
-          <a:xfrm>
-            <a:off x="3665698" y="4468219"/>
-            <a:ext cx="4814068" cy="303247"/>
-          </a:xfrm>
-          <a:prstGeom prst="line">
-            <a:avLst/>
-          </a:prstGeom>
-          <a:ln w="25400">
-            <a:solidFill>
-              <a:srgbClr val="919191"/>
-            </a:solidFill>
-            <a:prstDash val="sysDot"/>
-            <a:miter lim="400000"/>
-            <a:tailEnd type="triangle"/>
-          </a:ln>
-        </p:spPr>
-        <p:txBody>
-          <a:bodyPr lIns="35719" tIns="35719" rIns="35719" bIns="35719" anchor="ctr"/>
-          <a:lstStyle/>
-          <a:p>
-            <a:endParaRPr sz="1266"/>
-          </a:p>
-        </p:txBody>
-      </p:sp>
-      <p:sp>
-        <p:nvSpPr>
-          <p:cNvPr id="204" name="Line"/>
-          <p:cNvSpPr/>
-          <p:nvPr/>
-        </p:nvSpPr>
-        <p:spPr>
-          <a:xfrm flipV="1">
-            <a:off x="3510423" y="5356706"/>
-            <a:ext cx="7393366" cy="1307593"/>
-          </a:xfrm>
-          <a:prstGeom prst="line">
-            <a:avLst/>
-          </a:prstGeom>
-          <a:ln w="25400">
-            <a:solidFill>
-              <a:srgbClr val="919191"/>
-            </a:solidFill>
-            <a:prstDash val="sysDot"/>
-            <a:miter lim="400000"/>
-            <a:tailEnd type="triangle"/>
-          </a:ln>
-        </p:spPr>
-        <p:txBody>
-          <a:bodyPr lIns="35719" tIns="35719" rIns="35719" bIns="35719" anchor="ctr"/>
-          <a:lstStyle/>
-          <a:p>
-            <a:endParaRPr sz="1266"/>
-          </a:p>
-        </p:txBody>
-      </p:sp>
-    </p:spTree>
-  </p:cSld>
-  <p:clrMapOvr>
-    <a:masterClrMapping/>
-  </p:clrMapOvr>
-  <p:transition spd="med"/>
-</p:sld>
-</file>
-
-<file path=ppt/slides/slide9.xml><?xml version="1.0" encoding="utf-8"?>
-<p:sld xmlns:a="http://schemas.openxmlformats.org/drawingml/2006/main" xmlns:r="http://schemas.openxmlformats.org/officeDocument/2006/relationships" xmlns:p="http://schemas.openxmlformats.org/presentationml/2006/main">
-  <p:cSld>
-    <p:spTree>
-      <p:nvGrpSpPr>
-        <p:cNvPr id="1" name=""/>
-        <p:cNvGrpSpPr/>
-        <p:nvPr/>
-      </p:nvGrpSpPr>
-      <p:grpSpPr>
-        <a:xfrm>
-          <a:off x="0" y="0"/>
-          <a:ext cx="0" cy="0"/>
-          <a:chOff x="0" y="0"/>
-          <a:chExt cx="0" cy="0"/>
-        </a:xfrm>
-      </p:grpSpPr>
-      <p:pic>
-        <p:nvPicPr>
-          <p:cNvPr id="206" name="iris_tree_no_impurity.png" descr="iris_tree_no_impurity.png"/>
-          <p:cNvPicPr>
-            <a:picLocks noChangeAspect="1"/>
-          </p:cNvPicPr>
-          <p:nvPr/>
-        </p:nvPicPr>
-        <p:blipFill>
-          <a:blip r:embed="rId2"/>
-          <a:stretch>
-            <a:fillRect/>
-          </a:stretch>
-        </p:blipFill>
-        <p:spPr>
-          <a:xfrm>
-            <a:off x="7178810" y="1351653"/>
-            <a:ext cx="5299314" cy="5299313"/>
-          </a:xfrm>
-          <a:prstGeom prst="rect">
-            <a:avLst/>
-          </a:prstGeom>
-          <a:ln w="12700">
-            <a:miter lim="400000"/>
-          </a:ln>
-        </p:spPr>
-      </p:pic>
-      <mc:AlternateContent xmlns:mc="http://schemas.openxmlformats.org/markup-compatibility/2006">
-        <mc:Choice xmlns:a14="http://schemas.microsoft.com/office/drawing/2010/main" Requires="a14">
-          <p:sp>
-            <p:nvSpPr>
-              <p:cNvPr id="207" name="Entropy :…"/>
-              <p:cNvSpPr txBox="1">
-                <a:spLocks noGrp="1"/>
-              </p:cNvSpPr>
-              <p:nvPr>
-                <p:ph type="body" idx="1"/>
-              </p:nvPr>
-            </p:nvSpPr>
-            <p:spPr>
-              <a:xfrm>
-                <a:off x="591775" y="1949882"/>
-                <a:ext cx="8161734" cy="5372253"/>
-              </a:xfrm>
-              <a:prstGeom prst="rect">
-                <a:avLst/>
-              </a:prstGeom>
-            </p:spPr>
-            <p:txBody>
-              <a:bodyPr/>
-              <a:lstStyle/>
-              <a:p>
-                <a:r>
-                  <a:rPr dirty="0"/>
-                  <a:t>Entropy :  </a:t>
-                </a:r>
-                <a14:m>
-                  <m:oMath xmlns:m="http://schemas.openxmlformats.org/officeDocument/2006/math">
-                    <m:sSub>
-                      <m:sSubPr>
-                        <m:ctrlPr>
-                          <a:rPr sz="2285" i="1">
-                            <a:solidFill>
-                              <a:srgbClr val="000000"/>
-                            </a:solidFill>
-                            <a:latin typeface="Cambria Math" panose="02040503050406030204" pitchFamily="18" charset="0"/>
-                          </a:rPr>
-                        </m:ctrlPr>
-                      </m:sSubPr>
-                      <m:e>
-                        <m:r>
-                          <a:rPr sz="2285" i="1">
-                            <a:solidFill>
-                              <a:srgbClr val="000000"/>
-                            </a:solidFill>
-                            <a:latin typeface="Cambria Math" panose="02040503050406030204" pitchFamily="18" charset="0"/>
-                          </a:rPr>
-                          <m:t>𝐻</m:t>
-                        </m:r>
-                      </m:e>
-                      <m:sub>
-                        <m:r>
-                          <a:rPr sz="2285" i="1">
-                            <a:solidFill>
-                              <a:srgbClr val="000000"/>
-                            </a:solidFill>
-                            <a:latin typeface="Cambria Math" panose="02040503050406030204" pitchFamily="18" charset="0"/>
-                          </a:rPr>
-                          <m:t>𝑖</m:t>
-                        </m:r>
-                      </m:sub>
-                    </m:sSub>
-                    <m:r>
-                      <a:rPr sz="2285" i="1">
-                        <a:solidFill>
-                          <a:srgbClr val="000000"/>
-                        </a:solidFill>
-                        <a:latin typeface="Cambria Math" panose="02040503050406030204" pitchFamily="18" charset="0"/>
-                      </a:rPr>
-                      <m:t>=−</m:t>
-                    </m:r>
-                    <m:limUpp>
-                      <m:limUppPr>
-                        <m:ctrlPr>
-                          <a:rPr sz="2285" i="1">
-                            <a:solidFill>
-                              <a:srgbClr val="000000"/>
-                            </a:solidFill>
-                            <a:latin typeface="Cambria Math" panose="02040503050406030204" pitchFamily="18" charset="0"/>
-                          </a:rPr>
-                        </m:ctrlPr>
-                      </m:limUppPr>
-                      <m:e>
-                        <m:limLow>
-                          <m:limLowPr>
-                            <m:ctrlPr>
-                              <a:rPr sz="2285" i="1">
-                                <a:solidFill>
-                                  <a:srgbClr val="000000"/>
-                                </a:solidFill>
-                                <a:latin typeface="Cambria Math" panose="02040503050406030204" pitchFamily="18" charset="0"/>
-                              </a:rPr>
-                            </m:ctrlPr>
-                          </m:limLowPr>
-                          <m:e>
-                            <m:r>
-                              <a:rPr sz="2285" i="1">
-                                <a:solidFill>
-                                  <a:srgbClr val="000000"/>
-                                </a:solidFill>
-                                <a:latin typeface="Cambria Math" panose="02040503050406030204" pitchFamily="18" charset="0"/>
-                              </a:rPr>
-                              <m:t>∑</m:t>
-                            </m:r>
-                          </m:e>
-                          <m:lim>
-                            <m:r>
-                              <a:rPr sz="2285" i="1">
-                                <a:solidFill>
-                                  <a:srgbClr val="000000"/>
-                                </a:solidFill>
-                                <a:latin typeface="Cambria Math" panose="02040503050406030204" pitchFamily="18" charset="0"/>
-                              </a:rPr>
-                              <m:t>𝑘</m:t>
-                            </m:r>
-                            <m:r>
-                              <a:rPr sz="2285" i="1">
-                                <a:solidFill>
-                                  <a:srgbClr val="000000"/>
-                                </a:solidFill>
-                                <a:latin typeface="Cambria Math" panose="02040503050406030204" pitchFamily="18" charset="0"/>
-                              </a:rPr>
-                              <m:t>=</m:t>
-                            </m:r>
-                            <m:r>
-                              <a:rPr sz="2285" i="1">
-                                <a:solidFill>
-                                  <a:srgbClr val="000000"/>
-                                </a:solidFill>
-                                <a:latin typeface="Cambria Math" panose="02040503050406030204" pitchFamily="18" charset="0"/>
-                              </a:rPr>
-                              <m:t>1</m:t>
-                            </m:r>
-                          </m:lim>
-                        </m:limLow>
-                      </m:e>
-                      <m:lim>
-                        <m:r>
-                          <a:rPr sz="2285" i="1">
-                            <a:solidFill>
-                              <a:srgbClr val="000000"/>
-                            </a:solidFill>
-                            <a:latin typeface="Cambria Math" panose="02040503050406030204" pitchFamily="18" charset="0"/>
-                          </a:rPr>
-                          <m:t>𝐾</m:t>
-                        </m:r>
-                      </m:lim>
-                    </m:limUpp>
-                    <m:sSub>
-                      <m:sSubPr>
-                        <m:ctrlPr>
-                          <a:rPr sz="2285" i="1">
-                            <a:solidFill>
-                              <a:srgbClr val="000000"/>
-                            </a:solidFill>
-                            <a:latin typeface="Cambria Math" panose="02040503050406030204" pitchFamily="18" charset="0"/>
-                          </a:rPr>
-                        </m:ctrlPr>
-                      </m:sSubPr>
-                      <m:e>
-                        <m:r>
-                          <a:rPr sz="2285" i="1">
-                            <a:solidFill>
-                              <a:srgbClr val="000000"/>
-                            </a:solidFill>
-                            <a:latin typeface="Cambria Math" panose="02040503050406030204" pitchFamily="18" charset="0"/>
-                          </a:rPr>
-                          <m:t>𝑝</m:t>
-                        </m:r>
-                      </m:e>
-                      <m:sub>
-                        <m:r>
-                          <a:rPr sz="2285" i="1">
-                            <a:solidFill>
-                              <a:srgbClr val="000000"/>
-                            </a:solidFill>
-                            <a:latin typeface="Cambria Math" panose="02040503050406030204" pitchFamily="18" charset="0"/>
-                          </a:rPr>
-                          <m:t>𝑖𝑘</m:t>
-                        </m:r>
-                      </m:sub>
-                    </m:sSub>
-                    <m:sSub>
-                      <m:sSubPr>
-                        <m:ctrlPr>
-                          <a:rPr sz="2285" i="1">
-                            <a:solidFill>
-                              <a:srgbClr val="000000"/>
-                            </a:solidFill>
-                            <a:latin typeface="Cambria Math" panose="02040503050406030204" pitchFamily="18" charset="0"/>
-                          </a:rPr>
-                        </m:ctrlPr>
-                      </m:sSubPr>
-                      <m:e>
-                        <m:r>
-                          <m:rPr>
-                            <m:sty m:val="p"/>
-                          </m:rPr>
-                          <a:rPr sz="2285" i="1">
-                            <a:solidFill>
-                              <a:srgbClr val="000000"/>
-                            </a:solidFill>
-                            <a:latin typeface="Cambria Math" panose="02040503050406030204" pitchFamily="18" charset="0"/>
-                          </a:rPr>
-                          <m:t>log</m:t>
-                        </m:r>
-                      </m:e>
-                      <m:sub>
-                        <m:r>
-                          <a:rPr sz="2285" i="1">
-                            <a:solidFill>
-                              <a:srgbClr val="000000"/>
-                            </a:solidFill>
-                            <a:latin typeface="Cambria Math" panose="02040503050406030204" pitchFamily="18" charset="0"/>
-                          </a:rPr>
-                          <m:t>2</m:t>
-                        </m:r>
-                      </m:sub>
-                    </m:sSub>
-                    <m:r>
-                      <a:rPr sz="2285" i="1">
-                        <a:solidFill>
-                          <a:srgbClr val="000000"/>
-                        </a:solidFill>
-                        <a:latin typeface="Cambria Math" panose="02040503050406030204" pitchFamily="18" charset="0"/>
-                      </a:rPr>
-                      <m:t>(</m:t>
-                    </m:r>
-                    <m:sSub>
-                      <m:sSubPr>
-                        <m:ctrlPr>
-                          <a:rPr sz="2285" i="1">
-                            <a:solidFill>
-                              <a:srgbClr val="000000"/>
-                            </a:solidFill>
-                            <a:latin typeface="Cambria Math" panose="02040503050406030204" pitchFamily="18" charset="0"/>
-                          </a:rPr>
-                        </m:ctrlPr>
-                      </m:sSubPr>
-                      <m:e>
-                        <m:r>
-                          <a:rPr sz="2285" i="1">
-                            <a:solidFill>
-                              <a:srgbClr val="000000"/>
-                            </a:solidFill>
-                            <a:latin typeface="Cambria Math" panose="02040503050406030204" pitchFamily="18" charset="0"/>
-                          </a:rPr>
-                          <m:t>𝑝</m:t>
-                        </m:r>
-                      </m:e>
-                      <m:sub>
-                        <m:r>
-                          <a:rPr sz="2285" i="1">
-                            <a:solidFill>
-                              <a:srgbClr val="000000"/>
-                            </a:solidFill>
-                            <a:latin typeface="Cambria Math" panose="02040503050406030204" pitchFamily="18" charset="0"/>
-                          </a:rPr>
-                          <m:t>𝑖𝑘</m:t>
-                        </m:r>
-                      </m:sub>
-                    </m:sSub>
-                    <m:r>
-                      <a:rPr sz="2285" i="1">
-                        <a:solidFill>
-                          <a:srgbClr val="000000"/>
-                        </a:solidFill>
-                        <a:latin typeface="Cambria Math" panose="02040503050406030204" pitchFamily="18" charset="0"/>
-                      </a:rPr>
-                      <m:t>)</m:t>
-                    </m:r>
-                  </m:oMath>
-                </a14:m>
-                <a:r>
-                  <a:rPr dirty="0"/>
-                  <a:t>   </a:t>
-                </a:r>
-              </a:p>
-              <a:p>
-                <a:r>
-                  <a:rPr dirty="0"/>
-                  <a:t>For the “green” node</a:t>
-                </a:r>
-                <a:br>
-                  <a:rPr dirty="0"/>
-                </a:br>
-                <a14:m>
-                  <m:oMath xmlns:m="http://schemas.openxmlformats.org/officeDocument/2006/math">
-                    <m:sSub>
-                      <m:sSubPr>
-                        <m:ctrlPr>
-                          <a:rPr sz="2285" i="1">
-                            <a:solidFill>
-                              <a:srgbClr val="000000"/>
-                            </a:solidFill>
-                            <a:latin typeface="Cambria Math" panose="02040503050406030204" pitchFamily="18" charset="0"/>
-                          </a:rPr>
-                        </m:ctrlPr>
-                      </m:sSubPr>
-                      <m:e>
-                        <m:r>
-                          <a:rPr sz="2285" i="1">
-                            <a:solidFill>
-                              <a:srgbClr val="000000"/>
-                            </a:solidFill>
-                            <a:latin typeface="Cambria Math" panose="02040503050406030204" pitchFamily="18" charset="0"/>
-                          </a:rPr>
-                          <m:t>𝑝</m:t>
-                        </m:r>
-                      </m:e>
-                      <m:sub>
-                        <m:r>
-                          <a:rPr sz="2285" i="1">
-                            <a:solidFill>
-                              <a:srgbClr val="000000"/>
-                            </a:solidFill>
-                            <a:latin typeface="Cambria Math" panose="02040503050406030204" pitchFamily="18" charset="0"/>
-                          </a:rPr>
-                          <m:t>𝑖</m:t>
-                        </m:r>
-                        <m:r>
-                          <a:rPr sz="2285" i="1">
-                            <a:solidFill>
-                              <a:srgbClr val="000000"/>
-                            </a:solidFill>
-                            <a:latin typeface="Cambria Math" panose="02040503050406030204" pitchFamily="18" charset="0"/>
-                          </a:rPr>
-                          <m:t>1</m:t>
-                        </m:r>
-                      </m:sub>
-                    </m:sSub>
-                    <m:r>
-                      <a:rPr sz="2285" i="1">
-                        <a:solidFill>
-                          <a:srgbClr val="000000"/>
-                        </a:solidFill>
-                        <a:latin typeface="Cambria Math" panose="02040503050406030204" pitchFamily="18" charset="0"/>
-                      </a:rPr>
-                      <m:t>=(</m:t>
-                    </m:r>
-                    <m:r>
-                      <a:rPr sz="2285" i="1">
-                        <a:solidFill>
-                          <a:srgbClr val="000000"/>
-                        </a:solidFill>
-                        <a:latin typeface="Cambria Math" panose="02040503050406030204" pitchFamily="18" charset="0"/>
-                      </a:rPr>
-                      <m:t>0</m:t>
-                    </m:r>
-                    <m:r>
-                      <a:rPr sz="2285" i="1">
-                        <a:solidFill>
-                          <a:srgbClr val="000000"/>
-                        </a:solidFill>
-                        <a:latin typeface="Cambria Math" panose="02040503050406030204" pitchFamily="18" charset="0"/>
-                      </a:rPr>
-                      <m:t>/</m:t>
-                    </m:r>
-                    <m:r>
-                      <a:rPr sz="2285" i="1">
-                        <a:solidFill>
-                          <a:srgbClr val="000000"/>
-                        </a:solidFill>
-                        <a:latin typeface="Cambria Math" panose="02040503050406030204" pitchFamily="18" charset="0"/>
-                      </a:rPr>
-                      <m:t>54</m:t>
-                    </m:r>
-                    <m:r>
-                      <a:rPr sz="2285" i="1">
-                        <a:solidFill>
-                          <a:srgbClr val="000000"/>
-                        </a:solidFill>
-                        <a:latin typeface="Cambria Math" panose="02040503050406030204" pitchFamily="18" charset="0"/>
-                      </a:rPr>
-                      <m:t>);</m:t>
-                    </m:r>
-                    <m:r>
-                      <m:rPr>
-                        <m:nor/>
-                      </m:rPr>
-                      <a:rPr sz="2285" i="1">
-                        <a:solidFill>
-                          <a:srgbClr val="000000"/>
-                        </a:solidFill>
-                        <a:latin typeface="Cambria Math" panose="02040503050406030204" pitchFamily="18" charset="0"/>
-                      </a:rPr>
-                      <m:t> </m:t>
-                    </m:r>
-                    <m:sSub>
-                      <m:sSubPr>
-                        <m:ctrlPr>
-                          <a:rPr sz="2285" i="1">
-                            <a:solidFill>
-                              <a:srgbClr val="000000"/>
-                            </a:solidFill>
-                            <a:latin typeface="Cambria Math" panose="02040503050406030204" pitchFamily="18" charset="0"/>
-                          </a:rPr>
-                        </m:ctrlPr>
-                      </m:sSubPr>
-                      <m:e>
-                        <m:r>
-                          <a:rPr sz="2285" i="1">
-                            <a:solidFill>
-                              <a:srgbClr val="000000"/>
-                            </a:solidFill>
-                            <a:latin typeface="Cambria Math" panose="02040503050406030204" pitchFamily="18" charset="0"/>
-                          </a:rPr>
-                          <m:t>𝑝</m:t>
-                        </m:r>
-                      </m:e>
-                      <m:sub>
-                        <m:r>
-                          <a:rPr sz="2285" i="1">
-                            <a:solidFill>
-                              <a:srgbClr val="000000"/>
-                            </a:solidFill>
-                            <a:latin typeface="Cambria Math" panose="02040503050406030204" pitchFamily="18" charset="0"/>
-                          </a:rPr>
-                          <m:t>𝑖</m:t>
-                        </m:r>
-                        <m:r>
-                          <a:rPr sz="2285" i="1">
-                            <a:solidFill>
-                              <a:srgbClr val="000000"/>
-                            </a:solidFill>
-                            <a:latin typeface="Cambria Math" panose="02040503050406030204" pitchFamily="18" charset="0"/>
-                          </a:rPr>
-                          <m:t>2</m:t>
-                        </m:r>
-                      </m:sub>
-                    </m:sSub>
-                    <m:r>
-                      <a:rPr sz="2285" i="1">
-                        <a:solidFill>
-                          <a:srgbClr val="000000"/>
-                        </a:solidFill>
-                        <a:latin typeface="Cambria Math" panose="02040503050406030204" pitchFamily="18" charset="0"/>
-                      </a:rPr>
-                      <m:t>=(</m:t>
-                    </m:r>
-                    <m:r>
-                      <a:rPr sz="2285" i="1">
-                        <a:solidFill>
-                          <a:srgbClr val="000000"/>
-                        </a:solidFill>
-                        <a:latin typeface="Cambria Math" panose="02040503050406030204" pitchFamily="18" charset="0"/>
-                      </a:rPr>
-                      <m:t>49</m:t>
-                    </m:r>
-                    <m:r>
-                      <a:rPr sz="2285" i="1">
-                        <a:solidFill>
-                          <a:srgbClr val="000000"/>
-                        </a:solidFill>
-                        <a:latin typeface="Cambria Math" panose="02040503050406030204" pitchFamily="18" charset="0"/>
-                      </a:rPr>
-                      <m:t>/</m:t>
-                    </m:r>
-                    <m:r>
-                      <a:rPr sz="2285" i="1">
-                        <a:solidFill>
-                          <a:srgbClr val="000000"/>
-                        </a:solidFill>
-                        <a:latin typeface="Cambria Math" panose="02040503050406030204" pitchFamily="18" charset="0"/>
-                      </a:rPr>
-                      <m:t>54</m:t>
-                    </m:r>
-                    <m:r>
-                      <a:rPr sz="2285" i="1">
-                        <a:solidFill>
-                          <a:srgbClr val="000000"/>
-                        </a:solidFill>
-                        <a:latin typeface="Cambria Math" panose="02040503050406030204" pitchFamily="18" charset="0"/>
-                      </a:rPr>
-                      <m:t>);</m:t>
-                    </m:r>
-                    <m:r>
-                      <m:rPr>
-                        <m:nor/>
-                      </m:rPr>
-                      <a:rPr sz="2285" i="1">
-                        <a:solidFill>
-                          <a:srgbClr val="000000"/>
-                        </a:solidFill>
-                        <a:latin typeface="Cambria Math" panose="02040503050406030204" pitchFamily="18" charset="0"/>
-                      </a:rPr>
-                      <m:t> </m:t>
-                    </m:r>
-                    <m:sSub>
-                      <m:sSubPr>
-                        <m:ctrlPr>
-                          <a:rPr sz="2285" i="1">
-                            <a:solidFill>
-                              <a:srgbClr val="000000"/>
-                            </a:solidFill>
-                            <a:latin typeface="Cambria Math" panose="02040503050406030204" pitchFamily="18" charset="0"/>
-                          </a:rPr>
-                        </m:ctrlPr>
-                      </m:sSubPr>
-                      <m:e>
-                        <m:r>
-                          <a:rPr sz="2285" i="1">
-                            <a:solidFill>
-                              <a:srgbClr val="000000"/>
-                            </a:solidFill>
-                            <a:latin typeface="Cambria Math" panose="02040503050406030204" pitchFamily="18" charset="0"/>
-                          </a:rPr>
-                          <m:t>𝑝</m:t>
-                        </m:r>
-                      </m:e>
-                      <m:sub>
-                        <m:r>
-                          <a:rPr sz="2285" i="1">
-                            <a:solidFill>
-                              <a:srgbClr val="000000"/>
-                            </a:solidFill>
-                            <a:latin typeface="Cambria Math" panose="02040503050406030204" pitchFamily="18" charset="0"/>
-                          </a:rPr>
-                          <m:t>𝑖</m:t>
-                        </m:r>
-                        <m:r>
-                          <a:rPr sz="2285" i="1">
-                            <a:solidFill>
-                              <a:srgbClr val="000000"/>
-                            </a:solidFill>
-                            <a:latin typeface="Cambria Math" panose="02040503050406030204" pitchFamily="18" charset="0"/>
-                          </a:rPr>
-                          <m:t>3</m:t>
-                        </m:r>
-                      </m:sub>
-                    </m:sSub>
-                    <m:r>
-                      <a:rPr sz="2285" i="1">
-                        <a:solidFill>
-                          <a:srgbClr val="000000"/>
-                        </a:solidFill>
-                        <a:latin typeface="Cambria Math" panose="02040503050406030204" pitchFamily="18" charset="0"/>
-                      </a:rPr>
-                      <m:t>=(</m:t>
-                    </m:r>
-                    <m:r>
-                      <a:rPr sz="2285" i="1">
-                        <a:solidFill>
-                          <a:srgbClr val="000000"/>
-                        </a:solidFill>
-                        <a:latin typeface="Cambria Math" panose="02040503050406030204" pitchFamily="18" charset="0"/>
-                      </a:rPr>
-                      <m:t>5</m:t>
-                    </m:r>
-                    <m:r>
-                      <a:rPr sz="2285" i="1">
-                        <a:solidFill>
-                          <a:srgbClr val="000000"/>
-                        </a:solidFill>
-                        <a:latin typeface="Cambria Math" panose="02040503050406030204" pitchFamily="18" charset="0"/>
-                      </a:rPr>
-                      <m:t>/</m:t>
-                    </m:r>
-                    <m:r>
-                      <a:rPr sz="2285" i="1">
-                        <a:solidFill>
-                          <a:srgbClr val="000000"/>
-                        </a:solidFill>
-                        <a:latin typeface="Cambria Math" panose="02040503050406030204" pitchFamily="18" charset="0"/>
-                      </a:rPr>
-                      <m:t>54</m:t>
-                    </m:r>
-                    <m:r>
-                      <a:rPr sz="2285" i="1">
-                        <a:solidFill>
-                          <a:srgbClr val="000000"/>
-                        </a:solidFill>
-                        <a:latin typeface="Cambria Math" panose="02040503050406030204" pitchFamily="18" charset="0"/>
-                      </a:rPr>
-                      <m:t>)</m:t>
-                    </m:r>
-                  </m:oMath>
-                </a14:m>
-                <a:br>
-                  <a:rPr dirty="0"/>
-                </a:br>
-                <a:br>
-                  <a:rPr dirty="0"/>
-                </a:br>
-                <a14:m>
-                  <m:oMath xmlns:m="http://schemas.openxmlformats.org/officeDocument/2006/math">
-                    <m:sSub>
-                      <m:sSubPr>
-                        <m:ctrlPr>
-                          <a:rPr sz="2285" i="1">
-                            <a:solidFill>
-                              <a:srgbClr val="000000"/>
-                            </a:solidFill>
-                            <a:latin typeface="Cambria Math" panose="02040503050406030204" pitchFamily="18" charset="0"/>
-                          </a:rPr>
-                        </m:ctrlPr>
-                      </m:sSubPr>
-                      <m:e>
-                        <m:r>
-                          <a:rPr sz="2285" i="1">
-                            <a:solidFill>
-                              <a:srgbClr val="000000"/>
-                            </a:solidFill>
-                            <a:latin typeface="Cambria Math" panose="02040503050406030204" pitchFamily="18" charset="0"/>
-                          </a:rPr>
-                          <m:t>𝐻</m:t>
-                        </m:r>
-                      </m:e>
-                      <m:sub>
-                        <m:r>
-                          <a:rPr sz="2285" i="1">
-                            <a:solidFill>
-                              <a:srgbClr val="000000"/>
-                            </a:solidFill>
-                            <a:latin typeface="Cambria Math" panose="02040503050406030204" pitchFamily="18" charset="0"/>
-                          </a:rPr>
-                          <m:t>𝑖</m:t>
-                        </m:r>
-                      </m:sub>
-                    </m:sSub>
-                    <m:r>
-                      <a:rPr sz="2285" i="1">
-                        <a:solidFill>
-                          <a:srgbClr val="000000"/>
-                        </a:solidFill>
-                        <a:latin typeface="Cambria Math" panose="02040503050406030204" pitchFamily="18" charset="0"/>
-                      </a:rPr>
-                      <m:t>=−</m:t>
-                    </m:r>
-                    <m:d>
-                      <m:dPr>
-                        <m:ctrlPr>
-                          <a:rPr sz="2285" i="1">
-                            <a:solidFill>
-                              <a:srgbClr val="000000"/>
-                            </a:solidFill>
-                            <a:latin typeface="Cambria Math" panose="02040503050406030204" pitchFamily="18" charset="0"/>
-                          </a:rPr>
-                        </m:ctrlPr>
-                      </m:dPr>
-                      <m:e>
-                        <m:r>
-                          <a:rPr sz="2285" i="1">
-                            <a:solidFill>
-                              <a:srgbClr val="000000"/>
-                            </a:solidFill>
-                            <a:latin typeface="Cambria Math" panose="02040503050406030204" pitchFamily="18" charset="0"/>
-                          </a:rPr>
-                          <m:t>(</m:t>
-                        </m:r>
-                        <m:r>
-                          <a:rPr sz="2285" i="1">
-                            <a:solidFill>
-                              <a:srgbClr val="000000"/>
-                            </a:solidFill>
-                            <a:latin typeface="Cambria Math" panose="02040503050406030204" pitchFamily="18" charset="0"/>
-                          </a:rPr>
-                          <m:t>49</m:t>
-                        </m:r>
-                        <m:r>
-                          <a:rPr sz="2285" i="1">
-                            <a:solidFill>
-                              <a:srgbClr val="000000"/>
-                            </a:solidFill>
-                            <a:latin typeface="Cambria Math" panose="02040503050406030204" pitchFamily="18" charset="0"/>
-                          </a:rPr>
-                          <m:t>/</m:t>
-                        </m:r>
-                        <m:r>
-                          <a:rPr sz="2285" i="1">
-                            <a:solidFill>
-                              <a:srgbClr val="000000"/>
-                            </a:solidFill>
-                            <a:latin typeface="Cambria Math" panose="02040503050406030204" pitchFamily="18" charset="0"/>
-                          </a:rPr>
-                          <m:t>54</m:t>
-                        </m:r>
-                        <m:r>
-                          <a:rPr sz="2285" i="1">
-                            <a:solidFill>
-                              <a:srgbClr val="000000"/>
-                            </a:solidFill>
-                            <a:latin typeface="Cambria Math" panose="02040503050406030204" pitchFamily="18" charset="0"/>
-                          </a:rPr>
-                          <m:t>)</m:t>
-                        </m:r>
-                        <m:sSub>
-                          <m:sSubPr>
-                            <m:ctrlPr>
-                              <a:rPr sz="2285" i="1">
-                                <a:solidFill>
-                                  <a:srgbClr val="000000"/>
-                                </a:solidFill>
-                                <a:latin typeface="Cambria Math" panose="02040503050406030204" pitchFamily="18" charset="0"/>
-                              </a:rPr>
-                            </m:ctrlPr>
-                          </m:sSubPr>
-                          <m:e>
-                            <m:r>
-                              <m:rPr>
-                                <m:sty m:val="p"/>
-                              </m:rPr>
-                              <a:rPr sz="2285" i="1">
-                                <a:solidFill>
-                                  <a:srgbClr val="000000"/>
-                                </a:solidFill>
-                                <a:latin typeface="Cambria Math" panose="02040503050406030204" pitchFamily="18" charset="0"/>
-                              </a:rPr>
-                              <m:t>log</m:t>
-                            </m:r>
-                          </m:e>
-                          <m:sub>
-                            <m:r>
-                              <a:rPr sz="2285" i="1">
-                                <a:solidFill>
-                                  <a:srgbClr val="000000"/>
-                                </a:solidFill>
-                                <a:latin typeface="Cambria Math" panose="02040503050406030204" pitchFamily="18" charset="0"/>
-                              </a:rPr>
-                              <m:t>2</m:t>
-                            </m:r>
-                          </m:sub>
-                        </m:sSub>
-                        <m:r>
-                          <a:rPr sz="2285" i="1">
-                            <a:solidFill>
-                              <a:srgbClr val="000000"/>
-                            </a:solidFill>
-                            <a:latin typeface="Cambria Math" panose="02040503050406030204" pitchFamily="18" charset="0"/>
-                          </a:rPr>
-                          <m:t>(</m:t>
-                        </m:r>
-                        <m:r>
-                          <a:rPr sz="2285" i="1">
-                            <a:solidFill>
-                              <a:srgbClr val="000000"/>
-                            </a:solidFill>
-                            <a:latin typeface="Cambria Math" panose="02040503050406030204" pitchFamily="18" charset="0"/>
-                          </a:rPr>
-                          <m:t>49</m:t>
-                        </m:r>
-                        <m:r>
-                          <a:rPr sz="2285" i="1">
-                            <a:solidFill>
-                              <a:srgbClr val="000000"/>
-                            </a:solidFill>
-                            <a:latin typeface="Cambria Math" panose="02040503050406030204" pitchFamily="18" charset="0"/>
-                          </a:rPr>
-                          <m:t>/</m:t>
-                        </m:r>
-                        <m:r>
-                          <a:rPr sz="2285" i="1">
-                            <a:solidFill>
-                              <a:srgbClr val="000000"/>
-                            </a:solidFill>
-                            <a:latin typeface="Cambria Math" panose="02040503050406030204" pitchFamily="18" charset="0"/>
-                          </a:rPr>
-                          <m:t>54</m:t>
-                        </m:r>
-                        <m:r>
-                          <a:rPr sz="2285" i="1">
-                            <a:solidFill>
-                              <a:srgbClr val="000000"/>
-                            </a:solidFill>
-                            <a:latin typeface="Cambria Math" panose="02040503050406030204" pitchFamily="18" charset="0"/>
-                          </a:rPr>
-                          <m:t>)+(</m:t>
-                        </m:r>
-                        <m:r>
-                          <a:rPr sz="2285" i="1">
-                            <a:solidFill>
-                              <a:srgbClr val="000000"/>
-                            </a:solidFill>
-                            <a:latin typeface="Cambria Math" panose="02040503050406030204" pitchFamily="18" charset="0"/>
-                          </a:rPr>
-                          <m:t>5</m:t>
-                        </m:r>
-                        <m:r>
-                          <a:rPr sz="2285" i="1">
-                            <a:solidFill>
-                              <a:srgbClr val="000000"/>
-                            </a:solidFill>
-                            <a:latin typeface="Cambria Math" panose="02040503050406030204" pitchFamily="18" charset="0"/>
-                          </a:rPr>
-                          <m:t>/</m:t>
-                        </m:r>
-                        <m:r>
-                          <a:rPr sz="2285" i="1">
-                            <a:solidFill>
-                              <a:srgbClr val="000000"/>
-                            </a:solidFill>
-                            <a:latin typeface="Cambria Math" panose="02040503050406030204" pitchFamily="18" charset="0"/>
-                          </a:rPr>
-                          <m:t>54</m:t>
-                        </m:r>
-                        <m:r>
-                          <a:rPr sz="2285" i="1">
-                            <a:solidFill>
-                              <a:srgbClr val="000000"/>
-                            </a:solidFill>
-                            <a:latin typeface="Cambria Math" panose="02040503050406030204" pitchFamily="18" charset="0"/>
-                          </a:rPr>
-                          <m:t>)</m:t>
-                        </m:r>
-                        <m:sSub>
-                          <m:sSubPr>
-                            <m:ctrlPr>
-                              <a:rPr sz="2285" i="1">
-                                <a:solidFill>
-                                  <a:srgbClr val="000000"/>
-                                </a:solidFill>
-                                <a:latin typeface="Cambria Math" panose="02040503050406030204" pitchFamily="18" charset="0"/>
-                              </a:rPr>
-                            </m:ctrlPr>
-                          </m:sSubPr>
-                          <m:e>
-                            <m:r>
-                              <m:rPr>
-                                <m:sty m:val="p"/>
-                              </m:rPr>
-                              <a:rPr sz="2285" i="1">
-                                <a:solidFill>
-                                  <a:srgbClr val="000000"/>
-                                </a:solidFill>
-                                <a:latin typeface="Cambria Math" panose="02040503050406030204" pitchFamily="18" charset="0"/>
-                              </a:rPr>
-                              <m:t>log</m:t>
-                            </m:r>
-                          </m:e>
-                          <m:sub>
-                            <m:r>
-                              <a:rPr sz="2285" i="1">
-                                <a:solidFill>
-                                  <a:srgbClr val="000000"/>
-                                </a:solidFill>
-                                <a:latin typeface="Cambria Math" panose="02040503050406030204" pitchFamily="18" charset="0"/>
-                              </a:rPr>
-                              <m:t>2</m:t>
-                            </m:r>
-                          </m:sub>
-                        </m:sSub>
-                        <m:r>
-                          <a:rPr sz="2285" i="1">
-                            <a:solidFill>
-                              <a:srgbClr val="000000"/>
-                            </a:solidFill>
-                            <a:latin typeface="Cambria Math" panose="02040503050406030204" pitchFamily="18" charset="0"/>
-                          </a:rPr>
-                          <m:t>(</m:t>
-                        </m:r>
-                        <m:r>
-                          <a:rPr sz="2285" i="1">
-                            <a:solidFill>
-                              <a:srgbClr val="000000"/>
-                            </a:solidFill>
-                            <a:latin typeface="Cambria Math" panose="02040503050406030204" pitchFamily="18" charset="0"/>
-                          </a:rPr>
-                          <m:t>5</m:t>
-                        </m:r>
-                        <m:r>
-                          <a:rPr sz="2285" i="1">
-                            <a:solidFill>
-                              <a:srgbClr val="000000"/>
-                            </a:solidFill>
-                            <a:latin typeface="Cambria Math" panose="02040503050406030204" pitchFamily="18" charset="0"/>
-                          </a:rPr>
-                          <m:t>/</m:t>
-                        </m:r>
-                        <m:r>
-                          <a:rPr sz="2285" i="1">
-                            <a:solidFill>
-                              <a:srgbClr val="000000"/>
-                            </a:solidFill>
-                            <a:latin typeface="Cambria Math" panose="02040503050406030204" pitchFamily="18" charset="0"/>
-                          </a:rPr>
-                          <m:t>54</m:t>
-                        </m:r>
-                        <m:r>
-                          <a:rPr sz="2285" i="1">
-                            <a:solidFill>
-                              <a:srgbClr val="000000"/>
-                            </a:solidFill>
-                            <a:latin typeface="Cambria Math" panose="02040503050406030204" pitchFamily="18" charset="0"/>
-                          </a:rPr>
-                          <m:t>)</m:t>
-                        </m:r>
-                      </m:e>
-                    </m:d>
-                  </m:oMath>
-                </a14:m>
-                <a:br>
-                  <a:rPr dirty="0"/>
-                </a:br>
-                <a14:m>
-                  <m:oMath xmlns:m="http://schemas.openxmlformats.org/officeDocument/2006/math">
-                    <m:r>
-                      <a:rPr sz="2285" i="1">
-                        <a:solidFill>
-                          <a:srgbClr val="000000"/>
-                        </a:solidFill>
-                        <a:latin typeface="Cambria Math" panose="02040503050406030204" pitchFamily="18" charset="0"/>
-                      </a:rPr>
-                      <m:t>=</m:t>
-                    </m:r>
-                    <m:r>
-                      <a:rPr sz="2285" i="1">
-                        <a:solidFill>
-                          <a:srgbClr val="000000"/>
-                        </a:solidFill>
-                        <a:latin typeface="Cambria Math" panose="02040503050406030204" pitchFamily="18" charset="0"/>
-                      </a:rPr>
-                      <m:t>0</m:t>
-                    </m:r>
-                    <m:r>
-                      <a:rPr sz="2285" i="1">
-                        <a:solidFill>
-                          <a:srgbClr val="000000"/>
-                        </a:solidFill>
-                        <a:latin typeface="Cambria Math" panose="02040503050406030204" pitchFamily="18" charset="0"/>
-                      </a:rPr>
-                      <m:t>.</m:t>
-                    </m:r>
-                    <m:r>
-                      <a:rPr sz="2285" i="1">
-                        <a:solidFill>
-                          <a:srgbClr val="000000"/>
-                        </a:solidFill>
-                        <a:latin typeface="Cambria Math" panose="02040503050406030204" pitchFamily="18" charset="0"/>
-                      </a:rPr>
-                      <m:t>445</m:t>
-                    </m:r>
-                  </m:oMath>
-                </a14:m>
-                <a:endParaRPr dirty="0"/>
-              </a:p>
-              <a:p>
-                <a:r>
-                  <a:rPr dirty="0"/>
-                  <a:t>For the “purple” node</a:t>
-                </a:r>
-                <a:br>
-                  <a:rPr dirty="0"/>
-                </a:br>
-                <a14:m>
-                  <m:oMath xmlns:m="http://schemas.openxmlformats.org/officeDocument/2006/math">
-                    <m:sSub>
-                      <m:sSubPr>
-                        <m:ctrlPr>
-                          <a:rPr sz="2285" i="1">
-                            <a:solidFill>
-                              <a:srgbClr val="000000"/>
-                            </a:solidFill>
-                            <a:latin typeface="Cambria Math" panose="02040503050406030204" pitchFamily="18" charset="0"/>
-                          </a:rPr>
-                        </m:ctrlPr>
-                      </m:sSubPr>
-                      <m:e>
-                        <m:r>
-                          <a:rPr sz="2285" i="1">
-                            <a:solidFill>
-                              <a:srgbClr val="000000"/>
-                            </a:solidFill>
-                            <a:latin typeface="Cambria Math" panose="02040503050406030204" pitchFamily="18" charset="0"/>
-                          </a:rPr>
-                          <m:t>𝑝</m:t>
-                        </m:r>
-                      </m:e>
-                      <m:sub>
-                        <m:r>
-                          <a:rPr sz="2285" i="1">
-                            <a:solidFill>
-                              <a:srgbClr val="000000"/>
-                            </a:solidFill>
-                            <a:latin typeface="Cambria Math" panose="02040503050406030204" pitchFamily="18" charset="0"/>
-                          </a:rPr>
-                          <m:t>𝑖</m:t>
-                        </m:r>
-                        <m:r>
-                          <a:rPr sz="2285" i="1">
-                            <a:solidFill>
-                              <a:srgbClr val="000000"/>
-                            </a:solidFill>
-                            <a:latin typeface="Cambria Math" panose="02040503050406030204" pitchFamily="18" charset="0"/>
-                          </a:rPr>
-                          <m:t>1</m:t>
-                        </m:r>
-                      </m:sub>
-                    </m:sSub>
-                    <m:r>
-                      <a:rPr sz="2285" i="1">
-                        <a:solidFill>
-                          <a:srgbClr val="000000"/>
-                        </a:solidFill>
-                        <a:latin typeface="Cambria Math" panose="02040503050406030204" pitchFamily="18" charset="0"/>
-                      </a:rPr>
-                      <m:t>=(</m:t>
-                    </m:r>
-                    <m:r>
-                      <a:rPr sz="2285" i="1">
-                        <a:solidFill>
-                          <a:srgbClr val="000000"/>
-                        </a:solidFill>
-                        <a:latin typeface="Cambria Math" panose="02040503050406030204" pitchFamily="18" charset="0"/>
-                      </a:rPr>
-                      <m:t>0</m:t>
-                    </m:r>
-                    <m:r>
-                      <a:rPr sz="2285" i="1">
-                        <a:solidFill>
-                          <a:srgbClr val="000000"/>
-                        </a:solidFill>
-                        <a:latin typeface="Cambria Math" panose="02040503050406030204" pitchFamily="18" charset="0"/>
-                      </a:rPr>
-                      <m:t>/</m:t>
-                    </m:r>
-                    <m:r>
-                      <a:rPr sz="2285" i="1">
-                        <a:solidFill>
-                          <a:srgbClr val="000000"/>
-                        </a:solidFill>
-                        <a:latin typeface="Cambria Math" panose="02040503050406030204" pitchFamily="18" charset="0"/>
-                      </a:rPr>
-                      <m:t>46</m:t>
-                    </m:r>
-                    <m:r>
-                      <a:rPr sz="2285" i="1">
-                        <a:solidFill>
-                          <a:srgbClr val="000000"/>
-                        </a:solidFill>
-                        <a:latin typeface="Cambria Math" panose="02040503050406030204" pitchFamily="18" charset="0"/>
-                      </a:rPr>
-                      <m:t>);</m:t>
-                    </m:r>
-                    <m:r>
-                      <m:rPr>
-                        <m:nor/>
-                      </m:rPr>
-                      <a:rPr sz="2285" i="1">
-                        <a:solidFill>
-                          <a:srgbClr val="000000"/>
-                        </a:solidFill>
-                        <a:latin typeface="Cambria Math" panose="02040503050406030204" pitchFamily="18" charset="0"/>
-                      </a:rPr>
-                      <m:t> </m:t>
-                    </m:r>
-                    <m:sSub>
-                      <m:sSubPr>
-                        <m:ctrlPr>
-                          <a:rPr sz="2285" i="1">
-                            <a:solidFill>
-                              <a:srgbClr val="000000"/>
-                            </a:solidFill>
-                            <a:latin typeface="Cambria Math" panose="02040503050406030204" pitchFamily="18" charset="0"/>
-                          </a:rPr>
-                        </m:ctrlPr>
-                      </m:sSubPr>
-                      <m:e>
-                        <m:r>
-                          <a:rPr sz="2285" i="1">
-                            <a:solidFill>
-                              <a:srgbClr val="000000"/>
-                            </a:solidFill>
-                            <a:latin typeface="Cambria Math" panose="02040503050406030204" pitchFamily="18" charset="0"/>
-                          </a:rPr>
-                          <m:t>𝑝</m:t>
-                        </m:r>
-                      </m:e>
-                      <m:sub>
-                        <m:r>
-                          <a:rPr sz="2285" i="1">
-                            <a:solidFill>
-                              <a:srgbClr val="000000"/>
-                            </a:solidFill>
-                            <a:latin typeface="Cambria Math" panose="02040503050406030204" pitchFamily="18" charset="0"/>
-                          </a:rPr>
-                          <m:t>𝑖</m:t>
-                        </m:r>
-                        <m:r>
-                          <a:rPr sz="2285" i="1">
-                            <a:solidFill>
-                              <a:srgbClr val="000000"/>
-                            </a:solidFill>
-                            <a:latin typeface="Cambria Math" panose="02040503050406030204" pitchFamily="18" charset="0"/>
-                          </a:rPr>
-                          <m:t>2</m:t>
-                        </m:r>
-                      </m:sub>
-                    </m:sSub>
-                    <m:r>
-                      <a:rPr sz="2285" i="1">
-                        <a:solidFill>
-                          <a:srgbClr val="000000"/>
-                        </a:solidFill>
-                        <a:latin typeface="Cambria Math" panose="02040503050406030204" pitchFamily="18" charset="0"/>
-                      </a:rPr>
-                      <m:t>=(</m:t>
-                    </m:r>
-                    <m:r>
-                      <a:rPr sz="2285" i="1">
-                        <a:solidFill>
-                          <a:srgbClr val="000000"/>
-                        </a:solidFill>
-                        <a:latin typeface="Cambria Math" panose="02040503050406030204" pitchFamily="18" charset="0"/>
-                      </a:rPr>
-                      <m:t>1</m:t>
-                    </m:r>
-                    <m:r>
-                      <a:rPr sz="2285" i="1">
-                        <a:solidFill>
-                          <a:srgbClr val="000000"/>
-                        </a:solidFill>
-                        <a:latin typeface="Cambria Math" panose="02040503050406030204" pitchFamily="18" charset="0"/>
-                      </a:rPr>
-                      <m:t>/</m:t>
-                    </m:r>
-                    <m:r>
-                      <a:rPr sz="2285" i="1">
-                        <a:solidFill>
-                          <a:srgbClr val="000000"/>
-                        </a:solidFill>
-                        <a:latin typeface="Cambria Math" panose="02040503050406030204" pitchFamily="18" charset="0"/>
-                      </a:rPr>
-                      <m:t>46</m:t>
-                    </m:r>
-                    <m:r>
-                      <a:rPr sz="2285" i="1">
-                        <a:solidFill>
-                          <a:srgbClr val="000000"/>
-                        </a:solidFill>
-                        <a:latin typeface="Cambria Math" panose="02040503050406030204" pitchFamily="18" charset="0"/>
-                      </a:rPr>
-                      <m:t>);</m:t>
-                    </m:r>
-                    <m:r>
-                      <m:rPr>
-                        <m:nor/>
-                      </m:rPr>
-                      <a:rPr sz="2285" i="1">
-                        <a:solidFill>
-                          <a:srgbClr val="000000"/>
-                        </a:solidFill>
-                        <a:latin typeface="Cambria Math" panose="02040503050406030204" pitchFamily="18" charset="0"/>
-                      </a:rPr>
-                      <m:t> </m:t>
-                    </m:r>
-                    <m:sSub>
-                      <m:sSubPr>
-                        <m:ctrlPr>
-                          <a:rPr sz="2285" i="1">
-                            <a:solidFill>
-                              <a:srgbClr val="000000"/>
-                            </a:solidFill>
-                            <a:latin typeface="Cambria Math" panose="02040503050406030204" pitchFamily="18" charset="0"/>
-                          </a:rPr>
-                        </m:ctrlPr>
-                      </m:sSubPr>
-                      <m:e>
-                        <m:r>
-                          <a:rPr sz="2285" i="1">
-                            <a:solidFill>
-                              <a:srgbClr val="000000"/>
-                            </a:solidFill>
-                            <a:latin typeface="Cambria Math" panose="02040503050406030204" pitchFamily="18" charset="0"/>
-                          </a:rPr>
-                          <m:t>𝑝</m:t>
-                        </m:r>
-                      </m:e>
-                      <m:sub>
-                        <m:r>
-                          <a:rPr sz="2285" i="1">
-                            <a:solidFill>
-                              <a:srgbClr val="000000"/>
-                            </a:solidFill>
-                            <a:latin typeface="Cambria Math" panose="02040503050406030204" pitchFamily="18" charset="0"/>
-                          </a:rPr>
-                          <m:t>𝑖</m:t>
-                        </m:r>
-                        <m:r>
-                          <a:rPr sz="2285" i="1">
-                            <a:solidFill>
-                              <a:srgbClr val="000000"/>
-                            </a:solidFill>
-                            <a:latin typeface="Cambria Math" panose="02040503050406030204" pitchFamily="18" charset="0"/>
-                          </a:rPr>
-                          <m:t>3</m:t>
-                        </m:r>
-                      </m:sub>
-                    </m:sSub>
-                    <m:r>
-                      <a:rPr sz="2285" i="1">
-                        <a:solidFill>
-                          <a:srgbClr val="000000"/>
-                        </a:solidFill>
-                        <a:latin typeface="Cambria Math" panose="02040503050406030204" pitchFamily="18" charset="0"/>
-                      </a:rPr>
-                      <m:t>=(</m:t>
-                    </m:r>
-                    <m:r>
-                      <a:rPr sz="2285" i="1">
-                        <a:solidFill>
-                          <a:srgbClr val="000000"/>
-                        </a:solidFill>
-                        <a:latin typeface="Cambria Math" panose="02040503050406030204" pitchFamily="18" charset="0"/>
-                      </a:rPr>
-                      <m:t>45</m:t>
-                    </m:r>
-                    <m:r>
-                      <a:rPr sz="2285" i="1">
-                        <a:solidFill>
-                          <a:srgbClr val="000000"/>
-                        </a:solidFill>
-                        <a:latin typeface="Cambria Math" panose="02040503050406030204" pitchFamily="18" charset="0"/>
-                      </a:rPr>
-                      <m:t>/</m:t>
-                    </m:r>
-                    <m:r>
-                      <a:rPr sz="2285" i="1">
-                        <a:solidFill>
-                          <a:srgbClr val="000000"/>
-                        </a:solidFill>
-                        <a:latin typeface="Cambria Math" panose="02040503050406030204" pitchFamily="18" charset="0"/>
-                      </a:rPr>
-                      <m:t>46</m:t>
-                    </m:r>
-                    <m:r>
-                      <a:rPr sz="2285" i="1">
-                        <a:solidFill>
-                          <a:srgbClr val="000000"/>
-                        </a:solidFill>
-                        <a:latin typeface="Cambria Math" panose="02040503050406030204" pitchFamily="18" charset="0"/>
-                      </a:rPr>
-                      <m:t>)</m:t>
-                    </m:r>
-                  </m:oMath>
-                </a14:m>
-                <a:br>
-                  <a:rPr dirty="0"/>
-                </a:br>
-                <a:br>
-                  <a:rPr dirty="0"/>
-                </a:br>
-                <a14:m>
-                  <m:oMath xmlns:m="http://schemas.openxmlformats.org/officeDocument/2006/math">
-                    <m:sSub>
-                      <m:sSubPr>
-                        <m:ctrlPr>
-                          <a:rPr sz="2285" i="1">
-                            <a:solidFill>
-                              <a:srgbClr val="000000"/>
-                            </a:solidFill>
-                            <a:latin typeface="Cambria Math" panose="02040503050406030204" pitchFamily="18" charset="0"/>
-                          </a:rPr>
-                        </m:ctrlPr>
-                      </m:sSubPr>
-                      <m:e>
-                        <m:r>
-                          <a:rPr sz="2285" i="1">
-                            <a:solidFill>
-                              <a:srgbClr val="000000"/>
-                            </a:solidFill>
-                            <a:latin typeface="Cambria Math" panose="02040503050406030204" pitchFamily="18" charset="0"/>
-                          </a:rPr>
                           <m:t>𝐻</m:t>
                         </m:r>
                       </m:e>
@@ -14375,7 +14163,7 @@
             </p:txBody>
           </p:sp>
         </mc:Choice>
-        <mc:Fallback>
+        <mc:Fallback xmlns="">
           <p:sp>
             <p:nvSpPr>
               <p:cNvPr id="207" name="Entropy :…"/>

--- a/slides/11-decision-trees.pptx
+++ b/slides/11-decision-trees.pptx
@@ -225,7 +225,7 @@
           <a:p>
             <a:fld id="{A5320152-7289-42ED-97D3-BBB411F9F8C0}" type="datetimeFigureOut">
               <a:rPr lang="en-US" smtClean="0"/>
-              <a:t>2/24/2026</a:t>
+              <a:t>2/26/2026</a:t>
             </a:fld>
             <a:endParaRPr lang="en-US"/>
           </a:p>
@@ -645,7 +645,7 @@
           <a:p>
             <a:fld id="{D1D1EADE-8E88-4C7C-8AC5-FB148DE4940E}" type="datetime1">
               <a:rPr lang="en-US" smtClean="0"/>
-              <a:t>2/24/2026</a:t>
+              <a:t>2/26/2026</a:t>
             </a:fld>
             <a:endParaRPr lang="en-US"/>
           </a:p>
@@ -845,7 +845,7 @@
           <a:p>
             <a:fld id="{EC3C8B9C-477D-492A-96AD-1FC2CC997A73}" type="datetime1">
               <a:rPr lang="en-US" smtClean="0"/>
-              <a:t>2/24/2026</a:t>
+              <a:t>2/26/2026</a:t>
             </a:fld>
             <a:endParaRPr lang="en-US"/>
           </a:p>
@@ -1055,7 +1055,7 @@
           <a:p>
             <a:fld id="{42D3AED5-E26D-4E29-B1B3-7847B6779594}" type="datetime1">
               <a:rPr lang="en-US" smtClean="0"/>
-              <a:t>2/24/2026</a:t>
+              <a:t>2/26/2026</a:t>
             </a:fld>
             <a:endParaRPr lang="en-US"/>
           </a:p>
@@ -1378,7 +1378,7 @@
           <a:p>
             <a:fld id="{157B6794-849E-4626-908B-D15793550EFB}" type="datetime1">
               <a:rPr lang="en-US" smtClean="0"/>
-              <a:t>2/24/2026</a:t>
+              <a:t>2/26/2026</a:t>
             </a:fld>
             <a:endParaRPr lang="en-US"/>
           </a:p>
@@ -1654,7 +1654,7 @@
           <a:p>
             <a:fld id="{63DB64E7-5594-42A3-ADBF-E95A7ACEAD64}" type="datetime1">
               <a:rPr lang="en-US" smtClean="0"/>
-              <a:t>2/24/2026</a:t>
+              <a:t>2/26/2026</a:t>
             </a:fld>
             <a:endParaRPr lang="en-US"/>
           </a:p>
@@ -1927,7 +1927,7 @@
           <a:p>
             <a:fld id="{18462B0B-D248-4FFB-8695-AD7FA4B1284A}" type="datetime1">
               <a:rPr lang="en-US" smtClean="0"/>
-              <a:t>2/24/2026</a:t>
+              <a:t>2/26/2026</a:t>
             </a:fld>
             <a:endParaRPr lang="en-US"/>
           </a:p>
@@ -2350,7 +2350,7 @@
           <a:p>
             <a:fld id="{D0378EFB-9159-4510-B73F-4F0409ADE937}" type="datetime1">
               <a:rPr lang="en-US" smtClean="0"/>
-              <a:t>2/24/2026</a:t>
+              <a:t>2/26/2026</a:t>
             </a:fld>
             <a:endParaRPr lang="en-US"/>
           </a:p>
@@ -2492,7 +2492,7 @@
           <a:p>
             <a:fld id="{89BC9412-2452-4BED-A324-9D8C115361AD}" type="datetime1">
               <a:rPr lang="en-US" smtClean="0"/>
-              <a:t>2/24/2026</a:t>
+              <a:t>2/26/2026</a:t>
             </a:fld>
             <a:endParaRPr lang="en-US"/>
           </a:p>
@@ -2605,7 +2605,7 @@
           <a:p>
             <a:fld id="{F5318F62-D251-40E8-A23C-F4CFE9FEAB41}" type="datetime1">
               <a:rPr lang="en-US" smtClean="0"/>
-              <a:t>2/24/2026</a:t>
+              <a:t>2/26/2026</a:t>
             </a:fld>
             <a:endParaRPr lang="en-US"/>
           </a:p>
@@ -2918,7 +2918,7 @@
           <a:p>
             <a:fld id="{44F76144-149E-4874-93A5-554A0357CF82}" type="datetime1">
               <a:rPr lang="en-US" smtClean="0"/>
-              <a:t>2/24/2026</a:t>
+              <a:t>2/26/2026</a:t>
             </a:fld>
             <a:endParaRPr lang="en-US"/>
           </a:p>
@@ -3211,7 +3211,7 @@
           <a:p>
             <a:fld id="{50BA65D8-0540-4835-AE5C-25D29DBA01BE}" type="datetime1">
               <a:rPr lang="en-US" smtClean="0"/>
-              <a:t>2/24/2026</a:t>
+              <a:t>2/26/2026</a:t>
             </a:fld>
             <a:endParaRPr lang="en-US"/>
           </a:p>
@@ -3453,7 +3453,7 @@
           <a:p>
             <a:fld id="{E31BA835-12AC-4E8F-955A-EA3F4DE2791F}" type="datetime1">
               <a:rPr lang="en-US" smtClean="0"/>
-              <a:t>2/24/2026</a:t>
+              <a:t>2/26/2026</a:t>
             </a:fld>
             <a:endParaRPr lang="en-US"/>
           </a:p>
@@ -5466,7 +5466,7 @@
           </a:ln>
           <a:extLst>
             <a:ext uri="{C572A759-6A51-4108-AA02-DFA0A04FC94B}">
-              <ma14:wrappingTextBoxFlag xmlns:ma14="http://schemas.microsoft.com/office/mac/drawingml/2011/main" xmlns:a14="http://schemas.microsoft.com/office/drawing/2010/main" xmlns:m="http://schemas.openxmlformats.org/officeDocument/2006/math" xmlns="" val="1"/>
+              <ma14:wrappingTextBoxFlag xmlns="" xmlns:m="http://schemas.openxmlformats.org/officeDocument/2006/math" xmlns:a14="http://schemas.microsoft.com/office/drawing/2010/main" xmlns:ma14="http://schemas.microsoft.com/office/mac/drawingml/2011/main" val="1"/>
             </a:ext>
           </a:extLst>
         </p:spPr>
@@ -5559,7 +5559,7 @@
           </a:ln>
           <a:extLst>
             <a:ext uri="{C572A759-6A51-4108-AA02-DFA0A04FC94B}">
-              <ma14:wrappingTextBoxFlag xmlns:ma14="http://schemas.microsoft.com/office/mac/drawingml/2011/main" xmlns:a14="http://schemas.microsoft.com/office/drawing/2010/main" xmlns:m="http://schemas.openxmlformats.org/officeDocument/2006/math" xmlns="" val="1"/>
+              <ma14:wrappingTextBoxFlag xmlns="" xmlns:m="http://schemas.openxmlformats.org/officeDocument/2006/math" xmlns:a14="http://schemas.microsoft.com/office/drawing/2010/main" xmlns:ma14="http://schemas.microsoft.com/office/mac/drawingml/2011/main" val="1"/>
             </a:ext>
           </a:extLst>
         </p:spPr>
@@ -5864,7 +5864,7 @@
           </a:ln>
           <a:extLst>
             <a:ext uri="{C572A759-6A51-4108-AA02-DFA0A04FC94B}">
-              <ma14:wrappingTextBoxFlag xmlns:ma14="http://schemas.microsoft.com/office/mac/drawingml/2011/main" xmlns:a14="http://schemas.microsoft.com/office/drawing/2010/main" xmlns:m="http://schemas.openxmlformats.org/officeDocument/2006/math" xmlns="" val="1"/>
+              <ma14:wrappingTextBoxFlag xmlns="" xmlns:m="http://schemas.openxmlformats.org/officeDocument/2006/math" xmlns:a14="http://schemas.microsoft.com/office/drawing/2010/main" xmlns:ma14="http://schemas.microsoft.com/office/mac/drawingml/2011/main" val="1"/>
             </a:ext>
           </a:extLst>
         </p:spPr>
@@ -6924,7 +6924,7 @@
                             </p:stCondLst>
                             <p:childTnLst>
                               <p:par>
-                                <p:cTn id="5" presetID="10" presetClass="entr" presetSubtype="0" fill="hold" nodeType="clickEffect">
+                                <p:cTn id="5" presetID="1" presetClass="entr" presetSubtype="0" fill="hold" nodeType="clickEffect">
                                   <p:stCondLst>
                                     <p:cond delay="0"/>
                                   </p:stCondLst>
@@ -6951,18 +6951,6 @@
                                         <p:strVal val="visible"/>
                                       </p:to>
                                     </p:set>
-                                    <p:animEffect transition="in" filter="fade">
-                                      <p:cBhvr>
-                                        <p:cTn id="7" dur="500"/>
-                                        <p:tgtEl>
-                                          <p:spTgt spid="2">
-                                            <p:txEl>
-                                              <p:pRg st="2" end="2"/>
-                                            </p:txEl>
-                                          </p:spTgt>
-                                        </p:tgtEl>
-                                      </p:cBhvr>
-                                    </p:animEffect>
                                   </p:childTnLst>
                                 </p:cTn>
                               </p:par>
@@ -6973,26 +6961,26 @@
                     </p:cTn>
                   </p:par>
                   <p:par>
-                    <p:cTn id="8" fill="hold">
+                    <p:cTn id="7" fill="hold">
                       <p:stCondLst>
                         <p:cond delay="indefinite"/>
                       </p:stCondLst>
                       <p:childTnLst>
                         <p:par>
-                          <p:cTn id="9" fill="hold">
+                          <p:cTn id="8" fill="hold">
                             <p:stCondLst>
                               <p:cond delay="0"/>
                             </p:stCondLst>
                             <p:childTnLst>
                               <p:par>
-                                <p:cTn id="10" presetID="1" presetClass="entr" presetSubtype="0" fill="hold" nodeType="clickEffect">
+                                <p:cTn id="9" presetID="1" presetClass="entr" presetSubtype="0" fill="hold" nodeType="clickEffect">
                                   <p:stCondLst>
                                     <p:cond delay="0"/>
                                   </p:stCondLst>
                                   <p:childTnLst>
                                     <p:set>
                                       <p:cBhvr>
-                                        <p:cTn id="11" dur="1" fill="hold">
+                                        <p:cTn id="10" dur="1" fill="hold">
                                           <p:stCondLst>
                                             <p:cond delay="0"/>
                                           </p:stCondLst>
@@ -7022,26 +7010,26 @@
                     </p:cTn>
                   </p:par>
                   <p:par>
-                    <p:cTn id="12" fill="hold">
+                    <p:cTn id="11" fill="hold">
                       <p:stCondLst>
                         <p:cond delay="indefinite"/>
                       </p:stCondLst>
                       <p:childTnLst>
                         <p:par>
-                          <p:cTn id="13" fill="hold">
+                          <p:cTn id="12" fill="hold">
                             <p:stCondLst>
                               <p:cond delay="0"/>
                             </p:stCondLst>
                             <p:childTnLst>
                               <p:par>
-                                <p:cTn id="14" presetID="1" presetClass="entr" presetSubtype="0" fill="hold" nodeType="clickEffect">
+                                <p:cTn id="13" presetID="1" presetClass="entr" presetSubtype="0" fill="hold" nodeType="clickEffect">
                                   <p:stCondLst>
                                     <p:cond delay="0"/>
                                   </p:stCondLst>
                                   <p:childTnLst>
                                     <p:set>
                                       <p:cBhvr>
-                                        <p:cTn id="15" dur="1" fill="hold">
+                                        <p:cTn id="14" dur="1" fill="hold">
                                           <p:stCondLst>
                                             <p:cond delay="0"/>
                                           </p:stCondLst>
@@ -7071,26 +7059,26 @@
                     </p:cTn>
                   </p:par>
                   <p:par>
-                    <p:cTn id="16" fill="hold">
+                    <p:cTn id="15" fill="hold">
                       <p:stCondLst>
                         <p:cond delay="indefinite"/>
                       </p:stCondLst>
                       <p:childTnLst>
                         <p:par>
-                          <p:cTn id="17" fill="hold">
+                          <p:cTn id="16" fill="hold">
                             <p:stCondLst>
                               <p:cond delay="0"/>
                             </p:stCondLst>
                             <p:childTnLst>
                               <p:par>
-                                <p:cTn id="18" presetID="1" presetClass="entr" presetSubtype="0" fill="hold" nodeType="clickEffect">
+                                <p:cTn id="17" presetID="1" presetClass="entr" presetSubtype="0" fill="hold" nodeType="clickEffect">
                                   <p:stCondLst>
                                     <p:cond delay="0"/>
                                   </p:stCondLst>
                                   <p:childTnLst>
                                     <p:set>
                                       <p:cBhvr>
-                                        <p:cTn id="19" dur="1" fill="hold">
+                                        <p:cTn id="18" dur="1" fill="hold">
                                           <p:stCondLst>
                                             <p:cond delay="0"/>
                                           </p:stCondLst>
@@ -11109,7 +11097,7 @@
               </a:ln>
               <a:extLst>
                 <a:ext uri="{C572A759-6A51-4108-AA02-DFA0A04FC94B}">
-                  <ma14:wrappingTextBoxFlag xmlns:ma14="http://schemas.microsoft.com/office/mac/drawingml/2011/main" xmlns:m="http://schemas.openxmlformats.org/officeDocument/2006/math" xmlns="" val="1"/>
+                  <ma14:wrappingTextBoxFlag xmlns="" xmlns:m="http://schemas.openxmlformats.org/officeDocument/2006/math" xmlns:ma14="http://schemas.microsoft.com/office/mac/drawingml/2011/main" val="1"/>
                 </a:ext>
               </a:extLst>
             </p:spPr>
@@ -11229,7 +11217,7 @@
           </a:ln>
           <a:extLst>
             <a:ext uri="{C572A759-6A51-4108-AA02-DFA0A04FC94B}">
-              <ma14:wrappingTextBoxFlag xmlns:ma14="http://schemas.microsoft.com/office/mac/drawingml/2011/main" xmlns:a14="http://schemas.microsoft.com/office/drawing/2010/main" xmlns:m="http://schemas.openxmlformats.org/officeDocument/2006/math" xmlns="" val="1"/>
+              <ma14:wrappingTextBoxFlag xmlns="" xmlns:m="http://schemas.openxmlformats.org/officeDocument/2006/math" xmlns:a14="http://schemas.microsoft.com/office/drawing/2010/main" xmlns:ma14="http://schemas.microsoft.com/office/mac/drawingml/2011/main" val="1"/>
             </a:ext>
           </a:extLst>
         </p:spPr>
@@ -11279,7 +11267,7 @@
           </a:ln>
           <a:extLst>
             <a:ext uri="{C572A759-6A51-4108-AA02-DFA0A04FC94B}">
-              <ma14:wrappingTextBoxFlag xmlns:ma14="http://schemas.microsoft.com/office/mac/drawingml/2011/main" xmlns:a14="http://schemas.microsoft.com/office/drawing/2010/main" xmlns:m="http://schemas.openxmlformats.org/officeDocument/2006/math" xmlns="" val="1"/>
+              <ma14:wrappingTextBoxFlag xmlns="" xmlns:m="http://schemas.openxmlformats.org/officeDocument/2006/math" xmlns:a14="http://schemas.microsoft.com/office/drawing/2010/main" xmlns:ma14="http://schemas.microsoft.com/office/mac/drawingml/2011/main" val="1"/>
             </a:ext>
           </a:extLst>
         </p:spPr>
@@ -11434,7 +11422,25 @@
                         </a:solidFill>
                         <a:latin typeface="Cambria Math" panose="02040503050406030204" pitchFamily="18" charset="0"/>
                       </a:rPr>
-                      <m:t>=1−</m:t>
+                      <m:t>=</m:t>
+                    </m:r>
+                    <m:r>
+                      <a:rPr sz="2285" i="1">
+                        <a:solidFill>
+                          <a:srgbClr val="000000"/>
+                        </a:solidFill>
+                        <a:latin typeface="Cambria Math" panose="02040503050406030204" pitchFamily="18" charset="0"/>
+                      </a:rPr>
+                      <m:t>1</m:t>
+                    </m:r>
+                    <m:r>
+                      <a:rPr sz="2285" i="1">
+                        <a:solidFill>
+                          <a:srgbClr val="000000"/>
+                        </a:solidFill>
+                        <a:latin typeface="Cambria Math" panose="02040503050406030204" pitchFamily="18" charset="0"/>
+                      </a:rPr>
+                      <m:t>−</m:t>
                     </m:r>
                     <m:limUpp>
                       <m:limUppPr>
@@ -11487,7 +11493,16 @@
                                 </a:solidFill>
                                 <a:latin typeface="Cambria Math" panose="02040503050406030204" pitchFamily="18" charset="0"/>
                               </a:rPr>
-                              <m:t>=1</m:t>
+                              <m:t>=</m:t>
+                            </m:r>
+                            <m:r>
+                              <a:rPr sz="2285" i="1">
+                                <a:solidFill>
+                                  <a:srgbClr val="000000"/>
+                                </a:solidFill>
+                                <a:latin typeface="Cambria Math" panose="02040503050406030204" pitchFamily="18" charset="0"/>
+                              </a:rPr>
+                              <m:t>1</m:t>
                             </m:r>
                           </m:lim>
                         </m:limLow>
@@ -11616,7 +11631,43 @@
                         </a:solidFill>
                         <a:latin typeface="Cambria Math" panose="02040503050406030204" pitchFamily="18" charset="0"/>
                       </a:rPr>
-                      <m:t>=(0/54);</m:t>
+                      <m:t>=(</m:t>
+                    </m:r>
+                    <m:r>
+                      <a:rPr sz="2285" i="1">
+                        <a:solidFill>
+                          <a:srgbClr val="000000"/>
+                        </a:solidFill>
+                        <a:latin typeface="Cambria Math" panose="02040503050406030204" pitchFamily="18" charset="0"/>
+                      </a:rPr>
+                      <m:t>0</m:t>
+                    </m:r>
+                    <m:r>
+                      <a:rPr sz="2285" i="1">
+                        <a:solidFill>
+                          <a:srgbClr val="000000"/>
+                        </a:solidFill>
+                        <a:latin typeface="Cambria Math" panose="02040503050406030204" pitchFamily="18" charset="0"/>
+                      </a:rPr>
+                      <m:t>/</m:t>
+                    </m:r>
+                    <m:r>
+                      <a:rPr sz="2285" i="1">
+                        <a:solidFill>
+                          <a:srgbClr val="000000"/>
+                        </a:solidFill>
+                        <a:latin typeface="Cambria Math" panose="02040503050406030204" pitchFamily="18" charset="0"/>
+                      </a:rPr>
+                      <m:t>54</m:t>
+                    </m:r>
+                    <m:r>
+                      <a:rPr sz="2285" i="1">
+                        <a:solidFill>
+                          <a:srgbClr val="000000"/>
+                        </a:solidFill>
+                        <a:latin typeface="Cambria Math" panose="02040503050406030204" pitchFamily="18" charset="0"/>
+                      </a:rPr>
+                      <m:t>);</m:t>
                     </m:r>
                     <m:r>
                       <m:rPr>
@@ -11680,7 +11731,43 @@
                         </a:solidFill>
                         <a:latin typeface="Cambria Math" panose="02040503050406030204" pitchFamily="18" charset="0"/>
                       </a:rPr>
-                      <m:t>=(49/54);</m:t>
+                      <m:t>=(</m:t>
+                    </m:r>
+                    <m:r>
+                      <a:rPr sz="2285" i="1">
+                        <a:solidFill>
+                          <a:srgbClr val="000000"/>
+                        </a:solidFill>
+                        <a:latin typeface="Cambria Math" panose="02040503050406030204" pitchFamily="18" charset="0"/>
+                      </a:rPr>
+                      <m:t>49</m:t>
+                    </m:r>
+                    <m:r>
+                      <a:rPr sz="2285" i="1">
+                        <a:solidFill>
+                          <a:srgbClr val="000000"/>
+                        </a:solidFill>
+                        <a:latin typeface="Cambria Math" panose="02040503050406030204" pitchFamily="18" charset="0"/>
+                      </a:rPr>
+                      <m:t>/</m:t>
+                    </m:r>
+                    <m:r>
+                      <a:rPr sz="2285" i="1">
+                        <a:solidFill>
+                          <a:srgbClr val="000000"/>
+                        </a:solidFill>
+                        <a:latin typeface="Cambria Math" panose="02040503050406030204" pitchFamily="18" charset="0"/>
+                      </a:rPr>
+                      <m:t>54</m:t>
+                    </m:r>
+                    <m:r>
+                      <a:rPr sz="2285" i="1">
+                        <a:solidFill>
+                          <a:srgbClr val="000000"/>
+                        </a:solidFill>
+                        <a:latin typeface="Cambria Math" panose="02040503050406030204" pitchFamily="18" charset="0"/>
+                      </a:rPr>
+                      <m:t>);</m:t>
                     </m:r>
                     <m:r>
                       <m:rPr>
@@ -11744,7 +11831,43 @@
                         </a:solidFill>
                         <a:latin typeface="Cambria Math" panose="02040503050406030204" pitchFamily="18" charset="0"/>
                       </a:rPr>
-                      <m:t>=(5/54)</m:t>
+                      <m:t>=(</m:t>
+                    </m:r>
+                    <m:r>
+                      <a:rPr sz="2285" i="1">
+                        <a:solidFill>
+                          <a:srgbClr val="000000"/>
+                        </a:solidFill>
+                        <a:latin typeface="Cambria Math" panose="02040503050406030204" pitchFamily="18" charset="0"/>
+                      </a:rPr>
+                      <m:t>5</m:t>
+                    </m:r>
+                    <m:r>
+                      <a:rPr sz="2285" i="1">
+                        <a:solidFill>
+                          <a:srgbClr val="000000"/>
+                        </a:solidFill>
+                        <a:latin typeface="Cambria Math" panose="02040503050406030204" pitchFamily="18" charset="0"/>
+                      </a:rPr>
+                      <m:t>/</m:t>
+                    </m:r>
+                    <m:r>
+                      <a:rPr sz="2285" i="1">
+                        <a:solidFill>
+                          <a:srgbClr val="000000"/>
+                        </a:solidFill>
+                        <a:latin typeface="Cambria Math" panose="02040503050406030204" pitchFamily="18" charset="0"/>
+                      </a:rPr>
+                      <m:t>54</m:t>
+                    </m:r>
+                    <m:r>
+                      <a:rPr sz="2285" i="1">
+                        <a:solidFill>
+                          <a:srgbClr val="000000"/>
+                        </a:solidFill>
+                        <a:latin typeface="Cambria Math" panose="02040503050406030204" pitchFamily="18" charset="0"/>
+                      </a:rPr>
+                      <m:t>)</m:t>
                     </m:r>
                   </m:oMath>
                 </a14:m>
@@ -11797,7 +11920,25 @@
                         </a:solidFill>
                         <a:latin typeface="Cambria Math" panose="02040503050406030204" pitchFamily="18" charset="0"/>
                       </a:rPr>
-                      <m:t>=1−</m:t>
+                      <m:t>=</m:t>
+                    </m:r>
+                    <m:r>
+                      <a:rPr sz="2285" i="1">
+                        <a:solidFill>
+                          <a:srgbClr val="000000"/>
+                        </a:solidFill>
+                        <a:latin typeface="Cambria Math" panose="02040503050406030204" pitchFamily="18" charset="0"/>
+                      </a:rPr>
+                      <m:t>1</m:t>
+                    </m:r>
+                    <m:r>
+                      <a:rPr sz="2285" i="1">
+                        <a:solidFill>
+                          <a:srgbClr val="000000"/>
+                        </a:solidFill>
+                        <a:latin typeface="Cambria Math" panose="02040503050406030204" pitchFamily="18" charset="0"/>
+                      </a:rPr>
+                      <m:t>−</m:t>
                     </m:r>
                     <m:d>
                       <m:dPr>
@@ -11818,7 +11959,34 @@
                             </a:solidFill>
                             <a:latin typeface="Cambria Math" panose="02040503050406030204" pitchFamily="18" charset="0"/>
                           </a:rPr>
-                          <m:t>(0/54</m:t>
+                          <m:t>(</m:t>
+                        </m:r>
+                        <m:r>
+                          <a:rPr sz="2285" i="1">
+                            <a:solidFill>
+                              <a:srgbClr val="000000"/>
+                            </a:solidFill>
+                            <a:latin typeface="Cambria Math" panose="02040503050406030204" pitchFamily="18" charset="0"/>
+                          </a:rPr>
+                          <m:t>0</m:t>
+                        </m:r>
+                        <m:r>
+                          <a:rPr sz="2285" i="1">
+                            <a:solidFill>
+                              <a:srgbClr val="000000"/>
+                            </a:solidFill>
+                            <a:latin typeface="Cambria Math" panose="02040503050406030204" pitchFamily="18" charset="0"/>
+                          </a:rPr>
+                          <m:t>/</m:t>
+                        </m:r>
+                        <m:r>
+                          <a:rPr sz="2285" i="1">
+                            <a:solidFill>
+                              <a:srgbClr val="000000"/>
+                            </a:solidFill>
+                            <a:latin typeface="Cambria Math" panose="02040503050406030204" pitchFamily="18" charset="0"/>
+                          </a:rPr>
+                          <m:t>54</m:t>
                         </m:r>
                         <m:sSup>
                           <m:sSupPr>
@@ -11861,7 +12029,34 @@
                             </a:solidFill>
                             <a:latin typeface="Cambria Math" panose="02040503050406030204" pitchFamily="18" charset="0"/>
                           </a:rPr>
-                          <m:t>+(49/54</m:t>
+                          <m:t>+(</m:t>
+                        </m:r>
+                        <m:r>
+                          <a:rPr sz="2285" i="1">
+                            <a:solidFill>
+                              <a:srgbClr val="000000"/>
+                            </a:solidFill>
+                            <a:latin typeface="Cambria Math" panose="02040503050406030204" pitchFamily="18" charset="0"/>
+                          </a:rPr>
+                          <m:t>49</m:t>
+                        </m:r>
+                        <m:r>
+                          <a:rPr sz="2285" i="1">
+                            <a:solidFill>
+                              <a:srgbClr val="000000"/>
+                            </a:solidFill>
+                            <a:latin typeface="Cambria Math" panose="02040503050406030204" pitchFamily="18" charset="0"/>
+                          </a:rPr>
+                          <m:t>/</m:t>
+                        </m:r>
+                        <m:r>
+                          <a:rPr sz="2285" i="1">
+                            <a:solidFill>
+                              <a:srgbClr val="000000"/>
+                            </a:solidFill>
+                            <a:latin typeface="Cambria Math" panose="02040503050406030204" pitchFamily="18" charset="0"/>
+                          </a:rPr>
+                          <m:t>54</m:t>
                         </m:r>
                         <m:sSup>
                           <m:sSupPr>
@@ -11904,7 +12099,34 @@
                             </a:solidFill>
                             <a:latin typeface="Cambria Math" panose="02040503050406030204" pitchFamily="18" charset="0"/>
                           </a:rPr>
-                          <m:t>+(5/54</m:t>
+                          <m:t>+(</m:t>
+                        </m:r>
+                        <m:r>
+                          <a:rPr sz="2285" i="1">
+                            <a:solidFill>
+                              <a:srgbClr val="000000"/>
+                            </a:solidFill>
+                            <a:latin typeface="Cambria Math" panose="02040503050406030204" pitchFamily="18" charset="0"/>
+                          </a:rPr>
+                          <m:t>5</m:t>
+                        </m:r>
+                        <m:r>
+                          <a:rPr sz="2285" i="1">
+                            <a:solidFill>
+                              <a:srgbClr val="000000"/>
+                            </a:solidFill>
+                            <a:latin typeface="Cambria Math" panose="02040503050406030204" pitchFamily="18" charset="0"/>
+                          </a:rPr>
+                          <m:t>/</m:t>
+                        </m:r>
+                        <m:r>
+                          <a:rPr sz="2285" i="1">
+                            <a:solidFill>
+                              <a:srgbClr val="000000"/>
+                            </a:solidFill>
+                            <a:latin typeface="Cambria Math" panose="02040503050406030204" pitchFamily="18" charset="0"/>
+                          </a:rPr>
+                          <m:t>54</m:t>
                         </m:r>
                         <m:sSup>
                           <m:sSupPr>
@@ -11956,7 +12178,34 @@
                         </a:solidFill>
                         <a:latin typeface="Cambria Math" panose="02040503050406030204" pitchFamily="18" charset="0"/>
                       </a:rPr>
-                      <m:t>=0.168</m:t>
+                      <m:t>=</m:t>
+                    </m:r>
+                    <m:r>
+                      <a:rPr sz="2285" i="1">
+                        <a:solidFill>
+                          <a:srgbClr val="000000"/>
+                        </a:solidFill>
+                        <a:latin typeface="Cambria Math" panose="02040503050406030204" pitchFamily="18" charset="0"/>
+                      </a:rPr>
+                      <m:t>0</m:t>
+                    </m:r>
+                    <m:r>
+                      <a:rPr sz="2285" i="1">
+                        <a:solidFill>
+                          <a:srgbClr val="000000"/>
+                        </a:solidFill>
+                        <a:latin typeface="Cambria Math" panose="02040503050406030204" pitchFamily="18" charset="0"/>
+                      </a:rPr>
+                      <m:t>.</m:t>
+                    </m:r>
+                    <m:r>
+                      <a:rPr sz="2285" i="1">
+                        <a:solidFill>
+                          <a:srgbClr val="000000"/>
+                        </a:solidFill>
+                        <a:latin typeface="Cambria Math" panose="02040503050406030204" pitchFamily="18" charset="0"/>
+                      </a:rPr>
+                      <m:t>168</m:t>
                     </m:r>
                   </m:oMath>
                 </a14:m>
@@ -12022,7 +12271,43 @@
                         </a:solidFill>
                         <a:latin typeface="Cambria Math" panose="02040503050406030204" pitchFamily="18" charset="0"/>
                       </a:rPr>
-                      <m:t>=(0/46);</m:t>
+                      <m:t>=(</m:t>
+                    </m:r>
+                    <m:r>
+                      <a:rPr sz="2285" i="1">
+                        <a:solidFill>
+                          <a:srgbClr val="000000"/>
+                        </a:solidFill>
+                        <a:latin typeface="Cambria Math" panose="02040503050406030204" pitchFamily="18" charset="0"/>
+                      </a:rPr>
+                      <m:t>0</m:t>
+                    </m:r>
+                    <m:r>
+                      <a:rPr sz="2285" i="1">
+                        <a:solidFill>
+                          <a:srgbClr val="000000"/>
+                        </a:solidFill>
+                        <a:latin typeface="Cambria Math" panose="02040503050406030204" pitchFamily="18" charset="0"/>
+                      </a:rPr>
+                      <m:t>/</m:t>
+                    </m:r>
+                    <m:r>
+                      <a:rPr sz="2285" i="1">
+                        <a:solidFill>
+                          <a:srgbClr val="000000"/>
+                        </a:solidFill>
+                        <a:latin typeface="Cambria Math" panose="02040503050406030204" pitchFamily="18" charset="0"/>
+                      </a:rPr>
+                      <m:t>46</m:t>
+                    </m:r>
+                    <m:r>
+                      <a:rPr sz="2285" i="1">
+                        <a:solidFill>
+                          <a:srgbClr val="000000"/>
+                        </a:solidFill>
+                        <a:latin typeface="Cambria Math" panose="02040503050406030204" pitchFamily="18" charset="0"/>
+                      </a:rPr>
+                      <m:t>);</m:t>
                     </m:r>
                     <m:r>
                       <m:rPr>
@@ -12086,7 +12371,43 @@
                         </a:solidFill>
                         <a:latin typeface="Cambria Math" panose="02040503050406030204" pitchFamily="18" charset="0"/>
                       </a:rPr>
-                      <m:t>=(1/46);</m:t>
+                      <m:t>=(</m:t>
+                    </m:r>
+                    <m:r>
+                      <a:rPr sz="2285" i="1">
+                        <a:solidFill>
+                          <a:srgbClr val="000000"/>
+                        </a:solidFill>
+                        <a:latin typeface="Cambria Math" panose="02040503050406030204" pitchFamily="18" charset="0"/>
+                      </a:rPr>
+                      <m:t>1</m:t>
+                    </m:r>
+                    <m:r>
+                      <a:rPr sz="2285" i="1">
+                        <a:solidFill>
+                          <a:srgbClr val="000000"/>
+                        </a:solidFill>
+                        <a:latin typeface="Cambria Math" panose="02040503050406030204" pitchFamily="18" charset="0"/>
+                      </a:rPr>
+                      <m:t>/</m:t>
+                    </m:r>
+                    <m:r>
+                      <a:rPr sz="2285" i="1">
+                        <a:solidFill>
+                          <a:srgbClr val="000000"/>
+                        </a:solidFill>
+                        <a:latin typeface="Cambria Math" panose="02040503050406030204" pitchFamily="18" charset="0"/>
+                      </a:rPr>
+                      <m:t>46</m:t>
+                    </m:r>
+                    <m:r>
+                      <a:rPr sz="2285" i="1">
+                        <a:solidFill>
+                          <a:srgbClr val="000000"/>
+                        </a:solidFill>
+                        <a:latin typeface="Cambria Math" panose="02040503050406030204" pitchFamily="18" charset="0"/>
+                      </a:rPr>
+                      <m:t>);</m:t>
                     </m:r>
                     <m:r>
                       <m:rPr>
@@ -12150,7 +12471,43 @@
                         </a:solidFill>
                         <a:latin typeface="Cambria Math" panose="02040503050406030204" pitchFamily="18" charset="0"/>
                       </a:rPr>
-                      <m:t>=(45/46)</m:t>
+                      <m:t>=(</m:t>
+                    </m:r>
+                    <m:r>
+                      <a:rPr sz="2285" i="1">
+                        <a:solidFill>
+                          <a:srgbClr val="000000"/>
+                        </a:solidFill>
+                        <a:latin typeface="Cambria Math" panose="02040503050406030204" pitchFamily="18" charset="0"/>
+                      </a:rPr>
+                      <m:t>45</m:t>
+                    </m:r>
+                    <m:r>
+                      <a:rPr sz="2285" i="1">
+                        <a:solidFill>
+                          <a:srgbClr val="000000"/>
+                        </a:solidFill>
+                        <a:latin typeface="Cambria Math" panose="02040503050406030204" pitchFamily="18" charset="0"/>
+                      </a:rPr>
+                      <m:t>/</m:t>
+                    </m:r>
+                    <m:r>
+                      <a:rPr sz="2285" i="1">
+                        <a:solidFill>
+                          <a:srgbClr val="000000"/>
+                        </a:solidFill>
+                        <a:latin typeface="Cambria Math" panose="02040503050406030204" pitchFamily="18" charset="0"/>
+                      </a:rPr>
+                      <m:t>46</m:t>
+                    </m:r>
+                    <m:r>
+                      <a:rPr sz="2285" i="1">
+                        <a:solidFill>
+                          <a:srgbClr val="000000"/>
+                        </a:solidFill>
+                        <a:latin typeface="Cambria Math" panose="02040503050406030204" pitchFamily="18" charset="0"/>
+                      </a:rPr>
+                      <m:t>)</m:t>
                     </m:r>
                   </m:oMath>
                 </a14:m>
@@ -12203,7 +12560,25 @@
                         </a:solidFill>
                         <a:latin typeface="Cambria Math" panose="02040503050406030204" pitchFamily="18" charset="0"/>
                       </a:rPr>
-                      <m:t>=1−</m:t>
+                      <m:t>=</m:t>
+                    </m:r>
+                    <m:r>
+                      <a:rPr sz="2285" i="1">
+                        <a:solidFill>
+                          <a:srgbClr val="000000"/>
+                        </a:solidFill>
+                        <a:latin typeface="Cambria Math" panose="02040503050406030204" pitchFamily="18" charset="0"/>
+                      </a:rPr>
+                      <m:t>1</m:t>
+                    </m:r>
+                    <m:r>
+                      <a:rPr sz="2285" i="1">
+                        <a:solidFill>
+                          <a:srgbClr val="000000"/>
+                        </a:solidFill>
+                        <a:latin typeface="Cambria Math" panose="02040503050406030204" pitchFamily="18" charset="0"/>
+                      </a:rPr>
+                      <m:t>−</m:t>
                     </m:r>
                     <m:d>
                       <m:dPr>
@@ -12224,7 +12599,34 @@
                             </a:solidFill>
                             <a:latin typeface="Cambria Math" panose="02040503050406030204" pitchFamily="18" charset="0"/>
                           </a:rPr>
-                          <m:t>(0/46</m:t>
+                          <m:t>(</m:t>
+                        </m:r>
+                        <m:r>
+                          <a:rPr sz="2285" i="1">
+                            <a:solidFill>
+                              <a:srgbClr val="000000"/>
+                            </a:solidFill>
+                            <a:latin typeface="Cambria Math" panose="02040503050406030204" pitchFamily="18" charset="0"/>
+                          </a:rPr>
+                          <m:t>0</m:t>
+                        </m:r>
+                        <m:r>
+                          <a:rPr sz="2285" i="1">
+                            <a:solidFill>
+                              <a:srgbClr val="000000"/>
+                            </a:solidFill>
+                            <a:latin typeface="Cambria Math" panose="02040503050406030204" pitchFamily="18" charset="0"/>
+                          </a:rPr>
+                          <m:t>/</m:t>
+                        </m:r>
+                        <m:r>
+                          <a:rPr sz="2285" i="1">
+                            <a:solidFill>
+                              <a:srgbClr val="000000"/>
+                            </a:solidFill>
+                            <a:latin typeface="Cambria Math" panose="02040503050406030204" pitchFamily="18" charset="0"/>
+                          </a:rPr>
+                          <m:t>46</m:t>
                         </m:r>
                         <m:sSup>
                           <m:sSupPr>
@@ -12267,7 +12669,34 @@
                             </a:solidFill>
                             <a:latin typeface="Cambria Math" panose="02040503050406030204" pitchFamily="18" charset="0"/>
                           </a:rPr>
-                          <m:t>+(1/46</m:t>
+                          <m:t>+(</m:t>
+                        </m:r>
+                        <m:r>
+                          <a:rPr sz="2285" i="1">
+                            <a:solidFill>
+                              <a:srgbClr val="000000"/>
+                            </a:solidFill>
+                            <a:latin typeface="Cambria Math" panose="02040503050406030204" pitchFamily="18" charset="0"/>
+                          </a:rPr>
+                          <m:t>1</m:t>
+                        </m:r>
+                        <m:r>
+                          <a:rPr sz="2285" i="1">
+                            <a:solidFill>
+                              <a:srgbClr val="000000"/>
+                            </a:solidFill>
+                            <a:latin typeface="Cambria Math" panose="02040503050406030204" pitchFamily="18" charset="0"/>
+                          </a:rPr>
+                          <m:t>/</m:t>
+                        </m:r>
+                        <m:r>
+                          <a:rPr sz="2285" i="1">
+                            <a:solidFill>
+                              <a:srgbClr val="000000"/>
+                            </a:solidFill>
+                            <a:latin typeface="Cambria Math" panose="02040503050406030204" pitchFamily="18" charset="0"/>
+                          </a:rPr>
+                          <m:t>46</m:t>
                         </m:r>
                         <m:sSup>
                           <m:sSupPr>
@@ -12310,7 +12739,34 @@
                             </a:solidFill>
                             <a:latin typeface="Cambria Math" panose="02040503050406030204" pitchFamily="18" charset="0"/>
                           </a:rPr>
-                          <m:t>+(45/46</m:t>
+                          <m:t>+(</m:t>
+                        </m:r>
+                        <m:r>
+                          <a:rPr sz="2285" i="1">
+                            <a:solidFill>
+                              <a:srgbClr val="000000"/>
+                            </a:solidFill>
+                            <a:latin typeface="Cambria Math" panose="02040503050406030204" pitchFamily="18" charset="0"/>
+                          </a:rPr>
+                          <m:t>45</m:t>
+                        </m:r>
+                        <m:r>
+                          <a:rPr sz="2285" i="1">
+                            <a:solidFill>
+                              <a:srgbClr val="000000"/>
+                            </a:solidFill>
+                            <a:latin typeface="Cambria Math" panose="02040503050406030204" pitchFamily="18" charset="0"/>
+                          </a:rPr>
+                          <m:t>/</m:t>
+                        </m:r>
+                        <m:r>
+                          <a:rPr sz="2285" i="1">
+                            <a:solidFill>
+                              <a:srgbClr val="000000"/>
+                            </a:solidFill>
+                            <a:latin typeface="Cambria Math" panose="02040503050406030204" pitchFamily="18" charset="0"/>
+                          </a:rPr>
+                          <m:t>46</m:t>
                         </m:r>
                         <m:sSup>
                           <m:sSupPr>
@@ -12362,7 +12818,34 @@
                         </a:solidFill>
                         <a:latin typeface="Cambria Math" panose="02040503050406030204" pitchFamily="18" charset="0"/>
                       </a:rPr>
-                      <m:t>=0.043</m:t>
+                      <m:t>=</m:t>
+                    </m:r>
+                    <m:r>
+                      <a:rPr sz="2285" i="1">
+                        <a:solidFill>
+                          <a:srgbClr val="000000"/>
+                        </a:solidFill>
+                        <a:latin typeface="Cambria Math" panose="02040503050406030204" pitchFamily="18" charset="0"/>
+                      </a:rPr>
+                      <m:t>0</m:t>
+                    </m:r>
+                    <m:r>
+                      <a:rPr sz="2285" i="1">
+                        <a:solidFill>
+                          <a:srgbClr val="000000"/>
+                        </a:solidFill>
+                        <a:latin typeface="Cambria Math" panose="02040503050406030204" pitchFamily="18" charset="0"/>
+                      </a:rPr>
+                      <m:t>.</m:t>
+                    </m:r>
+                    <m:r>
+                      <a:rPr sz="2285" i="1">
+                        <a:solidFill>
+                          <a:srgbClr val="000000"/>
+                        </a:solidFill>
+                        <a:latin typeface="Cambria Math" panose="02040503050406030204" pitchFamily="18" charset="0"/>
+                      </a:rPr>
+                      <m:t>043</m:t>
                     </m:r>
                   </m:oMath>
                 </a14:m>
